--- a/reports/deck.pptx
+++ b/reports/deck.pptx
@@ -6,17 +6,15 @@
   </p:sldMasterIdLst>
   <p:sldIdLst>
     <p:sldId id="256" r:id="rId7"/>
-    <p:sldId id="257" r:id="rId8"/>
-    <p:sldId id="258" r:id="rId9"/>
-    <p:sldId id="259" r:id="rId10"/>
-    <p:sldId id="260" r:id="rId11"/>
-    <p:sldId id="261" r:id="rId12"/>
-    <p:sldId id="262" r:id="rId13"/>
-    <p:sldId id="263" r:id="rId14"/>
-    <p:sldId id="264" r:id="rId15"/>
-    <p:sldId id="265" r:id="rId16"/>
-    <p:sldId id="266" r:id="rId17"/>
-    <p:sldId id="267" r:id="rId18"/>
+    <p:sldId id="257" r:id="rId9"/>
+    <p:sldId id="258" r:id="rId10"/>
+    <p:sldId id="259" r:id="rId11"/>
+    <p:sldId id="260" r:id="rId12"/>
+    <p:sldId id="261" r:id="rId13"/>
+    <p:sldId id="262" r:id="rId14"/>
+    <p:sldId id="263" r:id="rId15"/>
+    <p:sldId id="264" r:id="rId16"/>
+    <p:sldId id="265" r:id="rId17"/>
   </p:sldIdLst>
   <p:sldSz cx="12191695" cy="6858000" type="screen4x3"/>
   <p:notesSz cx="6858000" cy="9144000"/>
@@ -116,6 +114,1106 @@
     </a:lvl9pPr>
   </p:defaultTextStyle>
 </p:presentation>
+</file>
+
+<file path=ppt/notesMasters/notesMaster1.xml><?xml version="1.0" encoding="utf-8"?>
+<p:notesMaster xmlns:a="http://schemas.openxmlformats.org/drawingml/2006/main" xmlns:p="http://schemas.openxmlformats.org/presentationml/2006/main" xmlns:r="http://schemas.openxmlformats.org/officeDocument/2006/relationships">
+  <p:cSld>
+    <p:bg>
+      <p:bgRef idx="1001">
+        <a:schemeClr val="bg1"/>
+      </p:bgRef>
+    </p:bg>
+    <p:spTree>
+      <p:nvGrpSpPr>
+        <p:cNvPr id="1" name=""/>
+        <p:cNvGrpSpPr/>
+        <p:nvPr/>
+      </p:nvGrpSpPr>
+      <p:grpSpPr>
+        <a:xfrm>
+          <a:off x="0" y="0"/>
+          <a:ext cx="0" cy="0"/>
+          <a:chOff x="0" y="0"/>
+          <a:chExt cx="0" cy="0"/>
+        </a:xfrm>
+      </p:grpSpPr>
+      <p:sp>
+        <p:nvSpPr>
+          <p:cNvPr id="2" name="Header Placeholder 1"/>
+          <p:cNvSpPr>
+            <a:spLocks noGrp="1"/>
+          </p:cNvSpPr>
+          <p:nvPr>
+            <p:ph type="hdr" sz="quarter"/>
+          </p:nvPr>
+        </p:nvSpPr>
+        <p:spPr>
+          <a:xfrm>
+            <a:off x="0" y="0"/>
+            <a:ext cx="2971800" cy="457200"/>
+          </a:xfrm>
+          <a:prstGeom prst="rect">
+            <a:avLst/>
+          </a:prstGeom>
+        </p:spPr>
+        <p:txBody>
+          <a:bodyPr vert="horz" lIns="91440" tIns="45720" rIns="91440" bIns="45720" rtlCol="0"/>
+          <a:lstStyle>
+            <a:lvl1pPr algn="l">
+              <a:defRPr sz="1200"/>
+            </a:lvl1pPr>
+          </a:lstStyle>
+          <a:p>
+            <a:endParaRPr lang="en-US"/>
+          </a:p>
+        </p:txBody>
+      </p:sp>
+      <p:sp>
+        <p:nvSpPr>
+          <p:cNvPr id="3" name="Date Placeholder 2"/>
+          <p:cNvSpPr>
+            <a:spLocks noGrp="1"/>
+          </p:cNvSpPr>
+          <p:nvPr>
+            <p:ph type="dt" idx="1"/>
+          </p:nvPr>
+        </p:nvSpPr>
+        <p:spPr>
+          <a:xfrm>
+            <a:off x="3884613" y="0"/>
+            <a:ext cx="2971800" cy="457200"/>
+          </a:xfrm>
+          <a:prstGeom prst="rect">
+            <a:avLst/>
+          </a:prstGeom>
+        </p:spPr>
+        <p:txBody>
+          <a:bodyPr vert="horz" lIns="91440" tIns="45720" rIns="91440" bIns="45720" rtlCol="0"/>
+          <a:lstStyle>
+            <a:lvl1pPr algn="r">
+              <a:defRPr sz="1200"/>
+            </a:lvl1pPr>
+          </a:lstStyle>
+          <a:p>
+            <a:fld id="{0F89C1C7-3DCD-1040-A9CF-14679D8B5DDD}" type="datetimeFigureOut">
+              <a:rPr lang="en-US" smtClean="0"/>
+              <a:t>10/17/16</a:t>
+            </a:fld>
+            <a:endParaRPr lang="en-US"/>
+          </a:p>
+        </p:txBody>
+      </p:sp>
+      <p:sp>
+        <p:nvSpPr>
+          <p:cNvPr id="4" name="Slide Image Placeholder 3"/>
+          <p:cNvSpPr>
+            <a:spLocks noGrp="1" noRot="1" noChangeAspect="1"/>
+          </p:cNvSpPr>
+          <p:nvPr>
+            <p:ph type="sldImg" idx="2"/>
+          </p:nvPr>
+        </p:nvSpPr>
+        <p:spPr>
+          <a:xfrm>
+            <a:off x="1143000" y="685800"/>
+            <a:ext cx="4572000" cy="3429000"/>
+          </a:xfrm>
+          <a:prstGeom prst="rect">
+            <a:avLst/>
+          </a:prstGeom>
+          <a:noFill/>
+          <a:ln w="12700">
+            <a:solidFill>
+              <a:prstClr val="black"/>
+            </a:solidFill>
+          </a:ln>
+        </p:spPr>
+        <p:txBody>
+          <a:bodyPr vert="horz" lIns="91440" tIns="45720" rIns="91440" bIns="45720" rtlCol="0" anchor="ctr"/>
+          <a:lstStyle/>
+          <a:p>
+            <a:endParaRPr lang="en-US"/>
+          </a:p>
+        </p:txBody>
+      </p:sp>
+      <p:sp>
+        <p:nvSpPr>
+          <p:cNvPr id="5" name="Notes Placeholder 4"/>
+          <p:cNvSpPr>
+            <a:spLocks noGrp="1"/>
+          </p:cNvSpPr>
+          <p:nvPr>
+            <p:ph type="body" sz="quarter" idx="3"/>
+          </p:nvPr>
+        </p:nvSpPr>
+        <p:spPr>
+          <a:xfrm>
+            <a:off x="685800" y="4343400"/>
+            <a:ext cx="5486400" cy="4114800"/>
+          </a:xfrm>
+          <a:prstGeom prst="rect">
+            <a:avLst/>
+          </a:prstGeom>
+        </p:spPr>
+        <p:txBody>
+          <a:bodyPr vert="horz" lIns="91440" tIns="45720" rIns="91440" bIns="45720" rtlCol="0"/>
+          <a:lstStyle/>
+          <a:p>
+            <a:pPr lvl="0"/>
+            <a:r>
+              <a:rPr lang="en-US" smtClean="0"/>
+              <a:t>Click to edit Master text styles</a:t>
+            </a:r>
+          </a:p>
+          <a:p>
+            <a:pPr lvl="1"/>
+            <a:r>
+              <a:rPr lang="en-US" smtClean="0"/>
+              <a:t>Second level</a:t>
+            </a:r>
+          </a:p>
+          <a:p>
+            <a:pPr lvl="2"/>
+            <a:r>
+              <a:rPr lang="en-US" smtClean="0"/>
+              <a:t>Third level</a:t>
+            </a:r>
+          </a:p>
+          <a:p>
+            <a:pPr lvl="3"/>
+            <a:r>
+              <a:rPr lang="en-US" smtClean="0"/>
+              <a:t>Fourth level</a:t>
+            </a:r>
+          </a:p>
+          <a:p>
+            <a:pPr lvl="4"/>
+            <a:r>
+              <a:rPr lang="en-US" smtClean="0"/>
+              <a:t>Fifth level</a:t>
+            </a:r>
+            <a:endParaRPr lang="en-US"/>
+          </a:p>
+        </p:txBody>
+      </p:sp>
+      <p:sp>
+        <p:nvSpPr>
+          <p:cNvPr id="6" name="Footer Placeholder 5"/>
+          <p:cNvSpPr>
+            <a:spLocks noGrp="1"/>
+          </p:cNvSpPr>
+          <p:nvPr>
+            <p:ph type="ftr" sz="quarter" idx="4"/>
+          </p:nvPr>
+        </p:nvSpPr>
+        <p:spPr>
+          <a:xfrm>
+            <a:off x="0" y="8685213"/>
+            <a:ext cx="2971800" cy="457200"/>
+          </a:xfrm>
+          <a:prstGeom prst="rect">
+            <a:avLst/>
+          </a:prstGeom>
+        </p:spPr>
+        <p:txBody>
+          <a:bodyPr vert="horz" lIns="91440" tIns="45720" rIns="91440" bIns="45720" rtlCol="0" anchor="b"/>
+          <a:lstStyle>
+            <a:lvl1pPr algn="l">
+              <a:defRPr sz="1200"/>
+            </a:lvl1pPr>
+          </a:lstStyle>
+          <a:p>
+            <a:endParaRPr lang="en-US"/>
+          </a:p>
+        </p:txBody>
+      </p:sp>
+      <p:sp>
+        <p:nvSpPr>
+          <p:cNvPr id="7" name="Slide Number Placeholder 6"/>
+          <p:cNvSpPr>
+            <a:spLocks noGrp="1"/>
+          </p:cNvSpPr>
+          <p:nvPr>
+            <p:ph type="sldNum" sz="quarter" idx="5"/>
+          </p:nvPr>
+        </p:nvSpPr>
+        <p:spPr>
+          <a:xfrm>
+            <a:off x="3884613" y="8685213"/>
+            <a:ext cx="2971800" cy="457200"/>
+          </a:xfrm>
+          <a:prstGeom prst="rect">
+            <a:avLst/>
+          </a:prstGeom>
+        </p:spPr>
+        <p:txBody>
+          <a:bodyPr vert="horz" lIns="91440" tIns="45720" rIns="91440" bIns="45720" rtlCol="0" anchor="b"/>
+          <a:lstStyle>
+            <a:lvl1pPr algn="r">
+              <a:defRPr sz="1200"/>
+            </a:lvl1pPr>
+          </a:lstStyle>
+          <a:p>
+            <a:fld id="{BB5E49A5-4136-284D-997B-48E1D791AD67}" type="slidenum">
+              <a:rPr lang="en-US" smtClean="0"/>
+              <a:t>‹#›</a:t>
+            </a:fld>
+            <a:endParaRPr lang="en-US"/>
+          </a:p>
+        </p:txBody>
+      </p:sp>
+    </p:spTree>
+    <p:extLst>
+      <p:ext uri="{BB962C8B-B14F-4D97-AF65-F5344CB8AC3E}">
+        <p14:creationId xmlns:p14="http://schemas.microsoft.com/office/powerpoint/2010/main" val="2623252185"/>
+      </p:ext>
+    </p:extLst>
+  </p:cSld>
+  <p:clrMap bg1="lt1" tx1="dk1" bg2="lt2" tx2="dk2" accent1="accent1" accent2="accent2" accent3="accent3" accent4="accent4" accent5="accent5" accent6="accent6" hlink="hlink" folHlink="folHlink"/>
+  <p:notesStyle>
+    <a:lvl1pPr marL="0" algn="l" defTabSz="457200" rtl="0" eaLnBrk="1" latinLnBrk="0" hangingPunct="1">
+      <a:defRPr sz="1200" kern="1200">
+        <a:solidFill>
+          <a:schemeClr val="tx1"/>
+        </a:solidFill>
+        <a:latin typeface="+mn-lt"/>
+        <a:ea typeface="+mn-ea"/>
+        <a:cs typeface="+mn-cs"/>
+      </a:defRPr>
+    </a:lvl1pPr>
+    <a:lvl2pPr marL="457200" algn="l" defTabSz="457200" rtl="0" eaLnBrk="1" latinLnBrk="0" hangingPunct="1">
+      <a:defRPr sz="1200" kern="1200">
+        <a:solidFill>
+          <a:schemeClr val="tx1"/>
+        </a:solidFill>
+        <a:latin typeface="+mn-lt"/>
+        <a:ea typeface="+mn-ea"/>
+        <a:cs typeface="+mn-cs"/>
+      </a:defRPr>
+    </a:lvl2pPr>
+    <a:lvl3pPr marL="914400" algn="l" defTabSz="457200" rtl="0" eaLnBrk="1" latinLnBrk="0" hangingPunct="1">
+      <a:defRPr sz="1200" kern="1200">
+        <a:solidFill>
+          <a:schemeClr val="tx1"/>
+        </a:solidFill>
+        <a:latin typeface="+mn-lt"/>
+        <a:ea typeface="+mn-ea"/>
+        <a:cs typeface="+mn-cs"/>
+      </a:defRPr>
+    </a:lvl3pPr>
+    <a:lvl4pPr marL="1371600" algn="l" defTabSz="457200" rtl="0" eaLnBrk="1" latinLnBrk="0" hangingPunct="1">
+      <a:defRPr sz="1200" kern="1200">
+        <a:solidFill>
+          <a:schemeClr val="tx1"/>
+        </a:solidFill>
+        <a:latin typeface="+mn-lt"/>
+        <a:ea typeface="+mn-ea"/>
+        <a:cs typeface="+mn-cs"/>
+      </a:defRPr>
+    </a:lvl4pPr>
+    <a:lvl5pPr marL="1828800" algn="l" defTabSz="457200" rtl="0" eaLnBrk="1" latinLnBrk="0" hangingPunct="1">
+      <a:defRPr sz="1200" kern="1200">
+        <a:solidFill>
+          <a:schemeClr val="tx1"/>
+        </a:solidFill>
+        <a:latin typeface="+mn-lt"/>
+        <a:ea typeface="+mn-ea"/>
+        <a:cs typeface="+mn-cs"/>
+      </a:defRPr>
+    </a:lvl5pPr>
+    <a:lvl6pPr marL="2286000" algn="l" defTabSz="457200" rtl="0" eaLnBrk="1" latinLnBrk="0" hangingPunct="1">
+      <a:defRPr sz="1200" kern="1200">
+        <a:solidFill>
+          <a:schemeClr val="tx1"/>
+        </a:solidFill>
+        <a:latin typeface="+mn-lt"/>
+        <a:ea typeface="+mn-ea"/>
+        <a:cs typeface="+mn-cs"/>
+      </a:defRPr>
+    </a:lvl6pPr>
+    <a:lvl7pPr marL="2743200" algn="l" defTabSz="457200" rtl="0" eaLnBrk="1" latinLnBrk="0" hangingPunct="1">
+      <a:defRPr sz="1200" kern="1200">
+        <a:solidFill>
+          <a:schemeClr val="tx1"/>
+        </a:solidFill>
+        <a:latin typeface="+mn-lt"/>
+        <a:ea typeface="+mn-ea"/>
+        <a:cs typeface="+mn-cs"/>
+      </a:defRPr>
+    </a:lvl7pPr>
+    <a:lvl8pPr marL="3200400" algn="l" defTabSz="457200" rtl="0" eaLnBrk="1" latinLnBrk="0" hangingPunct="1">
+      <a:defRPr sz="1200" kern="1200">
+        <a:solidFill>
+          <a:schemeClr val="tx1"/>
+        </a:solidFill>
+        <a:latin typeface="+mn-lt"/>
+        <a:ea typeface="+mn-ea"/>
+        <a:cs typeface="+mn-cs"/>
+      </a:defRPr>
+    </a:lvl8pPr>
+    <a:lvl9pPr marL="3657600" algn="l" defTabSz="457200" rtl="0" eaLnBrk="1" latinLnBrk="0" hangingPunct="1">
+      <a:defRPr sz="1200" kern="1200">
+        <a:solidFill>
+          <a:schemeClr val="tx1"/>
+        </a:solidFill>
+        <a:latin typeface="+mn-lt"/>
+        <a:ea typeface="+mn-ea"/>
+        <a:cs typeface="+mn-cs"/>
+      </a:defRPr>
+    </a:lvl9pPr>
+  </p:notesStyle>
+</p:notesMaster>
+</file>
+
+<file path=ppt/notesSlides/notesSlide1.xml><?xml version="1.0" encoding="utf-8"?>
+<p:notes xmlns:a="http://schemas.openxmlformats.org/drawingml/2006/main" xmlns:p="http://schemas.openxmlformats.org/presentationml/2006/main" xmlns:r="http://schemas.openxmlformats.org/officeDocument/2006/relationships">
+  <p:cSld>
+    <p:spTree>
+      <p:nvGrpSpPr>
+        <p:cNvPr id="1" name=""/>
+        <p:cNvGrpSpPr/>
+        <p:nvPr/>
+      </p:nvGrpSpPr>
+      <p:grpSpPr>
+        <a:xfrm>
+          <a:off x="0" y="0"/>
+          <a:ext cx="0" cy="0"/>
+          <a:chOff x="0" y="0"/>
+          <a:chExt cx="0" cy="0"/>
+        </a:xfrm>
+      </p:grpSpPr>
+      <p:sp>
+        <p:nvSpPr>
+          <p:cNvPr id="2" name="Slide Image Placeholder 1"/>
+          <p:cNvSpPr>
+            <a:spLocks noGrp="1"/>
+          </p:cNvSpPr>
+          <p:nvPr>
+            <p:ph type="sldImg" idx="2"/>
+          </p:nvPr>
+        </p:nvSpPr>
+        <p:spPr/>
+      </p:sp>
+      <p:sp>
+        <p:nvSpPr>
+          <p:cNvPr id="3" name="Notes Placeholder 2"/>
+          <p:cNvSpPr>
+            <a:spLocks noGrp="1"/>
+          </p:cNvSpPr>
+          <p:nvPr>
+            <p:ph type="body" idx="3" sz="quarter"/>
+          </p:nvPr>
+        </p:nvSpPr>
+        <p:spPr/>
+        <p:txBody>
+          <a:bodyPr/>
+          <a:lstStyle/>
+          <a:p>
+            <a:r>
+              <a:t>0:00–0:20</a:t>
+            </a:r>
+          </a:p>
+          <a:p>
+            <a:r>
+              <a:t>Плавающий мусор в море со спутника — это пятна в один-два пикселя: медианное пятно в разметке MARIDA — 2 пикселя по 10 метров. Спутник не взвесит пластик. Но он может подсказать, куда в первую очередь отправить катер. Кейс просит найти пятна, дать показатель по акватории и сделать это быстро. Мы сделали все три.</a:t>
+            </a:r>
+          </a:p>
+        </p:txBody>
+      </p:sp>
+      <p:sp>
+        <p:nvSpPr>
+          <p:cNvPr id="4" name="Slide Number Placeholder 3"/>
+          <p:cNvSpPr>
+            <a:spLocks noGrp="1"/>
+          </p:cNvSpPr>
+          <p:nvPr>
+            <p:ph type="sldNum" idx="5" sz="quarter"/>
+          </p:nvPr>
+        </p:nvSpPr>
+        <p:spPr/>
+      </p:sp>
+    </p:spTree>
+  </p:cSld>
+  <p:clrMapOvr>
+    <a:masterClrMapping/>
+  </p:clrMapOvr>
+</p:notes>
+</file>
+
+<file path=ppt/notesSlides/notesSlide10.xml><?xml version="1.0" encoding="utf-8"?>
+<p:notes xmlns:a="http://schemas.openxmlformats.org/drawingml/2006/main" xmlns:p="http://schemas.openxmlformats.org/presentationml/2006/main" xmlns:r="http://schemas.openxmlformats.org/officeDocument/2006/relationships">
+  <p:cSld>
+    <p:spTree>
+      <p:nvGrpSpPr>
+        <p:cNvPr id="1" name=""/>
+        <p:cNvGrpSpPr/>
+        <p:nvPr/>
+      </p:nvGrpSpPr>
+      <p:grpSpPr>
+        <a:xfrm>
+          <a:off x="0" y="0"/>
+          <a:ext cx="0" cy="0"/>
+          <a:chOff x="0" y="0"/>
+          <a:chExt cx="0" cy="0"/>
+        </a:xfrm>
+      </p:grpSpPr>
+      <p:sp>
+        <p:nvSpPr>
+          <p:cNvPr id="2" name="Slide Image Placeholder 1"/>
+          <p:cNvSpPr>
+            <a:spLocks noGrp="1"/>
+          </p:cNvSpPr>
+          <p:nvPr>
+            <p:ph type="sldImg" idx="2"/>
+          </p:nvPr>
+        </p:nvSpPr>
+        <p:spPr/>
+      </p:sp>
+      <p:sp>
+        <p:nvSpPr>
+          <p:cNvPr id="3" name="Notes Placeholder 2"/>
+          <p:cNvSpPr>
+            <a:spLocks noGrp="1"/>
+          </p:cNvSpPr>
+          <p:nvPr>
+            <p:ph type="body" idx="3" sz="quarter"/>
+          </p:nvPr>
+        </p:nvSpPr>
+        <p:spPr/>
+        <p:txBody>
+          <a:bodyPr/>
+          <a:lstStyle/>
+          <a:p>
+            <a:r>
+              <a:t>3:35–4:00</a:t>
+            </a:r>
+          </a:p>
+          <a:p>
+            <a:r>
+              <a:t>Итог. Модель находит 92 % мусора на новых снимках и держит F1 0,854 на невиданном регионе. Карта говорит, куда плыть, и объясняет почему. Дальше — разметка на L2A, больше дат на район и результаты обследований обратно в обучение. Спасибо, готовы к вопросам.</a:t>
+            </a:r>
+          </a:p>
+        </p:txBody>
+      </p:sp>
+      <p:sp>
+        <p:nvSpPr>
+          <p:cNvPr id="4" name="Slide Number Placeholder 3"/>
+          <p:cNvSpPr>
+            <a:spLocks noGrp="1"/>
+          </p:cNvSpPr>
+          <p:nvPr>
+            <p:ph type="sldNum" idx="5" sz="quarter"/>
+          </p:nvPr>
+        </p:nvSpPr>
+        <p:spPr/>
+      </p:sp>
+    </p:spTree>
+  </p:cSld>
+  <p:clrMapOvr>
+    <a:masterClrMapping/>
+  </p:clrMapOvr>
+</p:notes>
+</file>
+
+<file path=ppt/notesSlides/notesSlide2.xml><?xml version="1.0" encoding="utf-8"?>
+<p:notes xmlns:a="http://schemas.openxmlformats.org/drawingml/2006/main" xmlns:p="http://schemas.openxmlformats.org/presentationml/2006/main" xmlns:r="http://schemas.openxmlformats.org/officeDocument/2006/relationships">
+  <p:cSld>
+    <p:spTree>
+      <p:nvGrpSpPr>
+        <p:cNvPr id="1" name=""/>
+        <p:cNvGrpSpPr/>
+        <p:nvPr/>
+      </p:nvGrpSpPr>
+      <p:grpSpPr>
+        <a:xfrm>
+          <a:off x="0" y="0"/>
+          <a:ext cx="0" cy="0"/>
+          <a:chOff x="0" y="0"/>
+          <a:chExt cx="0" cy="0"/>
+        </a:xfrm>
+      </p:grpSpPr>
+      <p:sp>
+        <p:nvSpPr>
+          <p:cNvPr id="2" name="Slide Image Placeholder 1"/>
+          <p:cNvSpPr>
+            <a:spLocks noGrp="1"/>
+          </p:cNvSpPr>
+          <p:nvPr>
+            <p:ph type="sldImg" idx="2"/>
+          </p:nvPr>
+        </p:nvSpPr>
+        <p:spPr/>
+      </p:sp>
+      <p:sp>
+        <p:nvSpPr>
+          <p:cNvPr id="3" name="Notes Placeholder 2"/>
+          <p:cNvSpPr>
+            <a:spLocks noGrp="1"/>
+          </p:cNvSpPr>
+          <p:nvPr>
+            <p:ph type="body" idx="3" sz="quarter"/>
+          </p:nvPr>
+        </p:nvSpPr>
+        <p:spPr/>
+        <p:txBody>
+          <a:bodyPr/>
+          <a:lstStyle/>
+          <a:p>
+            <a:r>
+              <a:t>0:20–0:40</a:t>
+            </a:r>
+          </a:p>
+          <a:p>
+            <a:r>
+              <a:t>Данные. Размеченного мусора мало: в MARIDA всего 3 399 пикселей. Поэтому добавили MADOS — ещё 118 сцен, и выкинули из него 16 сцен, которые пересекаются с проверочной выборкой. Карту строим на 29 живых снимках Sentinel-2 в 12 районах, 17 из них — 2025–2026 годов.</a:t>
+            </a:r>
+          </a:p>
+        </p:txBody>
+      </p:sp>
+      <p:sp>
+        <p:nvSpPr>
+          <p:cNvPr id="4" name="Slide Number Placeholder 3"/>
+          <p:cNvSpPr>
+            <a:spLocks noGrp="1"/>
+          </p:cNvSpPr>
+          <p:nvPr>
+            <p:ph type="sldNum" idx="5" sz="quarter"/>
+          </p:nvPr>
+        </p:nvSpPr>
+        <p:spPr/>
+      </p:sp>
+    </p:spTree>
+  </p:cSld>
+  <p:clrMapOvr>
+    <a:masterClrMapping/>
+  </p:clrMapOvr>
+</p:notes>
+</file>
+
+<file path=ppt/notesSlides/notesSlide3.xml><?xml version="1.0" encoding="utf-8"?>
+<p:notes xmlns:a="http://schemas.openxmlformats.org/drawingml/2006/main" xmlns:p="http://schemas.openxmlformats.org/presentationml/2006/main" xmlns:r="http://schemas.openxmlformats.org/officeDocument/2006/relationships">
+  <p:cSld>
+    <p:spTree>
+      <p:nvGrpSpPr>
+        <p:cNvPr id="1" name=""/>
+        <p:cNvGrpSpPr/>
+        <p:nvPr/>
+      </p:nvGrpSpPr>
+      <p:grpSpPr>
+        <a:xfrm>
+          <a:off x="0" y="0"/>
+          <a:ext cx="0" cy="0"/>
+          <a:chOff x="0" y="0"/>
+          <a:chExt cx="0" cy="0"/>
+        </a:xfrm>
+      </p:grpSpPr>
+      <p:sp>
+        <p:nvSpPr>
+          <p:cNvPr id="2" name="Slide Image Placeholder 1"/>
+          <p:cNvSpPr>
+            <a:spLocks noGrp="1"/>
+          </p:cNvSpPr>
+          <p:nvPr>
+            <p:ph type="sldImg" idx="2"/>
+          </p:nvPr>
+        </p:nvSpPr>
+        <p:spPr/>
+      </p:sp>
+      <p:sp>
+        <p:nvSpPr>
+          <p:cNvPr id="3" name="Notes Placeholder 2"/>
+          <p:cNvSpPr>
+            <a:spLocks noGrp="1"/>
+          </p:cNvSpPr>
+          <p:nvPr>
+            <p:ph type="body" idx="3" sz="quarter"/>
+          </p:nvPr>
+        </p:nvSpPr>
+        <p:spPr/>
+        <p:txBody>
+          <a:bodyPr/>
+          <a:lstStyle/>
+          <a:p>
+            <a:r>
+              <a:t>0:40–1:05</a:t>
+            </a:r>
+          </a:p>
+          <a:p>
+            <a:r>
+              <a:t>Метод. Пятно — два пикселя, контекста почти нет, решает спектр. Поэтому пиксельный LightGBM: каналы, индексы и статистики окна вокруг пикселя, всего 48 признаков. UNet мы обучили и сравнили по одному правилу: 0,891 против 0,923 у бустинга, UNet отклонён. MADOS принят: плюс 0,015 F1, и интервал по сценам выше нуля. [пауза]</a:t>
+            </a:r>
+          </a:p>
+        </p:txBody>
+      </p:sp>
+      <p:sp>
+        <p:nvSpPr>
+          <p:cNvPr id="4" name="Slide Number Placeholder 3"/>
+          <p:cNvSpPr>
+            <a:spLocks noGrp="1"/>
+          </p:cNvSpPr>
+          <p:nvPr>
+            <p:ph type="sldNum" idx="5" sz="quarter"/>
+          </p:nvPr>
+        </p:nvSpPr>
+        <p:spPr/>
+      </p:sp>
+    </p:spTree>
+  </p:cSld>
+  <p:clrMapOvr>
+    <a:masterClrMapping/>
+  </p:clrMapOvr>
+</p:notes>
+</file>
+
+<file path=ppt/notesSlides/notesSlide4.xml><?xml version="1.0" encoding="utf-8"?>
+<p:notes xmlns:a="http://schemas.openxmlformats.org/drawingml/2006/main" xmlns:p="http://schemas.openxmlformats.org/presentationml/2006/main" xmlns:r="http://schemas.openxmlformats.org/officeDocument/2006/relationships">
+  <p:cSld>
+    <p:spTree>
+      <p:nvGrpSpPr>
+        <p:cNvPr id="1" name=""/>
+        <p:cNvGrpSpPr/>
+        <p:nvPr/>
+      </p:nvGrpSpPr>
+      <p:grpSpPr>
+        <a:xfrm>
+          <a:off x="0" y="0"/>
+          <a:ext cx="0" cy="0"/>
+          <a:chOff x="0" y="0"/>
+          <a:chExt cx="0" cy="0"/>
+        </a:xfrm>
+      </p:grpSpPr>
+      <p:sp>
+        <p:nvSpPr>
+          <p:cNvPr id="2" name="Slide Image Placeholder 1"/>
+          <p:cNvSpPr>
+            <a:spLocks noGrp="1"/>
+          </p:cNvSpPr>
+          <p:nvPr>
+            <p:ph type="sldImg" idx="2"/>
+          </p:nvPr>
+        </p:nvSpPr>
+        <p:spPr/>
+      </p:sp>
+      <p:sp>
+        <p:nvSpPr>
+          <p:cNvPr id="3" name="Notes Placeholder 2"/>
+          <p:cNvSpPr>
+            <a:spLocks noGrp="1"/>
+          </p:cNvSpPr>
+          <p:nvPr>
+            <p:ph type="body" idx="3" sz="quarter"/>
+          </p:nvPr>
+        </p:nvSpPr>
+        <p:spPr/>
+        <p:txBody>
+          <a:bodyPr/>
+          <a:lstStyle/>
+          <a:p>
+            <a:r>
+              <a:t>1:05–1:35</a:t>
+            </a:r>
+          </a:p>
+          <a:p>
+            <a:r>
+              <a:t>Качество — честно. На проверочной выборке MARIDA, это новые снимки тех же районов, модель находит 92 % размеченного мусора, и 93 % её находок верны. F1 0,923. Интервал по сценам — от 0,877 до 0,970: сцен мало, и мы это показываем. Самая строгая проверка — целый регион убран из обучения: F1 0,854. Столько и ждём на новом месте. Test MARIDA мы не открывали: он будет посчитан один раз, на финальной модели.</a:t>
+            </a:r>
+          </a:p>
+        </p:txBody>
+      </p:sp>
+      <p:sp>
+        <p:nvSpPr>
+          <p:cNvPr id="4" name="Slide Number Placeholder 3"/>
+          <p:cNvSpPr>
+            <a:spLocks noGrp="1"/>
+          </p:cNvSpPr>
+          <p:nvPr>
+            <p:ph type="sldNum" idx="5" sz="quarter"/>
+          </p:nvPr>
+        </p:nvSpPr>
+        <p:spPr/>
+      </p:sp>
+    </p:spTree>
+  </p:cSld>
+  <p:clrMapOvr>
+    <a:masterClrMapping/>
+  </p:clrMapOvr>
+</p:notes>
+</file>
+
+<file path=ppt/notesSlides/notesSlide5.xml><?xml version="1.0" encoding="utf-8"?>
+<p:notes xmlns:a="http://schemas.openxmlformats.org/drawingml/2006/main" xmlns:p="http://schemas.openxmlformats.org/presentationml/2006/main" xmlns:r="http://schemas.openxmlformats.org/officeDocument/2006/relationships">
+  <p:cSld>
+    <p:spTree>
+      <p:nvGrpSpPr>
+        <p:cNvPr id="1" name=""/>
+        <p:cNvGrpSpPr/>
+        <p:nvPr/>
+      </p:nvGrpSpPr>
+      <p:grpSpPr>
+        <a:xfrm>
+          <a:off x="0" y="0"/>
+          <a:ext cx="0" cy="0"/>
+          <a:chOff x="0" y="0"/>
+          <a:chExt cx="0" cy="0"/>
+        </a:xfrm>
+      </p:grpSpPr>
+      <p:sp>
+        <p:nvSpPr>
+          <p:cNvPr id="2" name="Slide Image Placeholder 1"/>
+          <p:cNvSpPr>
+            <a:spLocks noGrp="1"/>
+          </p:cNvSpPr>
+          <p:nvPr>
+            <p:ph type="sldImg" idx="2"/>
+          </p:nvPr>
+        </p:nvSpPr>
+        <p:spPr/>
+      </p:sp>
+      <p:sp>
+        <p:nvSpPr>
+          <p:cNvPr id="3" name="Notes Placeholder 2"/>
+          <p:cNvSpPr>
+            <a:spLocks noGrp="1"/>
+          </p:cNvSpPr>
+          <p:nvPr>
+            <p:ph type="body" idx="3" sz="quarter"/>
+          </p:nvPr>
+        </p:nvSpPr>
+        <p:spPr/>
+        <p:txBody>
+          <a:bodyPr/>
+          <a:lstStyle/>
+          <a:p>
+            <a:r>
+              <a:t>1:35–1:50</a:t>
+            </a:r>
+          </a:p>
+          <a:p>
+            <a:r>
+              <a:t>Показатель на карте — доля видимой воды с признаками мусора, в промилле, по гексагонам H3 около 0,7 км². Ячейка, видимая меньше чем наполовину, — серая, «нет данных», а не ноль. Это индекс по снимку, не масса пластика. Покажу вживую. [Alt+Tab в браузер, пауза 2 с]</a:t>
+            </a:r>
+          </a:p>
+        </p:txBody>
+      </p:sp>
+      <p:sp>
+        <p:nvSpPr>
+          <p:cNvPr id="4" name="Slide Number Placeholder 3"/>
+          <p:cNvSpPr>
+            <a:spLocks noGrp="1"/>
+          </p:cNvSpPr>
+          <p:nvPr>
+            <p:ph type="sldNum" idx="5" sz="quarter"/>
+          </p:nvPr>
+        </p:nvSpPr>
+        <p:spPr/>
+      </p:sp>
+    </p:spTree>
+  </p:cSld>
+  <p:clrMapOvr>
+    <a:masterClrMapping/>
+  </p:clrMapOvr>
+</p:notes>
+</file>
+
+<file path=ppt/notesSlides/notesSlide6.xml><?xml version="1.0" encoding="utf-8"?>
+<p:notes xmlns:a="http://schemas.openxmlformats.org/drawingml/2006/main" xmlns:p="http://schemas.openxmlformats.org/presentationml/2006/main" xmlns:r="http://schemas.openxmlformats.org/officeDocument/2006/relationships">
+  <p:cSld>
+    <p:spTree>
+      <p:nvGrpSpPr>
+        <p:cNvPr id="1" name=""/>
+        <p:cNvGrpSpPr/>
+        <p:nvPr/>
+      </p:nvGrpSpPr>
+      <p:grpSpPr>
+        <a:xfrm>
+          <a:off x="0" y="0"/>
+          <a:ext cx="0" cy="0"/>
+          <a:chOff x="0" y="0"/>
+          <a:chExt cx="0" cy="0"/>
+        </a:xfrm>
+      </p:grpSpPr>
+      <p:sp>
+        <p:nvSpPr>
+          <p:cNvPr id="2" name="Slide Image Placeholder 1"/>
+          <p:cNvSpPr>
+            <a:spLocks noGrp="1"/>
+          </p:cNvSpPr>
+          <p:nvPr>
+            <p:ph type="sldImg" idx="2"/>
+          </p:nvPr>
+        </p:nvSpPr>
+        <p:spPr/>
+      </p:sp>
+      <p:sp>
+        <p:nvSpPr>
+          <p:cNvPr id="3" name="Notes Placeholder 2"/>
+          <p:cNvSpPr>
+            <a:spLocks noGrp="1"/>
+          </p:cNvSpPr>
+          <p:nvPr>
+            <p:ph type="body" idx="3" sz="quarter"/>
+          </p:nvPr>
+        </p:nvSpPr>
+        <p:spPr/>
+        <p:txBody>
+          <a:bodyPr/>
+          <a:lstStyle/>
+          <a:p>
+            <a:r>
+              <a:t>1:50–2:20</a:t>
+            </a:r>
+          </a:p>
+          <a:p>
+            <a:r>
+              <a:t>[Обзор уже на экране] 12 районов, 29 дат, справа рейтинг «где искать в первую очередь». [клик: Манильский залив] Снимок Sentinel-2, кольца — найденные пятна. На живых снимках L2A основной слой — открытая модель marinedebrisdetector, наша модель — второй слой. [клик по крупному пятну] Карточка находки: вырезка снимка, площадь помеченной области, уверенность модели.</a:t>
+            </a:r>
+          </a:p>
+        </p:txBody>
+      </p:sp>
+      <p:sp>
+        <p:nvSpPr>
+          <p:cNvPr id="4" name="Slide Number Placeholder 3"/>
+          <p:cNvSpPr>
+            <a:spLocks noGrp="1"/>
+          </p:cNvSpPr>
+          <p:nvPr>
+            <p:ph type="sldNum" idx="5" sz="quarter"/>
+          </p:nvPr>
+        </p:nvSpPr>
+        <p:spPr/>
+      </p:sp>
+    </p:spTree>
+  </p:cSld>
+  <p:clrMapOvr>
+    <a:masterClrMapping/>
+  </p:clrMapOvr>
+</p:notes>
+</file>
+
+<file path=ppt/notesSlides/notesSlide7.xml><?xml version="1.0" encoding="utf-8"?>
+<p:notes xmlns:a="http://schemas.openxmlformats.org/drawingml/2006/main" xmlns:p="http://schemas.openxmlformats.org/presentationml/2006/main" xmlns:r="http://schemas.openxmlformats.org/officeDocument/2006/relationships">
+  <p:cSld>
+    <p:spTree>
+      <p:nvGrpSpPr>
+        <p:cNvPr id="1" name=""/>
+        <p:cNvGrpSpPr/>
+        <p:nvPr/>
+      </p:nvGrpSpPr>
+      <p:grpSpPr>
+        <a:xfrm>
+          <a:off x="0" y="0"/>
+          <a:ext cx="0" cy="0"/>
+          <a:chOff x="0" y="0"/>
+          <a:chExt cx="0" cy="0"/>
+        </a:xfrm>
+      </p:grpSpPr>
+      <p:sp>
+        <p:nvSpPr>
+          <p:cNvPr id="2" name="Slide Image Placeholder 1"/>
+          <p:cNvSpPr>
+            <a:spLocks noGrp="1"/>
+          </p:cNvSpPr>
+          <p:nvPr>
+            <p:ph type="sldImg" idx="2"/>
+          </p:nvPr>
+        </p:nvSpPr>
+        <p:spPr/>
+      </p:sp>
+      <p:sp>
+        <p:nvSpPr>
+          <p:cNvPr id="3" name="Notes Placeholder 2"/>
+          <p:cNvSpPr>
+            <a:spLocks noGrp="1"/>
+          </p:cNvSpPr>
+          <p:nvPr>
+            <p:ph type="body" idx="3" sz="quarter"/>
+          </p:nvPr>
+        </p:nvSpPr>
+        <p:spPr/>
+        <p:txBody>
+          <a:bodyPr/>
+          <a:lstStyle/>
+          <a:p>
+            <a:r>
+              <a:t>2:20–2:45</a:t>
+            </a:r>
+          </a:p>
+          <a:p>
+            <a:r>
+              <a:t>[Слои → Приоритет обследования → клик по зоне №1] Зоны — ответ на вопрос «куда плыть». Каждая объясняет, почему она первая: пиксели с признаками, умноженные на уверенность и на повторяемость по датам. Двойное кольцо — уверенная находка: объект видят две разные модели в радиусе 20 метров, таких 200. Это согласие моделей, не проверка на месте.</a:t>
+            </a:r>
+          </a:p>
+        </p:txBody>
+      </p:sp>
+      <p:sp>
+        <p:nvSpPr>
+          <p:cNvPr id="4" name="Slide Number Placeholder 3"/>
+          <p:cNvSpPr>
+            <a:spLocks noGrp="1"/>
+          </p:cNvSpPr>
+          <p:nvPr>
+            <p:ph type="sldNum" idx="5" sz="quarter"/>
+          </p:nvPr>
+        </p:nvSpPr>
+        <p:spPr/>
+      </p:sp>
+    </p:spTree>
+  </p:cSld>
+  <p:clrMapOvr>
+    <a:masterClrMapping/>
+  </p:clrMapOvr>
+</p:notes>
+</file>
+
+<file path=ppt/notesSlides/notesSlide8.xml><?xml version="1.0" encoding="utf-8"?>
+<p:notes xmlns:a="http://schemas.openxmlformats.org/drawingml/2006/main" xmlns:p="http://schemas.openxmlformats.org/presentationml/2006/main" xmlns:r="http://schemas.openxmlformats.org/officeDocument/2006/relationships">
+  <p:cSld>
+    <p:spTree>
+      <p:nvGrpSpPr>
+        <p:cNvPr id="1" name=""/>
+        <p:cNvGrpSpPr/>
+        <p:nvPr/>
+      </p:nvGrpSpPr>
+      <p:grpSpPr>
+        <a:xfrm>
+          <a:off x="0" y="0"/>
+          <a:ext cx="0" cy="0"/>
+          <a:chOff x="0" y="0"/>
+          <a:chExt cx="0" cy="0"/>
+        </a:xfrm>
+      </p:grpSpPr>
+      <p:sp>
+        <p:nvSpPr>
+          <p:cNvPr id="2" name="Slide Image Placeholder 1"/>
+          <p:cNvSpPr>
+            <a:spLocks noGrp="1"/>
+          </p:cNvSpPr>
+          <p:nvPr>
+            <p:ph type="sldImg" idx="2"/>
+          </p:nvPr>
+        </p:nvSpPr>
+        <p:spPr/>
+      </p:sp>
+      <p:sp>
+        <p:nvSpPr>
+          <p:cNvPr id="3" name="Notes Placeholder 2"/>
+          <p:cNvSpPr>
+            <a:spLocks noGrp="1"/>
+          </p:cNvSpPr>
+          <p:nvPr>
+            <p:ph type="body" idx="3" sz="quarter"/>
+          </p:nvPr>
+        </p:nvSpPr>
+        <p:spPr/>
+        <p:txBody>
+          <a:bodyPr/>
+          <a:lstStyle/>
+          <a:p>
+            <a:r>
+              <a:t>2:45–3:05</a:t>
+            </a:r>
+          </a:p>
+          <a:p>
+            <a:r>
+              <a:t>[Слои → Дрейф 0→72 ч → ▶] Дрейф на 72 часа: OpenDrift, течения HYCOM, ветер GFS; сиреневое облако — разброс ветрового сноса. Это демонстрация, мы её не валидировали. [Alt+Tab в презентацию, набрать 9 и Enter]</a:t>
+            </a:r>
+          </a:p>
+        </p:txBody>
+      </p:sp>
+      <p:sp>
+        <p:nvSpPr>
+          <p:cNvPr id="4" name="Slide Number Placeholder 3"/>
+          <p:cNvSpPr>
+            <a:spLocks noGrp="1"/>
+          </p:cNvSpPr>
+          <p:nvPr>
+            <p:ph type="sldNum" idx="5" sz="quarter"/>
+          </p:nvPr>
+        </p:nvSpPr>
+        <p:spPr/>
+      </p:sp>
+    </p:spTree>
+  </p:cSld>
+  <p:clrMapOvr>
+    <a:masterClrMapping/>
+  </p:clrMapOvr>
+</p:notes>
+</file>
+
+<file path=ppt/notesSlides/notesSlide9.xml><?xml version="1.0" encoding="utf-8"?>
+<p:notes xmlns:a="http://schemas.openxmlformats.org/drawingml/2006/main" xmlns:p="http://schemas.openxmlformats.org/presentationml/2006/main" xmlns:r="http://schemas.openxmlformats.org/officeDocument/2006/relationships">
+  <p:cSld>
+    <p:spTree>
+      <p:nvGrpSpPr>
+        <p:cNvPr id="1" name=""/>
+        <p:cNvGrpSpPr/>
+        <p:nvPr/>
+      </p:nvGrpSpPr>
+      <p:grpSpPr>
+        <a:xfrm>
+          <a:off x="0" y="0"/>
+          <a:ext cx="0" cy="0"/>
+          <a:chOff x="0" y="0"/>
+          <a:chExt cx="0" cy="0"/>
+        </a:xfrm>
+      </p:grpSpPr>
+      <p:sp>
+        <p:nvSpPr>
+          <p:cNvPr id="2" name="Slide Image Placeholder 1"/>
+          <p:cNvSpPr>
+            <a:spLocks noGrp="1"/>
+          </p:cNvSpPr>
+          <p:nvPr>
+            <p:ph type="sldImg" idx="2"/>
+          </p:nvPr>
+        </p:nvSpPr>
+        <p:spPr/>
+      </p:sp>
+      <p:sp>
+        <p:nvSpPr>
+          <p:cNvPr id="3" name="Notes Placeholder 2"/>
+          <p:cNvSpPr>
+            <a:spLocks noGrp="1"/>
+          </p:cNvSpPr>
+          <p:nvPr>
+            <p:ph type="body" idx="3" sz="quarter"/>
+          </p:nvPr>
+        </p:nvSpPr>
+        <p:spPr/>
+        <p:txBody>
+          <a:bodyPr/>
+          <a:lstStyle/>
+          <a:p>
+            <a:r>
+              <a:t>3:05–3:35</a:t>
+            </a:r>
+          </a:p>
+          <a:p>
+            <a:r>
+              <a:t>Скорость. 300 чипов с холодного старта — 5,7 секунды на GPU и 21,4 на CPU, результат бит в бит тот же, что до ускорения. Ваш датасет подключаем тремя командами: разбор архива с отчётом о сомнениях, конвертация, обучение. Бустинг обучается за 4,5 секунды. Если каналов меньше, например только RGB, — переобучаем на доступных, потери мы заранее измерили.</a:t>
+            </a:r>
+          </a:p>
+        </p:txBody>
+      </p:sp>
+      <p:sp>
+        <p:nvSpPr>
+          <p:cNvPr id="4" name="Slide Number Placeholder 3"/>
+          <p:cNvSpPr>
+            <a:spLocks noGrp="1"/>
+          </p:cNvSpPr>
+          <p:nvPr>
+            <p:ph type="sldNum" idx="5" sz="quarter"/>
+          </p:nvPr>
+        </p:nvSpPr>
+        <p:spPr/>
+      </p:sp>
+    </p:spTree>
+  </p:cSld>
+  <p:clrMapOvr>
+    <a:masterClrMapping/>
+  </p:clrMapOvr>
+</p:notes>
 </file>
 
 <file path=ppt/slideLayouts/slideLayout1.xml><?xml version="1.0" encoding="utf-8"?>
@@ -3115,14 +4213,14 @@
         </p:nvSpPr>
         <p:spPr>
           <a:xfrm>
-            <a:off x="548640" y="502920"/>
-            <a:ext cx="73152" cy="384048"/>
+            <a:off x="548640" y="457200"/>
+            <a:ext cx="73152" cy="329184"/>
           </a:xfrm>
           <a:prstGeom prst="rect">
             <a:avLst/>
           </a:prstGeom>
           <a:solidFill>
-            <a:srgbClr val="FF6B5A"/>
+            <a:srgbClr val="FF6B4A"/>
           </a:solidFill>
           <a:ln>
             <a:noFill/>
@@ -3159,8 +4257,8 @@
         </p:nvSpPr>
         <p:spPr>
           <a:xfrm>
-            <a:off x="777240" y="475488"/>
-            <a:ext cx="8229600" cy="274320"/>
+            <a:off x="777240" y="457200"/>
+            <a:ext cx="8229600" cy="320040"/>
           </a:xfrm>
           <a:prstGeom prst="rect">
             <a:avLst/>
@@ -3179,13 +4277,13 @@
               </a:lnSpc>
             </a:pPr>
             <a:r>
-              <a:rPr sz="1200" b="1">
-                <a:solidFill>
-                  <a:srgbClr val="8C9DB5"/>
-                </a:solidFill>
-                <a:latin typeface="Segoe UI"/>
-              </a:rPr>
-              <a:t>ПРОБЛЕМА</a:t>
+              <a:rPr sz="1400" b="1">
+                <a:solidFill>
+                  <a:srgbClr val="9AAAC0"/>
+                </a:solidFill>
+                <a:latin typeface="Segoe UI"/>
+              </a:rPr>
+              <a:t>ЗАДАЧА</a:t>
             </a:r>
           </a:p>
         </p:txBody>
@@ -3198,8 +4296,8 @@
         </p:nvSpPr>
         <p:spPr>
           <a:xfrm>
-            <a:off x="548640" y="960120"/>
-            <a:ext cx="11094415" cy="1188720"/>
+            <a:off x="548640" y="914400"/>
+            <a:ext cx="11094415" cy="1097280"/>
           </a:xfrm>
           <a:prstGeom prst="rect">
             <a:avLst/>
@@ -3218,13 +4316,13 @@
               </a:lnSpc>
             </a:pPr>
             <a:r>
-              <a:rPr sz="3200" b="1">
+              <a:rPr sz="3000" b="1">
                 <a:solidFill>
                   <a:srgbClr val="E8EEF6"/>
                 </a:solidFill>
                 <a:latin typeface="Segoe UI"/>
               </a:rPr>
-              <a:t>Мусор в море виден со спутника как сигнал, куда отправить обследование</a:t>
+              <a:t>Спутник не взвесит пластик, но подскажет, куда отправить катер</a:t>
             </a:r>
           </a:p>
         </p:txBody>
@@ -3237,7 +4335,7 @@
         </p:nvSpPr>
         <p:spPr>
           <a:xfrm>
-            <a:off x="10271455" y="6400800"/>
+            <a:off x="10271455" y="6446520"/>
             <a:ext cx="1371600" cy="274320"/>
           </a:xfrm>
           <a:prstGeom prst="rect">
@@ -3257,13 +4355,13 @@
               </a:lnSpc>
             </a:pPr>
             <a:r>
-              <a:rPr sz="1100" b="0">
-                <a:solidFill>
-                  <a:srgbClr val="8C9DB5"/>
-                </a:solidFill>
-                <a:latin typeface="Segoe UI"/>
-              </a:rPr>
-              <a:t>1 / 12</a:t>
+              <a:rPr sz="1200" b="0">
+                <a:solidFill>
+                  <a:srgbClr val="9AAAC0"/>
+                </a:solidFill>
+                <a:latin typeface="Segoe UI"/>
+              </a:rPr>
+              <a:t>1 / 10</a:t>
             </a:r>
           </a:p>
         </p:txBody>
@@ -3276,7 +4374,7 @@
         </p:nvSpPr>
         <p:spPr>
           <a:xfrm>
-            <a:off x="548640" y="6400800"/>
+            <a:off x="548640" y="6446520"/>
             <a:ext cx="7315200" cy="274320"/>
           </a:xfrm>
           <a:prstGeom prst="rect">
@@ -3296,13 +4394,13 @@
               </a:lnSpc>
             </a:pPr>
             <a:r>
-              <a:rPr sz="1100" b="0">
-                <a:solidFill>
-                  <a:srgbClr val="8C9DB5"/>
-                </a:solidFill>
-                <a:latin typeface="Segoe UI"/>
-              </a:rPr>
-              <a:t>Макропластик · Sentinel-2</a:t>
+              <a:rPr sz="1200" b="0">
+                <a:solidFill>
+                  <a:srgbClr val="9AAAC0"/>
+                </a:solidFill>
+                <a:latin typeface="Segoe UI"/>
+              </a:rPr>
+              <a:t>Морской мусор · Sentinel-2</a:t>
             </a:r>
           </a:p>
         </p:txBody>
@@ -3315,8 +4413,8 @@
         </p:nvSpPr>
         <p:spPr>
           <a:xfrm>
-            <a:off x="548640" y="2651760"/>
-            <a:ext cx="4572000" cy="1463040"/>
+            <a:off x="548640" y="2423160"/>
+            <a:ext cx="4754880" cy="1280160"/>
           </a:xfrm>
           <a:prstGeom prst="rect">
             <a:avLst/>
@@ -3335,13 +4433,13 @@
               </a:lnSpc>
             </a:pPr>
             <a:r>
-              <a:rPr sz="9600" b="1">
-                <a:solidFill>
-                  <a:srgbClr val="FF6B5A"/>
-                </a:solidFill>
-                <a:latin typeface="Segoe UI"/>
-              </a:rPr>
-              <a:t>10 м</a:t>
+              <a:rPr sz="8800" b="1">
+                <a:solidFill>
+                  <a:srgbClr val="FF6B4A"/>
+                </a:solidFill>
+                <a:latin typeface="Segoe UI"/>
+              </a:rPr>
+              <a:t>2 пикс.</a:t>
             </a:r>
           </a:p>
         </p:txBody>
@@ -3354,8 +4452,8 @@
         </p:nvSpPr>
         <p:spPr>
           <a:xfrm>
-            <a:off x="548640" y="4160520"/>
-            <a:ext cx="4572000" cy="822960"/>
+            <a:off x="548640" y="3794760"/>
+            <a:ext cx="4754880" cy="1463040"/>
           </a:xfrm>
           <a:prstGeom prst="rect">
             <a:avLst/>
@@ -3370,33 +4468,33 @@
           <a:p>
             <a:pPr algn="l">
               <a:lnSpc>
-                <a:spcPct val="110000"/>
-              </a:lnSpc>
-            </a:pPr>
-            <a:r>
-              <a:rPr sz="1800" b="0">
-                <a:solidFill>
-                  <a:srgbClr val="8C9DB5"/>
-                </a:solidFill>
-                <a:latin typeface="Segoe UI"/>
-              </a:rPr>
-              <a:t>пиксель Sentinel-2: пятно мусора</a:t>
-            </a:r>
-          </a:p>
-          <a:p>
-            <a:pPr algn="l">
-              <a:lnSpc>
-                <a:spcPct val="110000"/>
-              </a:lnSpc>
-            </a:pPr>
-            <a:r>
-              <a:rPr sz="1800" b="0">
-                <a:solidFill>
-                  <a:srgbClr val="8C9DB5"/>
-                </a:solidFill>
-                <a:latin typeface="Segoe UI"/>
-              </a:rPr>
-              <a:t>занимает 1–4 пикселя</a:t>
+                <a:spcPct val="115000"/>
+              </a:lnSpc>
+            </a:pPr>
+            <a:r>
+              <a:rPr sz="2000" b="0">
+                <a:solidFill>
+                  <a:srgbClr val="9AAAC0"/>
+                </a:solidFill>
+                <a:latin typeface="Segoe UI"/>
+              </a:rPr>
+              <a:t>медианный размер пятна мусора</a:t>
+            </a:r>
+          </a:p>
+          <a:p>
+            <a:pPr algn="l">
+              <a:lnSpc>
+                <a:spcPct val="115000"/>
+              </a:lnSpc>
+            </a:pPr>
+            <a:r>
+              <a:rPr sz="2000" b="0">
+                <a:solidFill>
+                  <a:srgbClr val="9AAAC0"/>
+                </a:solidFill>
+                <a:latin typeface="Segoe UI"/>
+              </a:rPr>
+              <a:t>в разметке MARIDA (пиксель 10 м)</a:t>
             </a:r>
           </a:p>
         </p:txBody>
@@ -3409,8 +4507,8 @@
         </p:nvSpPr>
         <p:spPr>
           <a:xfrm>
-            <a:off x="6035040" y="2743200"/>
-            <a:ext cx="5577840" cy="2743200"/>
+            <a:off x="5852160" y="2240280"/>
+            <a:ext cx="5760720" cy="457200"/>
           </a:xfrm>
           <a:prstGeom prst="rect">
             <a:avLst/>
@@ -3425,33 +4523,395 @@
           <a:p>
             <a:pPr algn="l">
               <a:lnSpc>
-                <a:spcPct val="125000"/>
-              </a:lnSpc>
-            </a:pPr>
-            <a:r>
-              <a:rPr sz="2200" b="0">
+                <a:spcPct val="110000"/>
+              </a:lnSpc>
+            </a:pPr>
+            <a:r>
+              <a:rPr sz="2000" b="1">
+                <a:solidFill>
+                  <a:srgbClr val="9AAAC0"/>
+                </a:solidFill>
+                <a:latin typeface="Segoe UI"/>
+              </a:rPr>
+              <a:t>Кейс просит</a:t>
+            </a:r>
+          </a:p>
+        </p:txBody>
+      </p:sp>
+      <p:sp>
+        <p:nvSpPr>
+          <p:cNvPr id="10" name="Rounded Rectangle 9"/>
+          <p:cNvSpPr/>
+          <p:nvPr/>
+        </p:nvSpPr>
+        <p:spPr>
+          <a:xfrm>
+            <a:off x="5852160" y="2788920"/>
+            <a:ext cx="5760720" cy="777240"/>
+          </a:xfrm>
+          <a:prstGeom prst="roundRect">
+            <a:avLst>
+              <a:gd name="adj" fmla="val 8000"/>
+            </a:avLst>
+          </a:prstGeom>
+          <a:solidFill>
+            <a:srgbClr val="121C2E"/>
+          </a:solidFill>
+          <a:ln w="19050">
+            <a:solidFill>
+              <a:srgbClr val="2A3A55"/>
+            </a:solidFill>
+          </a:ln>
+          <a:effectLst/>
+        </p:spPr>
+        <p:style>
+          <a:lnRef idx="1">
+            <a:schemeClr val="accent1"/>
+          </a:lnRef>
+          <a:fillRef idx="3">
+            <a:schemeClr val="accent1"/>
+          </a:fillRef>
+          <a:effectRef idx="2">
+            <a:schemeClr val="accent1"/>
+          </a:effectRef>
+          <a:fontRef idx="minor">
+            <a:schemeClr val="lt1"/>
+          </a:fontRef>
+        </p:style>
+        <p:txBody>
+          <a:bodyPr rtlCol="0" anchor="ctr"/>
+          <a:lstStyle/>
+          <a:p>
+            <a:pPr algn="ctr"/>
+          </a:p>
+        </p:txBody>
+      </p:sp>
+      <p:sp>
+        <p:nvSpPr>
+          <p:cNvPr id="11" name="TextBox 10"/>
+          <p:cNvSpPr txBox="1"/>
+          <p:nvPr/>
+        </p:nvSpPr>
+        <p:spPr>
+          <a:xfrm>
+            <a:off x="6080760" y="2788920"/>
+            <a:ext cx="457200" cy="777240"/>
+          </a:xfrm>
+          <a:prstGeom prst="rect">
+            <a:avLst/>
+          </a:prstGeom>
+          <a:noFill/>
+        </p:spPr>
+        <p:txBody>
+          <a:bodyPr wrap="square" anchor="ctr" lIns="0" rIns="0" tIns="0" bIns="0">
+            <a:spAutoFit/>
+          </a:bodyPr>
+          <a:lstStyle/>
+          <a:p>
+            <a:pPr algn="l">
+              <a:lnSpc>
+                <a:spcPct val="110000"/>
+              </a:lnSpc>
+            </a:pPr>
+            <a:r>
+              <a:rPr sz="2400" b="1">
+                <a:solidFill>
+                  <a:srgbClr val="FF6B4A"/>
+                </a:solidFill>
+                <a:latin typeface="Segoe UI"/>
+              </a:rPr>
+              <a:t>1</a:t>
+            </a:r>
+          </a:p>
+        </p:txBody>
+      </p:sp>
+      <p:sp>
+        <p:nvSpPr>
+          <p:cNvPr id="12" name="TextBox 11"/>
+          <p:cNvSpPr txBox="1"/>
+          <p:nvPr/>
+        </p:nvSpPr>
+        <p:spPr>
+          <a:xfrm>
+            <a:off x="6583680" y="2788920"/>
+            <a:ext cx="4937760" cy="777240"/>
+          </a:xfrm>
+          <a:prstGeom prst="rect">
+            <a:avLst/>
+          </a:prstGeom>
+          <a:noFill/>
+        </p:spPr>
+        <p:txBody>
+          <a:bodyPr wrap="square" anchor="ctr" lIns="0" rIns="0" tIns="0" bIns="0">
+            <a:spAutoFit/>
+          </a:bodyPr>
+          <a:lstStyle/>
+          <a:p>
+            <a:pPr algn="l">
+              <a:lnSpc>
+                <a:spcPct val="110000"/>
+              </a:lnSpc>
+            </a:pPr>
+            <a:r>
+              <a:rPr sz="2000" b="0">
                 <a:solidFill>
                   <a:srgbClr val="E8EEF6"/>
                 </a:solidFill>
                 <a:latin typeface="Segoe UI"/>
               </a:rPr>
-              <a:t>Судов и дронов мало, акватории огромные.</a:t>
-            </a:r>
-          </a:p>
-          <a:p>
-            <a:pPr algn="l">
-              <a:lnSpc>
-                <a:spcPct val="125000"/>
-              </a:lnSpc>
-            </a:pPr>
-            <a:r>
-              <a:rPr sz="2200" b="0">
+              <a:t>найти пятна мусора на снимке Sentinel-2</a:t>
+            </a:r>
+          </a:p>
+        </p:txBody>
+      </p:sp>
+      <p:sp>
+        <p:nvSpPr>
+          <p:cNvPr id="13" name="Rounded Rectangle 12"/>
+          <p:cNvSpPr/>
+          <p:nvPr/>
+        </p:nvSpPr>
+        <p:spPr>
+          <a:xfrm>
+            <a:off x="5852160" y="3749040"/>
+            <a:ext cx="5760720" cy="777240"/>
+          </a:xfrm>
+          <a:prstGeom prst="roundRect">
+            <a:avLst>
+              <a:gd name="adj" fmla="val 8000"/>
+            </a:avLst>
+          </a:prstGeom>
+          <a:solidFill>
+            <a:srgbClr val="121C2E"/>
+          </a:solidFill>
+          <a:ln w="19050">
+            <a:solidFill>
+              <a:srgbClr val="2A3A55"/>
+            </a:solidFill>
+          </a:ln>
+          <a:effectLst/>
+        </p:spPr>
+        <p:style>
+          <a:lnRef idx="1">
+            <a:schemeClr val="accent1"/>
+          </a:lnRef>
+          <a:fillRef idx="3">
+            <a:schemeClr val="accent1"/>
+          </a:fillRef>
+          <a:effectRef idx="2">
+            <a:schemeClr val="accent1"/>
+          </a:effectRef>
+          <a:fontRef idx="minor">
+            <a:schemeClr val="lt1"/>
+          </a:fontRef>
+        </p:style>
+        <p:txBody>
+          <a:bodyPr rtlCol="0" anchor="ctr"/>
+          <a:lstStyle/>
+          <a:p>
+            <a:pPr algn="ctr"/>
+          </a:p>
+        </p:txBody>
+      </p:sp>
+      <p:sp>
+        <p:nvSpPr>
+          <p:cNvPr id="14" name="TextBox 13"/>
+          <p:cNvSpPr txBox="1"/>
+          <p:nvPr/>
+        </p:nvSpPr>
+        <p:spPr>
+          <a:xfrm>
+            <a:off x="6080760" y="3749040"/>
+            <a:ext cx="457200" cy="777240"/>
+          </a:xfrm>
+          <a:prstGeom prst="rect">
+            <a:avLst/>
+          </a:prstGeom>
+          <a:noFill/>
+        </p:spPr>
+        <p:txBody>
+          <a:bodyPr wrap="square" anchor="ctr" lIns="0" rIns="0" tIns="0" bIns="0">
+            <a:spAutoFit/>
+          </a:bodyPr>
+          <a:lstStyle/>
+          <a:p>
+            <a:pPr algn="l">
+              <a:lnSpc>
+                <a:spcPct val="110000"/>
+              </a:lnSpc>
+            </a:pPr>
+            <a:r>
+              <a:rPr sz="2400" b="1">
+                <a:solidFill>
+                  <a:srgbClr val="FF6B4A"/>
+                </a:solidFill>
+                <a:latin typeface="Segoe UI"/>
+              </a:rPr>
+              <a:t>2</a:t>
+            </a:r>
+          </a:p>
+        </p:txBody>
+      </p:sp>
+      <p:sp>
+        <p:nvSpPr>
+          <p:cNvPr id="15" name="TextBox 14"/>
+          <p:cNvSpPr txBox="1"/>
+          <p:nvPr/>
+        </p:nvSpPr>
+        <p:spPr>
+          <a:xfrm>
+            <a:off x="6583680" y="3749040"/>
+            <a:ext cx="4937760" cy="777240"/>
+          </a:xfrm>
+          <a:prstGeom prst="rect">
+            <a:avLst/>
+          </a:prstGeom>
+          <a:noFill/>
+        </p:spPr>
+        <p:txBody>
+          <a:bodyPr wrap="square" anchor="ctr" lIns="0" rIns="0" tIns="0" bIns="0">
+            <a:spAutoFit/>
+          </a:bodyPr>
+          <a:lstStyle/>
+          <a:p>
+            <a:pPr algn="l">
+              <a:lnSpc>
+                <a:spcPct val="110000"/>
+              </a:lnSpc>
+            </a:pPr>
+            <a:r>
+              <a:rPr sz="2000" b="0">
                 <a:solidFill>
                   <a:srgbClr val="E8EEF6"/>
                 </a:solidFill>
                 <a:latin typeface="Segoe UI"/>
               </a:rPr>
-              <a:t>Нужна карта: где подозрительно, насколько, куда плыть первым.</a:t>
+              <a:t>показатель по акватории на карте</a:t>
+            </a:r>
+          </a:p>
+        </p:txBody>
+      </p:sp>
+      <p:sp>
+        <p:nvSpPr>
+          <p:cNvPr id="16" name="Rounded Rectangle 15"/>
+          <p:cNvSpPr/>
+          <p:nvPr/>
+        </p:nvSpPr>
+        <p:spPr>
+          <a:xfrm>
+            <a:off x="5852160" y="4709160"/>
+            <a:ext cx="5760720" cy="777240"/>
+          </a:xfrm>
+          <a:prstGeom prst="roundRect">
+            <a:avLst>
+              <a:gd name="adj" fmla="val 8000"/>
+            </a:avLst>
+          </a:prstGeom>
+          <a:solidFill>
+            <a:srgbClr val="121C2E"/>
+          </a:solidFill>
+          <a:ln w="19050">
+            <a:solidFill>
+              <a:srgbClr val="2A3A55"/>
+            </a:solidFill>
+          </a:ln>
+          <a:effectLst/>
+        </p:spPr>
+        <p:style>
+          <a:lnRef idx="1">
+            <a:schemeClr val="accent1"/>
+          </a:lnRef>
+          <a:fillRef idx="3">
+            <a:schemeClr val="accent1"/>
+          </a:fillRef>
+          <a:effectRef idx="2">
+            <a:schemeClr val="accent1"/>
+          </a:effectRef>
+          <a:fontRef idx="minor">
+            <a:schemeClr val="lt1"/>
+          </a:fontRef>
+        </p:style>
+        <p:txBody>
+          <a:bodyPr rtlCol="0" anchor="ctr"/>
+          <a:lstStyle/>
+          <a:p>
+            <a:pPr algn="ctr"/>
+          </a:p>
+        </p:txBody>
+      </p:sp>
+      <p:sp>
+        <p:nvSpPr>
+          <p:cNvPr id="17" name="TextBox 16"/>
+          <p:cNvSpPr txBox="1"/>
+          <p:nvPr/>
+        </p:nvSpPr>
+        <p:spPr>
+          <a:xfrm>
+            <a:off x="6080760" y="4709160"/>
+            <a:ext cx="457200" cy="777240"/>
+          </a:xfrm>
+          <a:prstGeom prst="rect">
+            <a:avLst/>
+          </a:prstGeom>
+          <a:noFill/>
+        </p:spPr>
+        <p:txBody>
+          <a:bodyPr wrap="square" anchor="ctr" lIns="0" rIns="0" tIns="0" bIns="0">
+            <a:spAutoFit/>
+          </a:bodyPr>
+          <a:lstStyle/>
+          <a:p>
+            <a:pPr algn="l">
+              <a:lnSpc>
+                <a:spcPct val="110000"/>
+              </a:lnSpc>
+            </a:pPr>
+            <a:r>
+              <a:rPr sz="2400" b="1">
+                <a:solidFill>
+                  <a:srgbClr val="FF6B4A"/>
+                </a:solidFill>
+                <a:latin typeface="Segoe UI"/>
+              </a:rPr>
+              <a:t>3</a:t>
+            </a:r>
+          </a:p>
+        </p:txBody>
+      </p:sp>
+      <p:sp>
+        <p:nvSpPr>
+          <p:cNvPr id="18" name="TextBox 17"/>
+          <p:cNvSpPr txBox="1"/>
+          <p:nvPr/>
+        </p:nvSpPr>
+        <p:spPr>
+          <a:xfrm>
+            <a:off x="6583680" y="4709160"/>
+            <a:ext cx="4937760" cy="777240"/>
+          </a:xfrm>
+          <a:prstGeom prst="rect">
+            <a:avLst/>
+          </a:prstGeom>
+          <a:noFill/>
+        </p:spPr>
+        <p:txBody>
+          <a:bodyPr wrap="square" anchor="ctr" lIns="0" rIns="0" tIns="0" bIns="0">
+            <a:spAutoFit/>
+          </a:bodyPr>
+          <a:lstStyle/>
+          <a:p>
+            <a:pPr algn="l">
+              <a:lnSpc>
+                <a:spcPct val="110000"/>
+              </a:lnSpc>
+            </a:pPr>
+            <a:r>
+              <a:rPr sz="2000" b="0">
+                <a:solidFill>
+                  <a:srgbClr val="E8EEF6"/>
+                </a:solidFill>
+                <a:latin typeface="Segoe UI"/>
+              </a:rPr>
+              <a:t>быстрый инференс на данных организаторов</a:t>
             </a:r>
           </a:p>
         </p:txBody>
@@ -3490,14 +4950,14 @@
         </p:nvSpPr>
         <p:spPr>
           <a:xfrm>
-            <a:off x="548640" y="502920"/>
-            <a:ext cx="73152" cy="384048"/>
+            <a:off x="548640" y="457200"/>
+            <a:ext cx="73152" cy="329184"/>
           </a:xfrm>
           <a:prstGeom prst="rect">
             <a:avLst/>
           </a:prstGeom>
           <a:solidFill>
-            <a:srgbClr val="FF6B5A"/>
+            <a:srgbClr val="FF6B4A"/>
           </a:solidFill>
           <a:ln>
             <a:noFill/>
@@ -3534,8 +4994,8 @@
         </p:nvSpPr>
         <p:spPr>
           <a:xfrm>
-            <a:off x="777240" y="475488"/>
-            <a:ext cx="8229600" cy="274320"/>
+            <a:off x="777240" y="457200"/>
+            <a:ext cx="8229600" cy="320040"/>
           </a:xfrm>
           <a:prstGeom prst="rect">
             <a:avLst/>
@@ -3554,13 +5014,13 @@
               </a:lnSpc>
             </a:pPr>
             <a:r>
-              <a:rPr sz="1200" b="1">
-                <a:solidFill>
-                  <a:srgbClr val="8C9DB5"/>
-                </a:solidFill>
-                <a:latin typeface="Segoe UI"/>
-              </a:rPr>
-              <a:t>ДРЕЙФ</a:t>
+              <a:rPr sz="1400" b="1">
+                <a:solidFill>
+                  <a:srgbClr val="9AAAC0"/>
+                </a:solidFill>
+                <a:latin typeface="Segoe UI"/>
+              </a:rPr>
+              <a:t>ВЫВОДЫ И ЧТО ДАЛЬШЕ</a:t>
             </a:r>
           </a:p>
         </p:txBody>
@@ -3573,8 +5033,8 @@
         </p:nvSpPr>
         <p:spPr>
           <a:xfrm>
-            <a:off x="548640" y="960120"/>
-            <a:ext cx="11094415" cy="1188720"/>
+            <a:off x="548640" y="914400"/>
+            <a:ext cx="11094415" cy="1097280"/>
           </a:xfrm>
           <a:prstGeom prst="rect">
             <a:avLst/>
@@ -3593,13 +5053,13 @@
               </a:lnSpc>
             </a:pPr>
             <a:r>
-              <a:rPr sz="3200" b="1">
+              <a:rPr sz="3000" b="1">
                 <a:solidFill>
                   <a:srgbClr val="E8EEF6"/>
                 </a:solidFill>
                 <a:latin typeface="Segoe UI"/>
               </a:rPr>
-              <a:t>Дрейф на 72 часа: демонстрация направления, не прогноз</a:t>
+              <a:t>Готово к работе: карта «куда плыть» и модель, которая переобучается за секунды</a:t>
             </a:r>
           </a:p>
         </p:txBody>
@@ -3612,7 +5072,7 @@
         </p:nvSpPr>
         <p:spPr>
           <a:xfrm>
-            <a:off x="10271455" y="6400800"/>
+            <a:off x="10271455" y="6446520"/>
             <a:ext cx="1371600" cy="274320"/>
           </a:xfrm>
           <a:prstGeom prst="rect">
@@ -3632,13 +5092,13 @@
               </a:lnSpc>
             </a:pPr>
             <a:r>
-              <a:rPr sz="1100" b="0">
-                <a:solidFill>
-                  <a:srgbClr val="8C9DB5"/>
-                </a:solidFill>
-                <a:latin typeface="Segoe UI"/>
-              </a:rPr>
-              <a:t>10 / 12</a:t>
+              <a:rPr sz="1200" b="0">
+                <a:solidFill>
+                  <a:srgbClr val="9AAAC0"/>
+                </a:solidFill>
+                <a:latin typeface="Segoe UI"/>
+              </a:rPr>
+              <a:t>10 / 10</a:t>
             </a:r>
           </a:p>
         </p:txBody>
@@ -3651,7 +5111,7 @@
         </p:nvSpPr>
         <p:spPr>
           <a:xfrm>
-            <a:off x="548640" y="6400800"/>
+            <a:off x="548640" y="6446520"/>
             <a:ext cx="7315200" cy="274320"/>
           </a:xfrm>
           <a:prstGeom prst="rect">
@@ -3671,60 +5131,118 @@
               </a:lnSpc>
             </a:pPr>
             <a:r>
-              <a:rPr sz="1100" b="0">
-                <a:solidFill>
-                  <a:srgbClr val="8C9DB5"/>
-                </a:solidFill>
-                <a:latin typeface="Segoe UI"/>
-              </a:rPr>
-              <a:t>Макропластик · Sentinel-2</a:t>
-            </a:r>
-          </a:p>
-        </p:txBody>
-      </p:sp>
-      <p:pic>
-        <p:nvPicPr>
-          <p:cNvPr id="7" name="Picture 6" descr="drift.jpg"/>
-          <p:cNvPicPr>
-            <a:picLocks noChangeAspect="1"/>
-          </p:cNvPicPr>
-          <p:nvPr/>
-        </p:nvPicPr>
-        <p:blipFill>
-          <a:blip r:embed="rId2"/>
-          <a:stretch>
-            <a:fillRect/>
-          </a:stretch>
-        </p:blipFill>
-        <p:spPr>
-          <a:xfrm>
-            <a:off x="1148081" y="2514600"/>
-            <a:ext cx="6664958" cy="3749039"/>
-          </a:xfrm>
-          <a:prstGeom prst="rect">
-            <a:avLst/>
-          </a:prstGeom>
-        </p:spPr>
-      </p:pic>
-      <p:sp>
-        <p:nvSpPr>
-          <p:cNvPr id="8" name="Rectangle 7"/>
+              <a:rPr sz="1200" b="0">
+                <a:solidFill>
+                  <a:srgbClr val="9AAAC0"/>
+                </a:solidFill>
+                <a:latin typeface="Segoe UI"/>
+              </a:rPr>
+              <a:t>Морской мусор · Sentinel-2</a:t>
+            </a:r>
+          </a:p>
+        </p:txBody>
+      </p:sp>
+      <p:sp>
+        <p:nvSpPr>
+          <p:cNvPr id="7" name="TextBox 6"/>
+          <p:cNvSpPr txBox="1"/>
+          <p:nvPr/>
+        </p:nvSpPr>
+        <p:spPr>
+          <a:xfrm>
+            <a:off x="548640" y="2240280"/>
+            <a:ext cx="5364327" cy="411480"/>
+          </a:xfrm>
+          <a:prstGeom prst="rect">
+            <a:avLst/>
+          </a:prstGeom>
+          <a:noFill/>
+        </p:spPr>
+        <p:txBody>
+          <a:bodyPr wrap="square" anchor="t" lIns="0" rIns="0" tIns="0" bIns="0">
+            <a:spAutoFit/>
+          </a:bodyPr>
+          <a:lstStyle/>
+          <a:p>
+            <a:pPr algn="l">
+              <a:lnSpc>
+                <a:spcPct val="110000"/>
+              </a:lnSpc>
+            </a:pPr>
+            <a:r>
+              <a:rPr sz="2000" b="1">
+                <a:solidFill>
+                  <a:srgbClr val="9AAAC0"/>
+                </a:solidFill>
+                <a:latin typeface="Segoe UI"/>
+              </a:rPr>
+              <a:t>Выводы</a:t>
+            </a:r>
+          </a:p>
+        </p:txBody>
+      </p:sp>
+      <p:sp>
+        <p:nvSpPr>
+          <p:cNvPr id="8" name="TextBox 7"/>
+          <p:cNvSpPr txBox="1"/>
+          <p:nvPr/>
+        </p:nvSpPr>
+        <p:spPr>
+          <a:xfrm>
+            <a:off x="6278727" y="2240280"/>
+            <a:ext cx="5364327" cy="411480"/>
+          </a:xfrm>
+          <a:prstGeom prst="rect">
+            <a:avLst/>
+          </a:prstGeom>
+          <a:noFill/>
+        </p:spPr>
+        <p:txBody>
+          <a:bodyPr wrap="square" anchor="t" lIns="0" rIns="0" tIns="0" bIns="0">
+            <a:spAutoFit/>
+          </a:bodyPr>
+          <a:lstStyle/>
+          <a:p>
+            <a:pPr algn="l">
+              <a:lnSpc>
+                <a:spcPct val="110000"/>
+              </a:lnSpc>
+            </a:pPr>
+            <a:r>
+              <a:rPr sz="2000" b="1">
+                <a:solidFill>
+                  <a:srgbClr val="9AAAC0"/>
+                </a:solidFill>
+                <a:latin typeface="Segoe UI"/>
+              </a:rPr>
+              <a:t>Дальше</a:t>
+            </a:r>
+          </a:p>
+        </p:txBody>
+      </p:sp>
+      <p:sp>
+        <p:nvSpPr>
+          <p:cNvPr id="9" name="Rounded Rectangle 8"/>
           <p:cNvSpPr/>
           <p:nvPr/>
         </p:nvSpPr>
         <p:spPr>
           <a:xfrm>
-            <a:off x="1148081" y="5852159"/>
-            <a:ext cx="6664958" cy="411480"/>
-          </a:xfrm>
-          <a:prstGeom prst="rect">
-            <a:avLst/>
+            <a:off x="548640" y="2788920"/>
+            <a:ext cx="5364327" cy="841248"/>
+          </a:xfrm>
+          <a:prstGeom prst="roundRect">
+            <a:avLst>
+              <a:gd name="adj" fmla="val 8000"/>
+            </a:avLst>
           </a:prstGeom>
           <a:solidFill>
-            <a:srgbClr val="0A111F"/>
+            <a:srgbClr val="121C2E"/>
           </a:solidFill>
-          <a:ln>
-            <a:noFill/>
+          <a:ln w="19050">
+            <a:solidFill>
+              <a:srgbClr val="FF6B4A"/>
+            </a:solidFill>
           </a:ln>
           <a:effectLst/>
         </p:spPr>
@@ -3752,22 +5270,22 @@
       </p:sp>
       <p:sp>
         <p:nvSpPr>
-          <p:cNvPr id="9" name="TextBox 8"/>
+          <p:cNvPr id="10" name="TextBox 9"/>
           <p:cNvSpPr txBox="1"/>
           <p:nvPr/>
         </p:nvSpPr>
         <p:spPr>
           <a:xfrm>
-            <a:off x="1285241" y="5916167"/>
-            <a:ext cx="6390638" cy="274320"/>
-          </a:xfrm>
-          <a:prstGeom prst="rect">
-            <a:avLst/>
-          </a:prstGeom>
-          <a:noFill/>
-        </p:spPr>
-        <p:txBody>
-          <a:bodyPr wrap="square" anchor="t" lIns="0" rIns="0" tIns="0" bIns="0">
+            <a:off x="777240" y="2788920"/>
+            <a:ext cx="1737360" cy="841248"/>
+          </a:xfrm>
+          <a:prstGeom prst="rect">
+            <a:avLst/>
+          </a:prstGeom>
+          <a:noFill/>
+        </p:spPr>
+        <p:txBody>
+          <a:bodyPr wrap="square" anchor="ctr" lIns="0" rIns="0" tIns="0" bIns="0">
             <a:spAutoFit/>
           </a:bodyPr>
           <a:lstStyle/>
@@ -3778,156 +5296,79 @@
               </a:lnSpc>
             </a:pPr>
             <a:r>
-              <a:rPr sz="1300" b="0">
-                <a:solidFill>
-                  <a:srgbClr val="E8EEF6"/>
-                </a:solidFill>
-                <a:latin typeface="Segoe UI"/>
-              </a:rPr>
-              <a:t>Треки частиц 0–72 ч (без валидации)</a:t>
-            </a:r>
-          </a:p>
-        </p:txBody>
-      </p:sp>
-      <p:sp>
-        <p:nvSpPr>
-          <p:cNvPr id="10" name="TextBox 9"/>
+              <a:rPr sz="2800" b="1">
+                <a:solidFill>
+                  <a:srgbClr val="FF6B4A"/>
+                </a:solidFill>
+                <a:latin typeface="Segoe UI"/>
+              </a:rPr>
+              <a:t>0,854</a:t>
+            </a:r>
+          </a:p>
+        </p:txBody>
+      </p:sp>
+      <p:sp>
+        <p:nvSpPr>
+          <p:cNvPr id="11" name="TextBox 10"/>
           <p:cNvSpPr txBox="1"/>
           <p:nvPr/>
         </p:nvSpPr>
         <p:spPr>
           <a:xfrm>
-            <a:off x="8778240" y="2743200"/>
-            <a:ext cx="2926080" cy="1463040"/>
-          </a:xfrm>
-          <a:prstGeom prst="rect">
-            <a:avLst/>
-          </a:prstGeom>
-          <a:noFill/>
-        </p:spPr>
-        <p:txBody>
-          <a:bodyPr wrap="square" anchor="t" lIns="0" rIns="0" tIns="0" bIns="0">
+            <a:off x="2560320" y="2788920"/>
+            <a:ext cx="3169767" cy="841248"/>
+          </a:xfrm>
+          <a:prstGeom prst="rect">
+            <a:avLst/>
+          </a:prstGeom>
+          <a:noFill/>
+        </p:spPr>
+        <p:txBody>
+          <a:bodyPr wrap="square" anchor="ctr" lIns="0" rIns="0" tIns="0" bIns="0">
             <a:spAutoFit/>
           </a:bodyPr>
           <a:lstStyle/>
           <a:p>
             <a:pPr algn="l">
               <a:lnSpc>
-                <a:spcPct val="90000"/>
-              </a:lnSpc>
-            </a:pPr>
-            <a:r>
-              <a:rPr sz="8800" b="1">
-                <a:solidFill>
-                  <a:srgbClr val="FF6B5A"/>
-                </a:solidFill>
-                <a:latin typeface="Segoe UI"/>
-              </a:rPr>
-              <a:t>11</a:t>
-            </a:r>
-          </a:p>
-        </p:txBody>
-      </p:sp>
-      <p:sp>
-        <p:nvSpPr>
-          <p:cNvPr id="11" name="TextBox 10"/>
-          <p:cNvSpPr txBox="1"/>
-          <p:nvPr/>
-        </p:nvSpPr>
-        <p:spPr>
-          <a:xfrm>
-            <a:off x="8778240" y="4251960"/>
-            <a:ext cx="2926080" cy="822960"/>
-          </a:xfrm>
-          <a:prstGeom prst="rect">
-            <a:avLst/>
-          </a:prstGeom>
-          <a:noFill/>
-        </p:spPr>
-        <p:txBody>
-          <a:bodyPr wrap="square" anchor="t" lIns="0" rIns="0" tIns="0" bIns="0">
-            <a:spAutoFit/>
-          </a:bodyPr>
-          <a:lstStyle/>
-          <a:p>
-            <a:pPr algn="l">
-              <a:lnSpc>
                 <a:spcPct val="110000"/>
               </a:lnSpc>
             </a:pPr>
             <a:r>
-              <a:rPr sz="1800" b="0">
-                <a:solidFill>
-                  <a:srgbClr val="8C9DB5"/>
-                </a:solidFill>
-                <a:latin typeface="Segoe UI"/>
-              </a:rPr>
-              <a:t>свежих сцен с дрейфом:</a:t>
-            </a:r>
-          </a:p>
-          <a:p>
-            <a:pPr algn="l">
-              <a:lnSpc>
-                <a:spcPct val="110000"/>
-              </a:lnSpc>
-            </a:pPr>
-            <a:r>
-              <a:rPr sz="1800" b="0">
-                <a:solidFill>
-                  <a:srgbClr val="8C9DB5"/>
-                </a:solidFill>
-                <a:latin typeface="Segoe UI"/>
-              </a:rPr>
-              <a:t>OpenDrift, HYCOM, GFS</a:t>
-            </a:r>
-          </a:p>
-        </p:txBody>
-      </p:sp>
-    </p:spTree>
-  </p:cSld>
-  <p:clrMapOvr>
-    <a:masterClrMapping/>
-  </p:clrMapOvr>
-</p:sld>
-</file>
-
-<file path=ppt/slides/slide11.xml><?xml version="1.0" encoding="utf-8"?>
-<p:sld xmlns:a="http://schemas.openxmlformats.org/drawingml/2006/main" xmlns:p="http://schemas.openxmlformats.org/presentationml/2006/main" xmlns:r="http://schemas.openxmlformats.org/officeDocument/2006/relationships">
-  <p:cSld>
-    <p:bg>
-      <p:bgPr>
-        <a:solidFill>
-          <a:srgbClr val="0A111F"/>
-        </a:solidFill>
-        <a:effectLst/>
-      </p:bgPr>
-    </p:bg>
-    <p:spTree>
-      <p:nvGrpSpPr>
-        <p:cNvPr id="1" name=""/>
-        <p:cNvGrpSpPr/>
-        <p:nvPr/>
-      </p:nvGrpSpPr>
-      <p:grpSpPr/>
-      <p:sp>
-        <p:nvSpPr>
-          <p:cNvPr id="2" name="Rectangle 1"/>
+              <a:rPr sz="2000" b="0">
+                <a:solidFill>
+                  <a:srgbClr val="E8EEF6"/>
+                </a:solidFill>
+                <a:latin typeface="Segoe UI"/>
+              </a:rPr>
+              <a:t>F1 на новом районе</a:t>
+            </a:r>
+          </a:p>
+        </p:txBody>
+      </p:sp>
+      <p:sp>
+        <p:nvSpPr>
+          <p:cNvPr id="12" name="Rounded Rectangle 11"/>
           <p:cNvSpPr/>
           <p:nvPr/>
         </p:nvSpPr>
         <p:spPr>
           <a:xfrm>
-            <a:off x="548640" y="502920"/>
-            <a:ext cx="73152" cy="384048"/>
-          </a:xfrm>
-          <a:prstGeom prst="rect">
-            <a:avLst/>
+            <a:off x="548640" y="3794760"/>
+            <a:ext cx="5364327" cy="841248"/>
+          </a:xfrm>
+          <a:prstGeom prst="roundRect">
+            <a:avLst>
+              <a:gd name="adj" fmla="val 8000"/>
+            </a:avLst>
           </a:prstGeom>
           <a:solidFill>
-            <a:srgbClr val="FF6B5A"/>
+            <a:srgbClr val="121C2E"/>
           </a:solidFill>
-          <a:ln>
-            <a:noFill/>
+          <a:ln w="19050">
+            <a:solidFill>
+              <a:srgbClr val="2A3A55"/>
+            </a:solidFill>
           </a:ln>
           <a:effectLst/>
         </p:spPr>
@@ -3955,22 +5396,22 @@
       </p:sp>
       <p:sp>
         <p:nvSpPr>
-          <p:cNvPr id="3" name="TextBox 2"/>
+          <p:cNvPr id="13" name="TextBox 12"/>
           <p:cNvSpPr txBox="1"/>
           <p:nvPr/>
         </p:nvSpPr>
         <p:spPr>
           <a:xfrm>
-            <a:off x="777240" y="475488"/>
-            <a:ext cx="8229600" cy="274320"/>
-          </a:xfrm>
-          <a:prstGeom prst="rect">
-            <a:avLst/>
-          </a:prstGeom>
-          <a:noFill/>
-        </p:spPr>
-        <p:txBody>
-          <a:bodyPr wrap="square" anchor="t" lIns="0" rIns="0" tIns="0" bIns="0">
+            <a:off x="777240" y="3794760"/>
+            <a:ext cx="1737360" cy="841248"/>
+          </a:xfrm>
+          <a:prstGeom prst="rect">
+            <a:avLst/>
+          </a:prstGeom>
+          <a:noFill/>
+        </p:spPr>
+        <p:txBody>
+          <a:bodyPr wrap="square" anchor="ctr" lIns="0" rIns="0" tIns="0" bIns="0">
             <a:spAutoFit/>
           </a:bodyPr>
           <a:lstStyle/>
@@ -3981,238 +5422,66 @@
               </a:lnSpc>
             </a:pPr>
             <a:r>
-              <a:rPr sz="1200" b="1">
-                <a:solidFill>
-                  <a:srgbClr val="8C9DB5"/>
-                </a:solidFill>
-                <a:latin typeface="Segoe UI"/>
-              </a:rPr>
-              <a:t>ГОТОВНОСТЬ К ДАННЫМ ОРГАНИЗАТОРОВ</a:t>
-            </a:r>
-          </a:p>
-        </p:txBody>
-      </p:sp>
-      <p:sp>
-        <p:nvSpPr>
-          <p:cNvPr id="4" name="TextBox 3"/>
+              <a:rPr sz="2800" b="1">
+                <a:solidFill>
+                  <a:srgbClr val="FF6B4A"/>
+                </a:solidFill>
+                <a:latin typeface="Segoe UI"/>
+              </a:rPr>
+              <a:t>12</a:t>
+            </a:r>
+          </a:p>
+        </p:txBody>
+      </p:sp>
+      <p:sp>
+        <p:nvSpPr>
+          <p:cNvPr id="14" name="TextBox 13"/>
           <p:cNvSpPr txBox="1"/>
           <p:nvPr/>
         </p:nvSpPr>
         <p:spPr>
           <a:xfrm>
-            <a:off x="548640" y="960120"/>
-            <a:ext cx="11094415" cy="1188720"/>
-          </a:xfrm>
-          <a:prstGeom prst="rect">
-            <a:avLst/>
-          </a:prstGeom>
-          <a:noFill/>
-        </p:spPr>
-        <p:txBody>
-          <a:bodyPr wrap="square" anchor="t" lIns="0" rIns="0" tIns="0" bIns="0">
+            <a:off x="2560320" y="3794760"/>
+            <a:ext cx="3169767" cy="841248"/>
+          </a:xfrm>
+          <a:prstGeom prst="rect">
+            <a:avLst/>
+          </a:prstGeom>
+          <a:noFill/>
+        </p:spPr>
+        <p:txBody>
+          <a:bodyPr wrap="square" anchor="ctr" lIns="0" rIns="0" tIns="0" bIns="0">
             <a:spAutoFit/>
           </a:bodyPr>
           <a:lstStyle/>
           <a:p>
             <a:pPr algn="l">
               <a:lnSpc>
-                <a:spcPct val="100000"/>
-              </a:lnSpc>
-            </a:pPr>
-            <a:r>
-              <a:rPr sz="3200" b="1">
+                <a:spcPct val="110000"/>
+              </a:lnSpc>
+            </a:pPr>
+            <a:r>
+              <a:rPr sz="2000" b="0">
                 <a:solidFill>
                   <a:srgbClr val="E8EEF6"/>
                 </a:solidFill>
                 <a:latin typeface="Segoe UI"/>
               </a:rPr>
-              <a:t>Новый датасет — первый сабмит за 60 минут</a:t>
-            </a:r>
-          </a:p>
-        </p:txBody>
-      </p:sp>
-      <p:sp>
-        <p:nvSpPr>
-          <p:cNvPr id="5" name="TextBox 4"/>
-          <p:cNvSpPr txBox="1"/>
-          <p:nvPr/>
-        </p:nvSpPr>
-        <p:spPr>
-          <a:xfrm>
-            <a:off x="10271455" y="6400800"/>
-            <a:ext cx="1371600" cy="274320"/>
-          </a:xfrm>
-          <a:prstGeom prst="rect">
-            <a:avLst/>
-          </a:prstGeom>
-          <a:noFill/>
-        </p:spPr>
-        <p:txBody>
-          <a:bodyPr wrap="square" anchor="t" lIns="0" rIns="0" tIns="0" bIns="0">
-            <a:spAutoFit/>
-          </a:bodyPr>
-          <a:lstStyle/>
-          <a:p>
-            <a:pPr algn="r">
-              <a:lnSpc>
-                <a:spcPct val="110000"/>
-              </a:lnSpc>
-            </a:pPr>
-            <a:r>
-              <a:rPr sz="1100" b="0">
-                <a:solidFill>
-                  <a:srgbClr val="8C9DB5"/>
-                </a:solidFill>
-                <a:latin typeface="Segoe UI"/>
-              </a:rPr>
-              <a:t>11 / 12</a:t>
-            </a:r>
-          </a:p>
-        </p:txBody>
-      </p:sp>
-      <p:sp>
-        <p:nvSpPr>
-          <p:cNvPr id="6" name="TextBox 5"/>
-          <p:cNvSpPr txBox="1"/>
-          <p:nvPr/>
-        </p:nvSpPr>
-        <p:spPr>
-          <a:xfrm>
-            <a:off x="548640" y="6400800"/>
-            <a:ext cx="7315200" cy="274320"/>
-          </a:xfrm>
-          <a:prstGeom prst="rect">
-            <a:avLst/>
-          </a:prstGeom>
-          <a:noFill/>
-        </p:spPr>
-        <p:txBody>
-          <a:bodyPr wrap="square" anchor="t" lIns="0" rIns="0" tIns="0" bIns="0">
-            <a:spAutoFit/>
-          </a:bodyPr>
-          <a:lstStyle/>
-          <a:p>
-            <a:pPr algn="l">
-              <a:lnSpc>
-                <a:spcPct val="110000"/>
-              </a:lnSpc>
-            </a:pPr>
-            <a:r>
-              <a:rPr sz="1100" b="0">
-                <a:solidFill>
-                  <a:srgbClr val="8C9DB5"/>
-                </a:solidFill>
-                <a:latin typeface="Segoe UI"/>
-              </a:rPr>
-              <a:t>Макропластик · Sentinel-2</a:t>
-            </a:r>
-          </a:p>
-        </p:txBody>
-      </p:sp>
-      <p:sp>
-        <p:nvSpPr>
-          <p:cNvPr id="7" name="TextBox 6"/>
-          <p:cNvSpPr txBox="1"/>
-          <p:nvPr/>
-        </p:nvSpPr>
-        <p:spPr>
-          <a:xfrm>
-            <a:off x="548640" y="2651760"/>
-            <a:ext cx="3657600" cy="1463040"/>
-          </a:xfrm>
-          <a:prstGeom prst="rect">
-            <a:avLst/>
-          </a:prstGeom>
-          <a:noFill/>
-        </p:spPr>
-        <p:txBody>
-          <a:bodyPr wrap="square" anchor="t" lIns="0" rIns="0" tIns="0" bIns="0">
-            <a:spAutoFit/>
-          </a:bodyPr>
-          <a:lstStyle/>
-          <a:p>
-            <a:pPr algn="l">
-              <a:lnSpc>
-                <a:spcPct val="90000"/>
-              </a:lnSpc>
-            </a:pPr>
-            <a:r>
-              <a:rPr sz="9600" b="1">
-                <a:solidFill>
-                  <a:srgbClr val="FF6B5A"/>
-                </a:solidFill>
-                <a:latin typeface="Segoe UI"/>
-              </a:rPr>
-              <a:t>60</a:t>
-            </a:r>
-          </a:p>
-        </p:txBody>
-      </p:sp>
-      <p:sp>
-        <p:nvSpPr>
-          <p:cNvPr id="8" name="TextBox 7"/>
-          <p:cNvSpPr txBox="1"/>
-          <p:nvPr/>
-        </p:nvSpPr>
-        <p:spPr>
-          <a:xfrm>
-            <a:off x="548640" y="4160520"/>
-            <a:ext cx="3657600" cy="822960"/>
-          </a:xfrm>
-          <a:prstGeom prst="rect">
-            <a:avLst/>
-          </a:prstGeom>
-          <a:noFill/>
-        </p:spPr>
-        <p:txBody>
-          <a:bodyPr wrap="square" anchor="t" lIns="0" rIns="0" tIns="0" bIns="0">
-            <a:spAutoFit/>
-          </a:bodyPr>
-          <a:lstStyle/>
-          <a:p>
-            <a:pPr algn="l">
-              <a:lnSpc>
-                <a:spcPct val="110000"/>
-              </a:lnSpc>
-            </a:pPr>
-            <a:r>
-              <a:rPr sz="1800" b="0">
-                <a:solidFill>
-                  <a:srgbClr val="8C9DB5"/>
-                </a:solidFill>
-                <a:latin typeface="Segoe UI"/>
-              </a:rPr>
-              <a:t>минут от архива</a:t>
-            </a:r>
-          </a:p>
-          <a:p>
-            <a:pPr algn="l">
-              <a:lnSpc>
-                <a:spcPct val="110000"/>
-              </a:lnSpc>
-            </a:pPr>
-            <a:r>
-              <a:rPr sz="1800" b="0">
-                <a:solidFill>
-                  <a:srgbClr val="8C9DB5"/>
-                </a:solidFill>
-                <a:latin typeface="Segoe UI"/>
-              </a:rPr>
-              <a:t>до первого сабмита</a:t>
-            </a:r>
-          </a:p>
-        </p:txBody>
-      </p:sp>
-      <p:sp>
-        <p:nvSpPr>
-          <p:cNvPr id="9" name="Rounded Rectangle 8"/>
+              <a:t>районов на живой карте</a:t>
+            </a:r>
+          </a:p>
+        </p:txBody>
+      </p:sp>
+      <p:sp>
+        <p:nvSpPr>
+          <p:cNvPr id="15" name="Rounded Rectangle 14"/>
           <p:cNvSpPr/>
           <p:nvPr/>
         </p:nvSpPr>
         <p:spPr>
           <a:xfrm>
-            <a:off x="4480560" y="2743200"/>
-            <a:ext cx="1645920" cy="1005840"/>
+            <a:off x="548640" y="4800600"/>
+            <a:ext cx="5364327" cy="841248"/>
           </a:xfrm>
           <a:prstGeom prst="roundRect">
             <a:avLst>
@@ -4222,9 +5491,9 @@
           <a:solidFill>
             <a:srgbClr val="121C2E"/>
           </a:solidFill>
-          <a:ln w="15875">
+          <a:ln w="19050">
             <a:solidFill>
-              <a:srgbClr val="24334A"/>
+              <a:srgbClr val="2A3A55"/>
             </a:solidFill>
           </a:ln>
           <a:effectLst/>
@@ -4253,22 +5522,22 @@
       </p:sp>
       <p:sp>
         <p:nvSpPr>
-          <p:cNvPr id="10" name="TextBox 9"/>
+          <p:cNvPr id="16" name="TextBox 15"/>
           <p:cNvSpPr txBox="1"/>
           <p:nvPr/>
         </p:nvSpPr>
         <p:spPr>
           <a:xfrm>
-            <a:off x="4663440" y="2907792"/>
-            <a:ext cx="1280160" cy="365760"/>
-          </a:xfrm>
-          <a:prstGeom prst="rect">
-            <a:avLst/>
-          </a:prstGeom>
-          <a:noFill/>
-        </p:spPr>
-        <p:txBody>
-          <a:bodyPr wrap="square" anchor="t" lIns="0" rIns="0" tIns="0" bIns="0">
+            <a:off x="777240" y="4800600"/>
+            <a:ext cx="1737360" cy="841248"/>
+          </a:xfrm>
+          <a:prstGeom prst="rect">
+            <a:avLst/>
+          </a:prstGeom>
+          <a:noFill/>
+        </p:spPr>
+        <p:txBody>
+          <a:bodyPr wrap="square" anchor="ctr" lIns="0" rIns="0" tIns="0" bIns="0">
             <a:spAutoFit/>
           </a:bodyPr>
           <a:lstStyle/>
@@ -4279,35 +5548,35 @@
               </a:lnSpc>
             </a:pPr>
             <a:r>
-              <a:rPr sz="1600" b="1">
-                <a:solidFill>
-                  <a:srgbClr val="E8EEF6"/>
-                </a:solidFill>
-                <a:latin typeface="Segoe UI"/>
-              </a:rPr>
-              <a:t>inspect</a:t>
-            </a:r>
-          </a:p>
-        </p:txBody>
-      </p:sp>
-      <p:sp>
-        <p:nvSpPr>
-          <p:cNvPr id="11" name="TextBox 10"/>
+              <a:rPr sz="2800" b="1">
+                <a:solidFill>
+                  <a:srgbClr val="FF6B4A"/>
+                </a:solidFill>
+                <a:latin typeface="Segoe UI"/>
+              </a:rPr>
+              <a:t>5,7 с</a:t>
+            </a:r>
+          </a:p>
+        </p:txBody>
+      </p:sp>
+      <p:sp>
+        <p:nvSpPr>
+          <p:cNvPr id="17" name="TextBox 16"/>
           <p:cNvSpPr txBox="1"/>
           <p:nvPr/>
         </p:nvSpPr>
         <p:spPr>
           <a:xfrm>
-            <a:off x="4663440" y="3291840"/>
-            <a:ext cx="1280160" cy="365760"/>
-          </a:xfrm>
-          <a:prstGeom prst="rect">
-            <a:avLst/>
-          </a:prstGeom>
-          <a:noFill/>
-        </p:spPr>
-        <p:txBody>
-          <a:bodyPr wrap="square" anchor="t" lIns="0" rIns="0" tIns="0" bIns="0">
+            <a:off x="2560320" y="4800600"/>
+            <a:ext cx="3169767" cy="841248"/>
+          </a:xfrm>
+          <a:prstGeom prst="rect">
+            <a:avLst/>
+          </a:prstGeom>
+          <a:noFill/>
+        </p:spPr>
+        <p:txBody>
+          <a:bodyPr wrap="square" anchor="ctr" lIns="0" rIns="0" tIns="0" bIns="0">
             <a:spAutoFit/>
           </a:bodyPr>
           <a:lstStyle/>
@@ -4318,27 +5587,27 @@
               </a:lnSpc>
             </a:pPr>
             <a:r>
-              <a:rPr sz="1200" b="0">
-                <a:solidFill>
-                  <a:srgbClr val="8C9DB5"/>
-                </a:solidFill>
-                <a:latin typeface="Segoe UI"/>
-              </a:rPr>
-              <a:t>каналы, масштаб, классы</a:t>
-            </a:r>
-          </a:p>
-        </p:txBody>
-      </p:sp>
-      <p:sp>
-        <p:nvSpPr>
-          <p:cNvPr id="12" name="Rounded Rectangle 11"/>
+              <a:rPr sz="2000" b="0">
+                <a:solidFill>
+                  <a:srgbClr val="E8EEF6"/>
+                </a:solidFill>
+                <a:latin typeface="Segoe UI"/>
+              </a:rPr>
+              <a:t>на 300 чипов</a:t>
+            </a:r>
+          </a:p>
+        </p:txBody>
+      </p:sp>
+      <p:sp>
+        <p:nvSpPr>
+          <p:cNvPr id="18" name="Rounded Rectangle 17"/>
           <p:cNvSpPr/>
           <p:nvPr/>
         </p:nvSpPr>
         <p:spPr>
           <a:xfrm>
-            <a:off x="6309360" y="2743200"/>
-            <a:ext cx="1645920" cy="1005840"/>
+            <a:off x="6278727" y="2788920"/>
+            <a:ext cx="5364327" cy="841248"/>
           </a:xfrm>
           <a:prstGeom prst="roundRect">
             <a:avLst>
@@ -4348,9 +5617,9 @@
           <a:solidFill>
             <a:srgbClr val="121C2E"/>
           </a:solidFill>
-          <a:ln w="15875">
+          <a:ln w="19050">
             <a:solidFill>
-              <a:srgbClr val="24334A"/>
+              <a:srgbClr val="2A3A55"/>
             </a:solidFill>
           </a:ln>
           <a:effectLst/>
@@ -4379,22 +5648,22 @@
       </p:sp>
       <p:sp>
         <p:nvSpPr>
-          <p:cNvPr id="13" name="TextBox 12"/>
+          <p:cNvPr id="19" name="TextBox 18"/>
           <p:cNvSpPr txBox="1"/>
           <p:nvPr/>
         </p:nvSpPr>
         <p:spPr>
           <a:xfrm>
-            <a:off x="6492240" y="2907792"/>
-            <a:ext cx="1280160" cy="365760"/>
-          </a:xfrm>
-          <a:prstGeom prst="rect">
-            <a:avLst/>
-          </a:prstGeom>
-          <a:noFill/>
-        </p:spPr>
-        <p:txBody>
-          <a:bodyPr wrap="square" anchor="t" lIns="0" rIns="0" tIns="0" bIns="0">
+            <a:off x="6507327" y="2788920"/>
+            <a:ext cx="457200" cy="841248"/>
+          </a:xfrm>
+          <a:prstGeom prst="rect">
+            <a:avLst/>
+          </a:prstGeom>
+          <a:noFill/>
+        </p:spPr>
+        <p:txBody>
+          <a:bodyPr wrap="square" anchor="ctr" lIns="0" rIns="0" tIns="0" bIns="0">
             <a:spAutoFit/>
           </a:bodyPr>
           <a:lstStyle/>
@@ -4405,35 +5674,35 @@
               </a:lnSpc>
             </a:pPr>
             <a:r>
-              <a:rPr sz="1600" b="1">
-                <a:solidFill>
-                  <a:srgbClr val="E8EEF6"/>
-                </a:solidFill>
-                <a:latin typeface="Segoe UI"/>
-              </a:rPr>
-              <a:t>forensics</a:t>
-            </a:r>
-          </a:p>
-        </p:txBody>
-      </p:sp>
-      <p:sp>
-        <p:nvSpPr>
-          <p:cNvPr id="14" name="TextBox 13"/>
+              <a:rPr sz="2400" b="1">
+                <a:solidFill>
+                  <a:srgbClr val="9AAAC0"/>
+                </a:solidFill>
+                <a:latin typeface="Segoe UI"/>
+              </a:rPr>
+              <a:t>1</a:t>
+            </a:r>
+          </a:p>
+        </p:txBody>
+      </p:sp>
+      <p:sp>
+        <p:nvSpPr>
+          <p:cNvPr id="20" name="TextBox 19"/>
           <p:cNvSpPr txBox="1"/>
           <p:nvPr/>
         </p:nvSpPr>
         <p:spPr>
           <a:xfrm>
-            <a:off x="6492240" y="3291840"/>
-            <a:ext cx="1280160" cy="365760"/>
-          </a:xfrm>
-          <a:prstGeom prst="rect">
-            <a:avLst/>
-          </a:prstGeom>
-          <a:noFill/>
-        </p:spPr>
-        <p:txBody>
-          <a:bodyPr wrap="square" anchor="t" lIns="0" rIns="0" tIns="0" bIns="0">
+            <a:off x="7010247" y="2788920"/>
+            <a:ext cx="4449927" cy="841248"/>
+          </a:xfrm>
+          <a:prstGeom prst="rect">
+            <a:avLst/>
+          </a:prstGeom>
+          <a:noFill/>
+        </p:spPr>
+        <p:txBody>
+          <a:bodyPr wrap="square" anchor="ctr" lIns="0" rIns="0" tIns="0" bIns="0">
             <a:spAutoFit/>
           </a:bodyPr>
           <a:lstStyle/>
@@ -4444,27 +5713,27 @@
               </a:lnSpc>
             </a:pPr>
             <a:r>
-              <a:rPr sz="1200" b="0">
-                <a:solidFill>
-                  <a:srgbClr val="8C9DB5"/>
-                </a:solidFill>
-                <a:latin typeface="Segoe UI"/>
-              </a:rPr>
-              <a:t>разметка из спектра?</a:t>
-            </a:r>
-          </a:p>
-        </p:txBody>
-      </p:sp>
-      <p:sp>
-        <p:nvSpPr>
-          <p:cNvPr id="15" name="Rounded Rectangle 14"/>
+              <a:rPr sz="2000" b="0">
+                <a:solidFill>
+                  <a:srgbClr val="E8EEF6"/>
+                </a:solidFill>
+                <a:latin typeface="Segoe UI"/>
+              </a:rPr>
+              <a:t>Разметка на снимках L2A</a:t>
+            </a:r>
+          </a:p>
+        </p:txBody>
+      </p:sp>
+      <p:sp>
+        <p:nvSpPr>
+          <p:cNvPr id="21" name="Rounded Rectangle 20"/>
           <p:cNvSpPr/>
           <p:nvPr/>
         </p:nvSpPr>
         <p:spPr>
           <a:xfrm>
-            <a:off x="8138160" y="2743200"/>
-            <a:ext cx="1645920" cy="1005840"/>
+            <a:off x="6278727" y="3794760"/>
+            <a:ext cx="5364327" cy="841248"/>
           </a:xfrm>
           <a:prstGeom prst="roundRect">
             <a:avLst>
@@ -4474,9 +5743,9 @@
           <a:solidFill>
             <a:srgbClr val="121C2E"/>
           </a:solidFill>
-          <a:ln w="15875">
+          <a:ln w="19050">
             <a:solidFill>
-              <a:srgbClr val="24334A"/>
+              <a:srgbClr val="2A3A55"/>
             </a:solidFill>
           </a:ln>
           <a:effectLst/>
@@ -4505,22 +5774,22 @@
       </p:sp>
       <p:sp>
         <p:nvSpPr>
-          <p:cNvPr id="16" name="TextBox 15"/>
+          <p:cNvPr id="22" name="TextBox 21"/>
           <p:cNvSpPr txBox="1"/>
           <p:nvPr/>
         </p:nvSpPr>
         <p:spPr>
           <a:xfrm>
-            <a:off x="8321040" y="2907792"/>
-            <a:ext cx="1280160" cy="365760"/>
-          </a:xfrm>
-          <a:prstGeom prst="rect">
-            <a:avLst/>
-          </a:prstGeom>
-          <a:noFill/>
-        </p:spPr>
-        <p:txBody>
-          <a:bodyPr wrap="square" anchor="t" lIns="0" rIns="0" tIns="0" bIns="0">
+            <a:off x="6507327" y="3794760"/>
+            <a:ext cx="457200" cy="841248"/>
+          </a:xfrm>
+          <a:prstGeom prst="rect">
+            <a:avLst/>
+          </a:prstGeom>
+          <a:noFill/>
+        </p:spPr>
+        <p:txBody>
+          <a:bodyPr wrap="square" anchor="ctr" lIns="0" rIns="0" tIns="0" bIns="0">
             <a:spAutoFit/>
           </a:bodyPr>
           <a:lstStyle/>
@@ -4531,35 +5800,35 @@
               </a:lnSpc>
             </a:pPr>
             <a:r>
-              <a:rPr sz="1600" b="1">
-                <a:solidFill>
-                  <a:srgbClr val="E8EEF6"/>
-                </a:solidFill>
-                <a:latin typeface="Segoe UI"/>
-              </a:rPr>
-              <a:t>adapter</a:t>
-            </a:r>
-          </a:p>
-        </p:txBody>
-      </p:sp>
-      <p:sp>
-        <p:nvSpPr>
-          <p:cNvPr id="17" name="TextBox 16"/>
+              <a:rPr sz="2400" b="1">
+                <a:solidFill>
+                  <a:srgbClr val="9AAAC0"/>
+                </a:solidFill>
+                <a:latin typeface="Segoe UI"/>
+              </a:rPr>
+              <a:t>2</a:t>
+            </a:r>
+          </a:p>
+        </p:txBody>
+      </p:sp>
+      <p:sp>
+        <p:nvSpPr>
+          <p:cNvPr id="23" name="TextBox 22"/>
           <p:cNvSpPr txBox="1"/>
           <p:nvPr/>
         </p:nvSpPr>
         <p:spPr>
           <a:xfrm>
-            <a:off x="8321040" y="3291840"/>
-            <a:ext cx="1280160" cy="365760"/>
-          </a:xfrm>
-          <a:prstGeom prst="rect">
-            <a:avLst/>
-          </a:prstGeom>
-          <a:noFill/>
-        </p:spPr>
-        <p:txBody>
-          <a:bodyPr wrap="square" anchor="t" lIns="0" rIns="0" tIns="0" bIns="0">
+            <a:off x="7010247" y="3794760"/>
+            <a:ext cx="4449927" cy="841248"/>
+          </a:xfrm>
+          <a:prstGeom prst="rect">
+            <a:avLst/>
+          </a:prstGeom>
+          <a:noFill/>
+        </p:spPr>
+        <p:txBody>
+          <a:bodyPr wrap="square" anchor="ctr" lIns="0" rIns="0" tIns="0" bIns="0">
             <a:spAutoFit/>
           </a:bodyPr>
           <a:lstStyle/>
@@ -4570,27 +5839,27 @@
               </a:lnSpc>
             </a:pPr>
             <a:r>
-              <a:rPr sz="1200" b="0">
-                <a:solidFill>
-                  <a:srgbClr val="8C9DB5"/>
-                </a:solidFill>
-                <a:latin typeface="Segoe UI"/>
-              </a:rPr>
-              <a:t>YAML → наш формат</a:t>
-            </a:r>
-          </a:p>
-        </p:txBody>
-      </p:sp>
-      <p:sp>
-        <p:nvSpPr>
-          <p:cNvPr id="18" name="Rounded Rectangle 17"/>
+              <a:rPr sz="2000" b="0">
+                <a:solidFill>
+                  <a:srgbClr val="E8EEF6"/>
+                </a:solidFill>
+                <a:latin typeface="Segoe UI"/>
+              </a:rPr>
+              <a:t>Больше дат на район</a:t>
+            </a:r>
+          </a:p>
+        </p:txBody>
+      </p:sp>
+      <p:sp>
+        <p:nvSpPr>
+          <p:cNvPr id="24" name="Rounded Rectangle 23"/>
           <p:cNvSpPr/>
           <p:nvPr/>
         </p:nvSpPr>
         <p:spPr>
           <a:xfrm>
-            <a:off x="9966960" y="2743200"/>
-            <a:ext cx="1645920" cy="1005840"/>
+            <a:off x="6278727" y="4800600"/>
+            <a:ext cx="5364327" cy="841248"/>
           </a:xfrm>
           <a:prstGeom prst="roundRect">
             <a:avLst>
@@ -4600,9 +5869,9 @@
           <a:solidFill>
             <a:srgbClr val="121C2E"/>
           </a:solidFill>
-          <a:ln w="15875">
+          <a:ln w="19050">
             <a:solidFill>
-              <a:srgbClr val="24334A"/>
+              <a:srgbClr val="2A3A55"/>
             </a:solidFill>
           </a:ln>
           <a:effectLst/>
@@ -4631,22 +5900,22 @@
       </p:sp>
       <p:sp>
         <p:nvSpPr>
-          <p:cNvPr id="19" name="TextBox 18"/>
+          <p:cNvPr id="25" name="TextBox 24"/>
           <p:cNvSpPr txBox="1"/>
           <p:nvPr/>
         </p:nvSpPr>
         <p:spPr>
           <a:xfrm>
-            <a:off x="10149840" y="2907792"/>
-            <a:ext cx="1280160" cy="365760"/>
-          </a:xfrm>
-          <a:prstGeom prst="rect">
-            <a:avLst/>
-          </a:prstGeom>
-          <a:noFill/>
-        </p:spPr>
-        <p:txBody>
-          <a:bodyPr wrap="square" anchor="t" lIns="0" rIns="0" tIns="0" bIns="0">
+            <a:off x="6507327" y="4800600"/>
+            <a:ext cx="457200" cy="841248"/>
+          </a:xfrm>
+          <a:prstGeom prst="rect">
+            <a:avLst/>
+          </a:prstGeom>
+          <a:noFill/>
+        </p:spPr>
+        <p:txBody>
+          <a:bodyPr wrap="square" anchor="ctr" lIns="0" rIns="0" tIns="0" bIns="0">
             <a:spAutoFit/>
           </a:bodyPr>
           <a:lstStyle/>
@@ -4657,35 +5926,35 @@
               </a:lnSpc>
             </a:pPr>
             <a:r>
-              <a:rPr sz="1600" b="1">
-                <a:solidFill>
-                  <a:srgbClr val="E8EEF6"/>
-                </a:solidFill>
-                <a:latin typeface="Segoe UI"/>
-              </a:rPr>
-              <a:t>provenance</a:t>
-            </a:r>
-          </a:p>
-        </p:txBody>
-      </p:sp>
-      <p:sp>
-        <p:nvSpPr>
-          <p:cNvPr id="20" name="TextBox 19"/>
+              <a:rPr sz="2400" b="1">
+                <a:solidFill>
+                  <a:srgbClr val="9AAAC0"/>
+                </a:solidFill>
+                <a:latin typeface="Segoe UI"/>
+              </a:rPr>
+              <a:t>3</a:t>
+            </a:r>
+          </a:p>
+        </p:txBody>
+      </p:sp>
+      <p:sp>
+        <p:nvSpPr>
+          <p:cNvPr id="26" name="TextBox 25"/>
           <p:cNvSpPr txBox="1"/>
           <p:nvPr/>
         </p:nvSpPr>
         <p:spPr>
           <a:xfrm>
-            <a:off x="10149840" y="3291840"/>
-            <a:ext cx="1280160" cy="365760"/>
-          </a:xfrm>
-          <a:prstGeom prst="rect">
-            <a:avLst/>
-          </a:prstGeom>
-          <a:noFill/>
-        </p:spPr>
-        <p:txBody>
-          <a:bodyPr wrap="square" anchor="t" lIns="0" rIns="0" tIns="0" bIns="0">
+            <a:off x="7010247" y="4800600"/>
+            <a:ext cx="4449927" cy="841248"/>
+          </a:xfrm>
+          <a:prstGeom prst="rect">
+            <a:avLst/>
+          </a:prstGeom>
+          <a:noFill/>
+        </p:spPr>
+        <p:txBody>
+          <a:bodyPr wrap="square" anchor="ctr" lIns="0" rIns="0" tIns="0" bIns="0">
             <a:spAutoFit/>
           </a:bodyPr>
           <a:lstStyle/>
@@ -4696,512 +5965,13 @@
               </a:lnSpc>
             </a:pPr>
             <a:r>
-              <a:rPr sz="1200" b="0">
-                <a:solidFill>
-                  <a:srgbClr val="8C9DB5"/>
-                </a:solidFill>
-                <a:latin typeface="Segoe UI"/>
-              </a:rPr>
-              <a:t>пересечения с MARIDA</a:t>
-            </a:r>
-          </a:p>
-        </p:txBody>
-      </p:sp>
-      <p:sp>
-        <p:nvSpPr>
-          <p:cNvPr id="21" name="TextBox 20"/>
-          <p:cNvSpPr txBox="1"/>
-          <p:nvPr/>
-        </p:nvSpPr>
-        <p:spPr>
-          <a:xfrm>
-            <a:off x="4480560" y="4114800"/>
-            <a:ext cx="7132320" cy="1097280"/>
-          </a:xfrm>
-          <a:prstGeom prst="rect">
-            <a:avLst/>
-          </a:prstGeom>
-          <a:noFill/>
-        </p:spPr>
-        <p:txBody>
-          <a:bodyPr wrap="square" anchor="t" lIns="0" rIns="0" tIns="0" bIns="0">
-            <a:spAutoFit/>
-          </a:bodyPr>
-          <a:lstStyle/>
-          <a:p>
-            <a:pPr algn="l">
-              <a:lnSpc>
-                <a:spcPct val="125000"/>
-              </a:lnSpc>
-            </a:pPr>
-            <a:r>
-              <a:rPr sz="1600" b="0">
-                <a:solidFill>
-                  <a:srgbClr val="8C9DB5"/>
-                </a:solidFill>
-                <a:latin typeface="Segoe UI"/>
-              </a:rPr>
-              <a:t>Проверено на MARIDA и чужом датасете Sentinel-2. Дальше — переобучение LightGBM за минуты.</a:t>
-            </a:r>
-          </a:p>
-        </p:txBody>
-      </p:sp>
-    </p:spTree>
-  </p:cSld>
-  <p:clrMapOvr>
-    <a:masterClrMapping/>
-  </p:clrMapOvr>
-</p:sld>
-</file>
-
-<file path=ppt/slides/slide12.xml><?xml version="1.0" encoding="utf-8"?>
-<p:sld xmlns:a="http://schemas.openxmlformats.org/drawingml/2006/main" xmlns:p="http://schemas.openxmlformats.org/presentationml/2006/main" xmlns:r="http://schemas.openxmlformats.org/officeDocument/2006/relationships">
-  <p:cSld>
-    <p:bg>
-      <p:bgPr>
-        <a:solidFill>
-          <a:srgbClr val="0A111F"/>
-        </a:solidFill>
-        <a:effectLst/>
-      </p:bgPr>
-    </p:bg>
-    <p:spTree>
-      <p:nvGrpSpPr>
-        <p:cNvPr id="1" name=""/>
-        <p:cNvGrpSpPr/>
-        <p:nvPr/>
-      </p:nvGrpSpPr>
-      <p:grpSpPr/>
-      <p:sp>
-        <p:nvSpPr>
-          <p:cNvPr id="2" name="Rectangle 1"/>
-          <p:cNvSpPr/>
-          <p:nvPr/>
-        </p:nvSpPr>
-        <p:spPr>
-          <a:xfrm>
-            <a:off x="548640" y="502920"/>
-            <a:ext cx="73152" cy="384048"/>
-          </a:xfrm>
-          <a:prstGeom prst="rect">
-            <a:avLst/>
-          </a:prstGeom>
-          <a:solidFill>
-            <a:srgbClr val="FF6B5A"/>
-          </a:solidFill>
-          <a:ln>
-            <a:noFill/>
-          </a:ln>
-          <a:effectLst/>
-        </p:spPr>
-        <p:style>
-          <a:lnRef idx="1">
-            <a:schemeClr val="accent1"/>
-          </a:lnRef>
-          <a:fillRef idx="3">
-            <a:schemeClr val="accent1"/>
-          </a:fillRef>
-          <a:effectRef idx="2">
-            <a:schemeClr val="accent1"/>
-          </a:effectRef>
-          <a:fontRef idx="minor">
-            <a:schemeClr val="lt1"/>
-          </a:fontRef>
-        </p:style>
-        <p:txBody>
-          <a:bodyPr rtlCol="0" anchor="ctr"/>
-          <a:lstStyle/>
-          <a:p>
-            <a:pPr algn="ctr"/>
-          </a:p>
-        </p:txBody>
-      </p:sp>
-      <p:sp>
-        <p:nvSpPr>
-          <p:cNvPr id="3" name="TextBox 2"/>
-          <p:cNvSpPr txBox="1"/>
-          <p:nvPr/>
-        </p:nvSpPr>
-        <p:spPr>
-          <a:xfrm>
-            <a:off x="777240" y="475488"/>
-            <a:ext cx="8229600" cy="274320"/>
-          </a:xfrm>
-          <a:prstGeom prst="rect">
-            <a:avLst/>
-          </a:prstGeom>
-          <a:noFill/>
-        </p:spPr>
-        <p:txBody>
-          <a:bodyPr wrap="square" anchor="t" lIns="0" rIns="0" tIns="0" bIns="0">
-            <a:spAutoFit/>
-          </a:bodyPr>
-          <a:lstStyle/>
-          <a:p>
-            <a:pPr algn="l">
-              <a:lnSpc>
-                <a:spcPct val="110000"/>
-              </a:lnSpc>
-            </a:pPr>
-            <a:r>
-              <a:rPr sz="1200" b="1">
-                <a:solidFill>
-                  <a:srgbClr val="8C9DB5"/>
-                </a:solidFill>
-                <a:latin typeface="Segoe UI"/>
-              </a:rPr>
-              <a:t>ЧТО ДАЛЬШЕ</a:t>
-            </a:r>
-          </a:p>
-        </p:txBody>
-      </p:sp>
-      <p:sp>
-        <p:nvSpPr>
-          <p:cNvPr id="4" name="TextBox 3"/>
-          <p:cNvSpPr txBox="1"/>
-          <p:nvPr/>
-        </p:nvSpPr>
-        <p:spPr>
-          <a:xfrm>
-            <a:off x="548640" y="960120"/>
-            <a:ext cx="11094415" cy="1188720"/>
-          </a:xfrm>
-          <a:prstGeom prst="rect">
-            <a:avLst/>
-          </a:prstGeom>
-          <a:noFill/>
-        </p:spPr>
-        <p:txBody>
-          <a:bodyPr wrap="square" anchor="t" lIns="0" rIns="0" tIns="0" bIns="0">
-            <a:spAutoFit/>
-          </a:bodyPr>
-          <a:lstStyle/>
-          <a:p>
-            <a:pPr algn="l">
-              <a:lnSpc>
-                <a:spcPct val="100000"/>
-              </a:lnSpc>
-            </a:pPr>
-            <a:r>
-              <a:rPr sz="3200" b="1">
+              <a:rPr sz="2000" b="0">
                 <a:solidFill>
                   <a:srgbClr val="E8EEF6"/>
                 </a:solidFill>
                 <a:latin typeface="Segoe UI"/>
               </a:rPr>
-              <a:t>Дальше: калибровка на L2A и повторяемость находок во времени</a:t>
-            </a:r>
-          </a:p>
-        </p:txBody>
-      </p:sp>
-      <p:sp>
-        <p:nvSpPr>
-          <p:cNvPr id="5" name="TextBox 4"/>
-          <p:cNvSpPr txBox="1"/>
-          <p:nvPr/>
-        </p:nvSpPr>
-        <p:spPr>
-          <a:xfrm>
-            <a:off x="10271455" y="6400800"/>
-            <a:ext cx="1371600" cy="274320"/>
-          </a:xfrm>
-          <a:prstGeom prst="rect">
-            <a:avLst/>
-          </a:prstGeom>
-          <a:noFill/>
-        </p:spPr>
-        <p:txBody>
-          <a:bodyPr wrap="square" anchor="t" lIns="0" rIns="0" tIns="0" bIns="0">
-            <a:spAutoFit/>
-          </a:bodyPr>
-          <a:lstStyle/>
-          <a:p>
-            <a:pPr algn="r">
-              <a:lnSpc>
-                <a:spcPct val="110000"/>
-              </a:lnSpc>
-            </a:pPr>
-            <a:r>
-              <a:rPr sz="1100" b="0">
-                <a:solidFill>
-                  <a:srgbClr val="8C9DB5"/>
-                </a:solidFill>
-                <a:latin typeface="Segoe UI"/>
-              </a:rPr>
-              <a:t>12 / 12</a:t>
-            </a:r>
-          </a:p>
-        </p:txBody>
-      </p:sp>
-      <p:sp>
-        <p:nvSpPr>
-          <p:cNvPr id="6" name="TextBox 5"/>
-          <p:cNvSpPr txBox="1"/>
-          <p:nvPr/>
-        </p:nvSpPr>
-        <p:spPr>
-          <a:xfrm>
-            <a:off x="548640" y="6400800"/>
-            <a:ext cx="7315200" cy="274320"/>
-          </a:xfrm>
-          <a:prstGeom prst="rect">
-            <a:avLst/>
-          </a:prstGeom>
-          <a:noFill/>
-        </p:spPr>
-        <p:txBody>
-          <a:bodyPr wrap="square" anchor="t" lIns="0" rIns="0" tIns="0" bIns="0">
-            <a:spAutoFit/>
-          </a:bodyPr>
-          <a:lstStyle/>
-          <a:p>
-            <a:pPr algn="l">
-              <a:lnSpc>
-                <a:spcPct val="110000"/>
-              </a:lnSpc>
-            </a:pPr>
-            <a:r>
-              <a:rPr sz="1100" b="0">
-                <a:solidFill>
-                  <a:srgbClr val="8C9DB5"/>
-                </a:solidFill>
-                <a:latin typeface="Segoe UI"/>
-              </a:rPr>
-              <a:t>Макропластик · Sentinel-2</a:t>
-            </a:r>
-          </a:p>
-        </p:txBody>
-      </p:sp>
-      <p:sp>
-        <p:nvSpPr>
-          <p:cNvPr id="7" name="TextBox 6"/>
-          <p:cNvSpPr txBox="1"/>
-          <p:nvPr/>
-        </p:nvSpPr>
-        <p:spPr>
-          <a:xfrm>
-            <a:off x="548640" y="2560320"/>
-            <a:ext cx="914400" cy="914400"/>
-          </a:xfrm>
-          <a:prstGeom prst="rect">
-            <a:avLst/>
-          </a:prstGeom>
-          <a:noFill/>
-        </p:spPr>
-        <p:txBody>
-          <a:bodyPr wrap="square" anchor="t" lIns="0" rIns="0" tIns="0" bIns="0">
-            <a:spAutoFit/>
-          </a:bodyPr>
-          <a:lstStyle/>
-          <a:p>
-            <a:pPr algn="l">
-              <a:lnSpc>
-                <a:spcPct val="110000"/>
-              </a:lnSpc>
-            </a:pPr>
-            <a:r>
-              <a:rPr sz="4800" b="1">
-                <a:solidFill>
-                  <a:srgbClr val="FF6B5A"/>
-                </a:solidFill>
-                <a:latin typeface="Segoe UI"/>
-              </a:rPr>
-              <a:t>1</a:t>
-            </a:r>
-          </a:p>
-        </p:txBody>
-      </p:sp>
-      <p:sp>
-        <p:nvSpPr>
-          <p:cNvPr id="8" name="TextBox 7"/>
-          <p:cNvSpPr txBox="1"/>
-          <p:nvPr/>
-        </p:nvSpPr>
-        <p:spPr>
-          <a:xfrm>
-            <a:off x="1554480" y="2743200"/>
-            <a:ext cx="9601200" cy="731520"/>
-          </a:xfrm>
-          <a:prstGeom prst="rect">
-            <a:avLst/>
-          </a:prstGeom>
-          <a:noFill/>
-        </p:spPr>
-        <p:txBody>
-          <a:bodyPr wrap="square" anchor="t" lIns="0" rIns="0" tIns="0" bIns="0">
-            <a:spAutoFit/>
-          </a:bodyPr>
-          <a:lstStyle/>
-          <a:p>
-            <a:pPr algn="l">
-              <a:lnSpc>
-                <a:spcPct val="110000"/>
-              </a:lnSpc>
-            </a:pPr>
-            <a:r>
-              <a:rPr sz="2400" b="0">
-                <a:solidFill>
-                  <a:srgbClr val="E8EEF6"/>
-                </a:solidFill>
-                <a:latin typeface="Segoe UI"/>
-              </a:rPr>
-              <a:t>Дообучить модель на размеченных L2A-сценах</a:t>
-            </a:r>
-          </a:p>
-        </p:txBody>
-      </p:sp>
-      <p:sp>
-        <p:nvSpPr>
-          <p:cNvPr id="9" name="TextBox 8"/>
-          <p:cNvSpPr txBox="1"/>
-          <p:nvPr/>
-        </p:nvSpPr>
-        <p:spPr>
-          <a:xfrm>
-            <a:off x="548640" y="3657600"/>
-            <a:ext cx="914400" cy="914400"/>
-          </a:xfrm>
-          <a:prstGeom prst="rect">
-            <a:avLst/>
-          </a:prstGeom>
-          <a:noFill/>
-        </p:spPr>
-        <p:txBody>
-          <a:bodyPr wrap="square" anchor="t" lIns="0" rIns="0" tIns="0" bIns="0">
-            <a:spAutoFit/>
-          </a:bodyPr>
-          <a:lstStyle/>
-          <a:p>
-            <a:pPr algn="l">
-              <a:lnSpc>
-                <a:spcPct val="110000"/>
-              </a:lnSpc>
-            </a:pPr>
-            <a:r>
-              <a:rPr sz="4800" b="1">
-                <a:solidFill>
-                  <a:srgbClr val="8C9DB5"/>
-                </a:solidFill>
-                <a:latin typeface="Segoe UI"/>
-              </a:rPr>
-              <a:t>2</a:t>
-            </a:r>
-          </a:p>
-        </p:txBody>
-      </p:sp>
-      <p:sp>
-        <p:nvSpPr>
-          <p:cNvPr id="10" name="TextBox 9"/>
-          <p:cNvSpPr txBox="1"/>
-          <p:nvPr/>
-        </p:nvSpPr>
-        <p:spPr>
-          <a:xfrm>
-            <a:off x="1554480" y="3840480"/>
-            <a:ext cx="9601200" cy="731520"/>
-          </a:xfrm>
-          <a:prstGeom prst="rect">
-            <a:avLst/>
-          </a:prstGeom>
-          <a:noFill/>
-        </p:spPr>
-        <p:txBody>
-          <a:bodyPr wrap="square" anchor="t" lIns="0" rIns="0" tIns="0" bIns="0">
-            <a:spAutoFit/>
-          </a:bodyPr>
-          <a:lstStyle/>
-          <a:p>
-            <a:pPr algn="l">
-              <a:lnSpc>
-                <a:spcPct val="110000"/>
-              </a:lnSpc>
-            </a:pPr>
-            <a:r>
-              <a:rPr sz="2400" b="0">
-                <a:solidFill>
-                  <a:srgbClr val="E8EEF6"/>
-                </a:solidFill>
-                <a:latin typeface="Segoe UI"/>
-              </a:rPr>
-              <a:t>Больше дат на район: повторяемость = надёжность</a:t>
-            </a:r>
-          </a:p>
-        </p:txBody>
-      </p:sp>
-      <p:sp>
-        <p:nvSpPr>
-          <p:cNvPr id="11" name="TextBox 10"/>
-          <p:cNvSpPr txBox="1"/>
-          <p:nvPr/>
-        </p:nvSpPr>
-        <p:spPr>
-          <a:xfrm>
-            <a:off x="548640" y="4754880"/>
-            <a:ext cx="914400" cy="914400"/>
-          </a:xfrm>
-          <a:prstGeom prst="rect">
-            <a:avLst/>
-          </a:prstGeom>
-          <a:noFill/>
-        </p:spPr>
-        <p:txBody>
-          <a:bodyPr wrap="square" anchor="t" lIns="0" rIns="0" tIns="0" bIns="0">
-            <a:spAutoFit/>
-          </a:bodyPr>
-          <a:lstStyle/>
-          <a:p>
-            <a:pPr algn="l">
-              <a:lnSpc>
-                <a:spcPct val="110000"/>
-              </a:lnSpc>
-            </a:pPr>
-            <a:r>
-              <a:rPr sz="4800" b="1">
-                <a:solidFill>
-                  <a:srgbClr val="8C9DB5"/>
-                </a:solidFill>
-                <a:latin typeface="Segoe UI"/>
-              </a:rPr>
-              <a:t>3</a:t>
-            </a:r>
-          </a:p>
-        </p:txBody>
-      </p:sp>
-      <p:sp>
-        <p:nvSpPr>
-          <p:cNvPr id="12" name="TextBox 11"/>
-          <p:cNvSpPr txBox="1"/>
-          <p:nvPr/>
-        </p:nvSpPr>
-        <p:spPr>
-          <a:xfrm>
-            <a:off x="1554480" y="4937760"/>
-            <a:ext cx="9601200" cy="731520"/>
-          </a:xfrm>
-          <a:prstGeom prst="rect">
-            <a:avLst/>
-          </a:prstGeom>
-          <a:noFill/>
-        </p:spPr>
-        <p:txBody>
-          <a:bodyPr wrap="square" anchor="t" lIns="0" rIns="0" tIns="0" bIns="0">
-            <a:spAutoFit/>
-          </a:bodyPr>
-          <a:lstStyle/>
-          <a:p>
-            <a:pPr algn="l">
-              <a:lnSpc>
-                <a:spcPct val="110000"/>
-              </a:lnSpc>
-            </a:pPr>
-            <a:r>
-              <a:rPr sz="2400" b="0">
-                <a:solidFill>
-                  <a:srgbClr val="E8EEF6"/>
-                </a:solidFill>
-                <a:latin typeface="Segoe UI"/>
-              </a:rPr>
-              <a:t>Результаты обследований — обратно в разметку</a:t>
+              <a:t>Итоги обследований → в обучение</a:t>
             </a:r>
           </a:p>
         </p:txBody>
@@ -5240,14 +6010,14 @@
         </p:nvSpPr>
         <p:spPr>
           <a:xfrm>
-            <a:off x="548640" y="502920"/>
-            <a:ext cx="73152" cy="384048"/>
+            <a:off x="548640" y="457200"/>
+            <a:ext cx="73152" cy="329184"/>
           </a:xfrm>
           <a:prstGeom prst="rect">
             <a:avLst/>
           </a:prstGeom>
           <a:solidFill>
-            <a:srgbClr val="FF6B5A"/>
+            <a:srgbClr val="FF6B4A"/>
           </a:solidFill>
           <a:ln>
             <a:noFill/>
@@ -5284,8 +6054,8 @@
         </p:nvSpPr>
         <p:spPr>
           <a:xfrm>
-            <a:off x="777240" y="475488"/>
-            <a:ext cx="8229600" cy="274320"/>
+            <a:off x="777240" y="457200"/>
+            <a:ext cx="8229600" cy="320040"/>
           </a:xfrm>
           <a:prstGeom prst="rect">
             <a:avLst/>
@@ -5304,9 +6074,9 @@
               </a:lnSpc>
             </a:pPr>
             <a:r>
-              <a:rPr sz="1200" b="1">
-                <a:solidFill>
-                  <a:srgbClr val="8C9DB5"/>
+              <a:rPr sz="1400" b="1">
+                <a:solidFill>
+                  <a:srgbClr val="9AAAC0"/>
                 </a:solidFill>
                 <a:latin typeface="Segoe UI"/>
               </a:rPr>
@@ -5323,8 +6093,8 @@
         </p:nvSpPr>
         <p:spPr>
           <a:xfrm>
-            <a:off x="548640" y="960120"/>
-            <a:ext cx="11094415" cy="1188720"/>
+            <a:off x="548640" y="914400"/>
+            <a:ext cx="11094415" cy="1097280"/>
           </a:xfrm>
           <a:prstGeom prst="rect">
             <a:avLst/>
@@ -5343,13 +6113,13 @@
               </a:lnSpc>
             </a:pPr>
             <a:r>
-              <a:rPr sz="3200" b="1">
+              <a:rPr sz="3000" b="1">
                 <a:solidFill>
                   <a:srgbClr val="E8EEF6"/>
                 </a:solidFill>
                 <a:latin typeface="Segoe UI"/>
               </a:rPr>
-              <a:t>Мусора в MARIDA всего 3 399 размеченных пикселей: ищем иголки в стоге</a:t>
+              <a:t>Размеченного мусора мало — 3 399 пикселей, поэтому добавили MADOS</a:t>
             </a:r>
           </a:p>
         </p:txBody>
@@ -5362,7 +6132,7 @@
         </p:nvSpPr>
         <p:spPr>
           <a:xfrm>
-            <a:off x="10271455" y="6400800"/>
+            <a:off x="10271455" y="6446520"/>
             <a:ext cx="1371600" cy="274320"/>
           </a:xfrm>
           <a:prstGeom prst="rect">
@@ -5382,13 +6152,13 @@
               </a:lnSpc>
             </a:pPr>
             <a:r>
-              <a:rPr sz="1100" b="0">
-                <a:solidFill>
-                  <a:srgbClr val="8C9DB5"/>
-                </a:solidFill>
-                <a:latin typeface="Segoe UI"/>
-              </a:rPr>
-              <a:t>2 / 12</a:t>
+              <a:rPr sz="1200" b="0">
+                <a:solidFill>
+                  <a:srgbClr val="9AAAC0"/>
+                </a:solidFill>
+                <a:latin typeface="Segoe UI"/>
+              </a:rPr>
+              <a:t>2 / 10</a:t>
             </a:r>
           </a:p>
         </p:txBody>
@@ -5401,7 +6171,7 @@
         </p:nvSpPr>
         <p:spPr>
           <a:xfrm>
-            <a:off x="548640" y="6400800"/>
+            <a:off x="548640" y="6446520"/>
             <a:ext cx="7315200" cy="274320"/>
           </a:xfrm>
           <a:prstGeom prst="rect">
@@ -5421,13 +6191,13 @@
               </a:lnSpc>
             </a:pPr>
             <a:r>
-              <a:rPr sz="1100" b="0">
-                <a:solidFill>
-                  <a:srgbClr val="8C9DB5"/>
-                </a:solidFill>
-                <a:latin typeface="Segoe UI"/>
-              </a:rPr>
-              <a:t>Макропластик · Sentinel-2</a:t>
+              <a:rPr sz="1200" b="0">
+                <a:solidFill>
+                  <a:srgbClr val="9AAAC0"/>
+                </a:solidFill>
+                <a:latin typeface="Segoe UI"/>
+              </a:rPr>
+              <a:t>Морской мусор · Sentinel-2</a:t>
             </a:r>
           </a:p>
         </p:txBody>
@@ -5440,8 +6210,8 @@
         </p:nvSpPr>
         <p:spPr>
           <a:xfrm>
-            <a:off x="548640" y="2651760"/>
-            <a:ext cx="5029200" cy="1463040"/>
+            <a:off x="548640" y="2423160"/>
+            <a:ext cx="3291840" cy="1280160"/>
           </a:xfrm>
           <a:prstGeom prst="rect">
             <a:avLst/>
@@ -5460,13 +6230,13 @@
               </a:lnSpc>
             </a:pPr>
             <a:r>
-              <a:rPr sz="9600" b="1">
-                <a:solidFill>
-                  <a:srgbClr val="FF6B5A"/>
-                </a:solidFill>
-                <a:latin typeface="Segoe UI"/>
-              </a:rPr>
-              <a:t>3 399</a:t>
+              <a:rPr sz="8800" b="1">
+                <a:solidFill>
+                  <a:srgbClr val="FF6B4A"/>
+                </a:solidFill>
+                <a:latin typeface="Segoe UI"/>
+              </a:rPr>
+              <a:t>3 399</a:t>
             </a:r>
           </a:p>
         </p:txBody>
@@ -5479,8 +6249,8 @@
         </p:nvSpPr>
         <p:spPr>
           <a:xfrm>
-            <a:off x="548640" y="4160520"/>
-            <a:ext cx="5029200" cy="822960"/>
+            <a:off x="548640" y="3794760"/>
+            <a:ext cx="3291840" cy="1463040"/>
           </a:xfrm>
           <a:prstGeom prst="rect">
             <a:avLst/>
@@ -5495,33 +6265,33 @@
           <a:p>
             <a:pPr algn="l">
               <a:lnSpc>
-                <a:spcPct val="110000"/>
-              </a:lnSpc>
-            </a:pPr>
-            <a:r>
-              <a:rPr sz="1800" b="0">
-                <a:solidFill>
-                  <a:srgbClr val="8C9DB5"/>
-                </a:solidFill>
-                <a:latin typeface="Segoe UI"/>
-              </a:rPr>
-              <a:t>пикселей Marine Debris</a:t>
-            </a:r>
-          </a:p>
-          <a:p>
-            <a:pPr algn="l">
-              <a:lnSpc>
-                <a:spcPct val="110000"/>
-              </a:lnSpc>
-            </a:pPr>
-            <a:r>
-              <a:rPr sz="1800" b="0">
-                <a:solidFill>
-                  <a:srgbClr val="8C9DB5"/>
-                </a:solidFill>
-                <a:latin typeface="Segoe UI"/>
-              </a:rPr>
-              <a:t>(High / Moderate / Low уверенность)</a:t>
+                <a:spcPct val="115000"/>
+              </a:lnSpc>
+            </a:pPr>
+            <a:r>
+              <a:rPr sz="2000" b="0">
+                <a:solidFill>
+                  <a:srgbClr val="9AAAC0"/>
+                </a:solidFill>
+                <a:latin typeface="Segoe UI"/>
+              </a:rPr>
+              <a:t>пикселей «мусора»</a:t>
+            </a:r>
+          </a:p>
+          <a:p>
+            <a:pPr algn="l">
+              <a:lnSpc>
+                <a:spcPct val="115000"/>
+              </a:lnSpc>
+            </a:pPr>
+            <a:r>
+              <a:rPr sz="2000" b="0">
+                <a:solidFill>
+                  <a:srgbClr val="9AAAC0"/>
+                </a:solidFill>
+                <a:latin typeface="Segoe UI"/>
+              </a:rPr>
+              <a:t>в MARIDA (CC BY 4.0)</a:t>
             </a:r>
           </a:p>
         </p:txBody>
@@ -5534,8 +6304,8 @@
         </p:nvSpPr>
         <p:spPr>
           <a:xfrm>
-            <a:off x="6035040" y="2743200"/>
-            <a:ext cx="1737360" cy="1005840"/>
+            <a:off x="3931920" y="2240280"/>
+            <a:ext cx="2423160" cy="2926080"/>
           </a:xfrm>
           <a:prstGeom prst="roundRect">
             <a:avLst>
@@ -5545,9 +6315,9 @@
           <a:solidFill>
             <a:srgbClr val="121C2E"/>
           </a:solidFill>
-          <a:ln w="15875">
+          <a:ln w="19050">
             <a:solidFill>
-              <a:srgbClr val="24334A"/>
+              <a:srgbClr val="2A3A55"/>
             </a:solidFill>
           </a:ln>
           <a:effectLst/>
@@ -5582,8 +6352,8 @@
         </p:nvSpPr>
         <p:spPr>
           <a:xfrm>
-            <a:off x="6217920" y="2907792"/>
-            <a:ext cx="1371600" cy="365760"/>
+            <a:off x="4133088" y="2404872"/>
+            <a:ext cx="2020824" cy="548640"/>
           </a:xfrm>
           <a:prstGeom prst="rect">
             <a:avLst/>
@@ -5602,13 +6372,13 @@
               </a:lnSpc>
             </a:pPr>
             <a:r>
-              <a:rPr sz="1600" b="1">
+              <a:rPr sz="2600" b="1">
                 <a:solidFill>
                   <a:srgbClr val="E8EEF6"/>
                 </a:solidFill>
                 <a:latin typeface="Segoe UI"/>
               </a:rPr>
-              <a:t>1 381</a:t>
+              <a:t>MARIDA</a:t>
             </a:r>
           </a:p>
         </p:txBody>
@@ -5621,8 +6391,8 @@
         </p:nvSpPr>
         <p:spPr>
           <a:xfrm>
-            <a:off x="6217920" y="3291840"/>
-            <a:ext cx="1371600" cy="365760"/>
+            <a:off x="4133088" y="2883661"/>
+            <a:ext cx="2020824" cy="2377440"/>
           </a:xfrm>
           <a:prstGeom prst="rect">
             <a:avLst/>
@@ -5641,13 +6411,61 @@
               </a:lnSpc>
             </a:pPr>
             <a:r>
-              <a:rPr sz="1200" b="0">
-                <a:solidFill>
-                  <a:srgbClr val="8C9DB5"/>
-                </a:solidFill>
-                <a:latin typeface="Segoe UI"/>
-              </a:rPr>
-              <a:t>патчей 256×256</a:t>
+              <a:rPr sz="1800" b="0">
+                <a:solidFill>
+                  <a:srgbClr val="9AAAC0"/>
+                </a:solidFill>
+                <a:latin typeface="Segoe UI"/>
+              </a:rPr>
+              <a:t>63 сцен</a:t>
+            </a:r>
+          </a:p>
+          <a:p>
+            <a:pPr algn="l">
+              <a:lnSpc>
+                <a:spcPct val="110000"/>
+              </a:lnSpc>
+            </a:pPr>
+            <a:r>
+              <a:rPr sz="1800" b="0">
+                <a:solidFill>
+                  <a:srgbClr val="9AAAC0"/>
+                </a:solidFill>
+                <a:latin typeface="Segoe UI"/>
+              </a:rPr>
+              <a:t>1 381 патчей</a:t>
+            </a:r>
+          </a:p>
+          <a:p>
+            <a:pPr algn="l">
+              <a:lnSpc>
+                <a:spcPct val="110000"/>
+              </a:lnSpc>
+            </a:pPr>
+            <a:r>
+              <a:rPr sz="1800" b="0">
+                <a:solidFill>
+                  <a:srgbClr val="9AAAC0"/>
+                </a:solidFill>
+                <a:latin typeface="Segoe UI"/>
+              </a:rPr>
+              <a:t>обучение + val</a:t>
+            </a:r>
+          </a:p>
+          <a:p>
+            <a:pPr algn="l">
+              <a:lnSpc>
+                <a:spcPct val="110000"/>
+              </a:lnSpc>
+            </a:pPr>
+            <a:r>
+              <a:rPr sz="1800" b="0">
+                <a:solidFill>
+                  <a:srgbClr val="9AAAC0"/>
+                </a:solidFill>
+                <a:latin typeface="Segoe UI"/>
+              </a:rPr>
+              <a:t>test не трогаем</a:t>
             </a:r>
           </a:p>
         </p:txBody>
@@ -5660,8 +6478,8 @@
         </p:nvSpPr>
         <p:spPr>
           <a:xfrm>
-            <a:off x="7955280" y="2743200"/>
-            <a:ext cx="1737360" cy="1005840"/>
+            <a:off x="6537960" y="2240280"/>
+            <a:ext cx="2423160" cy="2926080"/>
           </a:xfrm>
           <a:prstGeom prst="roundRect">
             <a:avLst>
@@ -5671,9 +6489,9 @@
           <a:solidFill>
             <a:srgbClr val="121C2E"/>
           </a:solidFill>
-          <a:ln w="15875">
+          <a:ln w="19050">
             <a:solidFill>
-              <a:srgbClr val="24334A"/>
+              <a:srgbClr val="FF6B4A"/>
             </a:solidFill>
           </a:ln>
           <a:effectLst/>
@@ -5708,8 +6526,8 @@
         </p:nvSpPr>
         <p:spPr>
           <a:xfrm>
-            <a:off x="8138160" y="2907792"/>
-            <a:ext cx="1371600" cy="365760"/>
+            <a:off x="6739128" y="2404872"/>
+            <a:ext cx="2020824" cy="548640"/>
           </a:xfrm>
           <a:prstGeom prst="rect">
             <a:avLst/>
@@ -5728,13 +6546,13 @@
               </a:lnSpc>
             </a:pPr>
             <a:r>
-              <a:rPr sz="1600" b="1">
-                <a:solidFill>
-                  <a:srgbClr val="E8EEF6"/>
-                </a:solidFill>
-                <a:latin typeface="Segoe UI"/>
-              </a:rPr>
-              <a:t>63</a:t>
+              <a:rPr sz="2600" b="1">
+                <a:solidFill>
+                  <a:srgbClr val="FF6B4A"/>
+                </a:solidFill>
+                <a:latin typeface="Segoe UI"/>
+              </a:rPr>
+              <a:t>MADOS</a:t>
             </a:r>
           </a:p>
         </p:txBody>
@@ -5747,8 +6565,8 @@
         </p:nvSpPr>
         <p:spPr>
           <a:xfrm>
-            <a:off x="8138160" y="3291840"/>
-            <a:ext cx="1371600" cy="365760"/>
+            <a:off x="6739128" y="2883661"/>
+            <a:ext cx="2020824" cy="2377440"/>
           </a:xfrm>
           <a:prstGeom prst="rect">
             <a:avLst/>
@@ -5767,13 +6585,45 @@
               </a:lnSpc>
             </a:pPr>
             <a:r>
-              <a:rPr sz="1200" b="0">
-                <a:solidFill>
-                  <a:srgbClr val="8C9DB5"/>
-                </a:solidFill>
-                <a:latin typeface="Segoe UI"/>
-              </a:rPr>
-              <a:t>сцен Sentinel-2</a:t>
+              <a:rPr sz="1800" b="0">
+                <a:solidFill>
+                  <a:srgbClr val="9AAAC0"/>
+                </a:solidFill>
+                <a:latin typeface="Segoe UI"/>
+              </a:rPr>
+              <a:t>+118 сцен</a:t>
+            </a:r>
+          </a:p>
+          <a:p>
+            <a:pPr algn="l">
+              <a:lnSpc>
+                <a:spcPct val="110000"/>
+              </a:lnSpc>
+            </a:pPr>
+            <a:r>
+              <a:rPr sz="1800" b="0">
+                <a:solidFill>
+                  <a:srgbClr val="9AAAC0"/>
+                </a:solidFill>
+                <a:latin typeface="Segoe UI"/>
+              </a:rPr>
+              <a:t>16 сцен убраны:</a:t>
+            </a:r>
+          </a:p>
+          <a:p>
+            <a:pPr algn="l">
+              <a:lnSpc>
+                <a:spcPct val="110000"/>
+              </a:lnSpc>
+            </a:pPr>
+            <a:r>
+              <a:rPr sz="1800" b="0">
+                <a:solidFill>
+                  <a:srgbClr val="9AAAC0"/>
+                </a:solidFill>
+                <a:latin typeface="Segoe UI"/>
+              </a:rPr>
+              <a:t>пересечение с val</a:t>
             </a:r>
           </a:p>
         </p:txBody>
@@ -5786,8 +6636,8 @@
         </p:nvSpPr>
         <p:spPr>
           <a:xfrm>
-            <a:off x="9875520" y="2743200"/>
-            <a:ext cx="1737360" cy="1005840"/>
+            <a:off x="9144000" y="2240280"/>
+            <a:ext cx="2423160" cy="2926080"/>
           </a:xfrm>
           <a:prstGeom prst="roundRect">
             <a:avLst>
@@ -5797,9 +6647,9 @@
           <a:solidFill>
             <a:srgbClr val="121C2E"/>
           </a:solidFill>
-          <a:ln w="15875">
+          <a:ln w="19050">
             <a:solidFill>
-              <a:srgbClr val="24334A"/>
+              <a:srgbClr val="2A3A55"/>
             </a:solidFill>
           </a:ln>
           <a:effectLst/>
@@ -5834,8 +6684,8 @@
         </p:nvSpPr>
         <p:spPr>
           <a:xfrm>
-            <a:off x="10058400" y="2907792"/>
-            <a:ext cx="1371600" cy="365760"/>
+            <a:off x="9345168" y="2404872"/>
+            <a:ext cx="2020824" cy="548640"/>
           </a:xfrm>
           <a:prstGeom prst="rect">
             <a:avLst/>
@@ -5854,13 +6704,13 @@
               </a:lnSpc>
             </a:pPr>
             <a:r>
-              <a:rPr sz="1600" b="1">
+              <a:rPr sz="2600" b="1">
                 <a:solidFill>
                   <a:srgbClr val="E8EEF6"/>
                 </a:solidFill>
                 <a:latin typeface="Segoe UI"/>
               </a:rPr>
-              <a:t>0.93 %</a:t>
+              <a:t>Sentinel-2</a:t>
             </a:r>
           </a:p>
         </p:txBody>
@@ -5873,8 +6723,8 @@
         </p:nvSpPr>
         <p:spPr>
           <a:xfrm>
-            <a:off x="10058400" y="3291840"/>
-            <a:ext cx="1371600" cy="365760"/>
+            <a:off x="9345168" y="2883661"/>
+            <a:ext cx="2020824" cy="2377440"/>
           </a:xfrm>
           <a:prstGeom prst="rect">
             <a:avLst/>
@@ -5893,68 +6743,61 @@
               </a:lnSpc>
             </a:pPr>
             <a:r>
-              <a:rPr sz="1200" b="0">
-                <a:solidFill>
-                  <a:srgbClr val="8C9DB5"/>
-                </a:solidFill>
-                <a:latin typeface="Segoe UI"/>
-              </a:rPr>
-              <a:t>пикселей размечено</a:t>
-            </a:r>
-          </a:p>
-        </p:txBody>
-      </p:sp>
-      <p:sp>
-        <p:nvSpPr>
-          <p:cNvPr id="18" name="TextBox 17"/>
-          <p:cNvSpPr txBox="1"/>
-          <p:nvPr/>
-        </p:nvSpPr>
-        <p:spPr>
-          <a:xfrm>
-            <a:off x="6035040" y="4114800"/>
-            <a:ext cx="5577840" cy="1097280"/>
-          </a:xfrm>
-          <a:prstGeom prst="rect">
-            <a:avLst/>
-          </a:prstGeom>
-          <a:noFill/>
-        </p:spPr>
-        <p:txBody>
-          <a:bodyPr wrap="square" anchor="t" lIns="0" rIns="0" tIns="0" bIns="0">
-            <a:spAutoFit/>
-          </a:bodyPr>
-          <a:lstStyle/>
-          <a:p>
-            <a:pPr algn="l">
-              <a:lnSpc>
-                <a:spcPct val="125000"/>
-              </a:lnSpc>
-            </a:pPr>
-            <a:r>
-              <a:rPr sz="1600" b="0">
-                <a:solidFill>
-                  <a:srgbClr val="8C9DB5"/>
-                </a:solidFill>
-                <a:latin typeface="Segoe UI"/>
-              </a:rPr>
-              <a:t>15 классов, включая похожие на мусор: пена, Sargassum, суда, следы.</a:t>
-            </a:r>
-          </a:p>
-          <a:p>
-            <a:pPr algn="l">
-              <a:lnSpc>
-                <a:spcPct val="125000"/>
-              </a:lnSpc>
-            </a:pPr>
-            <a:r>
-              <a:rPr sz="1600" b="0">
-                <a:solidFill>
-                  <a:srgbClr val="8C9DB5"/>
-                </a:solidFill>
-                <a:latin typeface="Segoe UI"/>
-              </a:rPr>
-              <a:t>Лицензия CC BY 4.0.</a:t>
+              <a:rPr sz="1800" b="0">
+                <a:solidFill>
+                  <a:srgbClr val="9AAAC0"/>
+                </a:solidFill>
+                <a:latin typeface="Segoe UI"/>
+              </a:rPr>
+              <a:t>29 живых снимков</a:t>
+            </a:r>
+          </a:p>
+          <a:p>
+            <a:pPr algn="l">
+              <a:lnSpc>
+                <a:spcPct val="110000"/>
+              </a:lnSpc>
+            </a:pPr>
+            <a:r>
+              <a:rPr sz="1800" b="0">
+                <a:solidFill>
+                  <a:srgbClr val="9AAAC0"/>
+                </a:solidFill>
+                <a:latin typeface="Segoe UI"/>
+              </a:rPr>
+              <a:t>12 районов</a:t>
+            </a:r>
+          </a:p>
+          <a:p>
+            <a:pPr algn="l">
+              <a:lnSpc>
+                <a:spcPct val="110000"/>
+              </a:lnSpc>
+            </a:pPr>
+            <a:r>
+              <a:rPr sz="1800" b="0">
+                <a:solidFill>
+                  <a:srgbClr val="9AAAC0"/>
+                </a:solidFill>
+                <a:latin typeface="Segoe UI"/>
+              </a:rPr>
+              <a:t>17 — 2025–2026</a:t>
+            </a:r>
+          </a:p>
+          <a:p>
+            <a:pPr algn="l">
+              <a:lnSpc>
+                <a:spcPct val="110000"/>
+              </a:lnSpc>
+            </a:pPr>
+            <a:r>
+              <a:rPr sz="1800" b="0">
+                <a:solidFill>
+                  <a:srgbClr val="9AAAC0"/>
+                </a:solidFill>
+                <a:latin typeface="Segoe UI"/>
+              </a:rPr>
+              <a:t>без разметки</a:t>
             </a:r>
           </a:p>
         </p:txBody>
@@ -5993,14 +6836,14 @@
         </p:nvSpPr>
         <p:spPr>
           <a:xfrm>
-            <a:off x="548640" y="502920"/>
-            <a:ext cx="73152" cy="384048"/>
+            <a:off x="548640" y="457200"/>
+            <a:ext cx="73152" cy="329184"/>
           </a:xfrm>
           <a:prstGeom prst="rect">
             <a:avLst/>
           </a:prstGeom>
           <a:solidFill>
-            <a:srgbClr val="FF6B5A"/>
+            <a:srgbClr val="FF6B4A"/>
           </a:solidFill>
           <a:ln>
             <a:noFill/>
@@ -6037,8 +6880,8 @@
         </p:nvSpPr>
         <p:spPr>
           <a:xfrm>
-            <a:off x="777240" y="475488"/>
-            <a:ext cx="8229600" cy="274320"/>
+            <a:off x="777240" y="457200"/>
+            <a:ext cx="8229600" cy="320040"/>
           </a:xfrm>
           <a:prstGeom prst="rect">
             <a:avLst/>
@@ -6057,9 +6900,9 @@
               </a:lnSpc>
             </a:pPr>
             <a:r>
-              <a:rPr sz="1200" b="1">
-                <a:solidFill>
-                  <a:srgbClr val="8C9DB5"/>
+              <a:rPr sz="1400" b="1">
+                <a:solidFill>
+                  <a:srgbClr val="9AAAC0"/>
                 </a:solidFill>
                 <a:latin typeface="Segoe UI"/>
               </a:rPr>
@@ -6076,8 +6919,8 @@
         </p:nvSpPr>
         <p:spPr>
           <a:xfrm>
-            <a:off x="548640" y="960120"/>
-            <a:ext cx="11094415" cy="1188720"/>
+            <a:off x="548640" y="914400"/>
+            <a:ext cx="11094415" cy="1097280"/>
           </a:xfrm>
           <a:prstGeom prst="rect">
             <a:avLst/>
@@ -6096,13 +6939,13 @@
               </a:lnSpc>
             </a:pPr>
             <a:r>
-              <a:rPr sz="3200" b="1">
+              <a:rPr sz="3000" b="1">
                 <a:solidFill>
                   <a:srgbClr val="E8EEF6"/>
                 </a:solidFill>
                 <a:latin typeface="Segoe UI"/>
               </a:rPr>
-              <a:t>Пятна по 2 пикселя: решает спектр, поэтому пиксельный бустинг</a:t>
+              <a:t>Пятно — 2 пикселя, решает спектр: пиксельный LightGBM точнее UNet</a:t>
             </a:r>
           </a:p>
         </p:txBody>
@@ -6115,7 +6958,7 @@
         </p:nvSpPr>
         <p:spPr>
           <a:xfrm>
-            <a:off x="10271455" y="6400800"/>
+            <a:off x="10271455" y="6446520"/>
             <a:ext cx="1371600" cy="274320"/>
           </a:xfrm>
           <a:prstGeom prst="rect">
@@ -6135,13 +6978,13 @@
               </a:lnSpc>
             </a:pPr>
             <a:r>
-              <a:rPr sz="1100" b="0">
-                <a:solidFill>
-                  <a:srgbClr val="8C9DB5"/>
-                </a:solidFill>
-                <a:latin typeface="Segoe UI"/>
-              </a:rPr>
-              <a:t>3 / 12</a:t>
+              <a:rPr sz="1200" b="0">
+                <a:solidFill>
+                  <a:srgbClr val="9AAAC0"/>
+                </a:solidFill>
+                <a:latin typeface="Segoe UI"/>
+              </a:rPr>
+              <a:t>3 / 10</a:t>
             </a:r>
           </a:p>
         </p:txBody>
@@ -6154,7 +6997,7 @@
         </p:nvSpPr>
         <p:spPr>
           <a:xfrm>
-            <a:off x="548640" y="6400800"/>
+            <a:off x="548640" y="6446520"/>
             <a:ext cx="7315200" cy="274320"/>
           </a:xfrm>
           <a:prstGeom prst="rect">
@@ -6174,13 +7017,13 @@
               </a:lnSpc>
             </a:pPr>
             <a:r>
-              <a:rPr sz="1100" b="0">
-                <a:solidFill>
-                  <a:srgbClr val="8C9DB5"/>
-                </a:solidFill>
-                <a:latin typeface="Segoe UI"/>
-              </a:rPr>
-              <a:t>Макропластик · Sentinel-2</a:t>
+              <a:rPr sz="1200" b="0">
+                <a:solidFill>
+                  <a:srgbClr val="9AAAC0"/>
+                </a:solidFill>
+                <a:latin typeface="Segoe UI"/>
+              </a:rPr>
+              <a:t>Морской мусор · Sentinel-2</a:t>
             </a:r>
           </a:p>
         </p:txBody>
@@ -6193,8 +7036,8 @@
         </p:nvSpPr>
         <p:spPr>
           <a:xfrm>
-            <a:off x="548640" y="2651760"/>
-            <a:ext cx="3200400" cy="1463040"/>
+            <a:off x="548640" y="2423160"/>
+            <a:ext cx="3840480" cy="1280160"/>
           </a:xfrm>
           <a:prstGeom prst="rect">
             <a:avLst/>
@@ -6213,13 +7056,13 @@
               </a:lnSpc>
             </a:pPr>
             <a:r>
-              <a:rPr sz="9600" b="1">
-                <a:solidFill>
-                  <a:srgbClr val="FF6B5A"/>
-                </a:solidFill>
-                <a:latin typeface="Segoe UI"/>
-              </a:rPr>
-              <a:t>48</a:t>
+              <a:rPr sz="8800" b="1">
+                <a:solidFill>
+                  <a:srgbClr val="FF6B4A"/>
+                </a:solidFill>
+                <a:latin typeface="Segoe UI"/>
+              </a:rPr>
+              <a:t>0,923</a:t>
             </a:r>
           </a:p>
         </p:txBody>
@@ -6232,8 +7075,8 @@
         </p:nvSpPr>
         <p:spPr>
           <a:xfrm>
-            <a:off x="548640" y="4160520"/>
-            <a:ext cx="3200400" cy="822960"/>
+            <a:off x="548640" y="3794760"/>
+            <a:ext cx="3840480" cy="1463040"/>
           </a:xfrm>
           <a:prstGeom prst="rect">
             <a:avLst/>
@@ -6248,33 +7091,49 @@
           <a:p>
             <a:pPr algn="l">
               <a:lnSpc>
-                <a:spcPct val="110000"/>
-              </a:lnSpc>
-            </a:pPr>
-            <a:r>
-              <a:rPr sz="1800" b="0">
-                <a:solidFill>
-                  <a:srgbClr val="8C9DB5"/>
-                </a:solidFill>
-                <a:latin typeface="Segoe UI"/>
-              </a:rPr>
-              <a:t>признаков на пиксель:</a:t>
-            </a:r>
-          </a:p>
-          <a:p>
-            <a:pPr algn="l">
-              <a:lnSpc>
-                <a:spcPct val="110000"/>
-              </a:lnSpc>
-            </a:pPr>
-            <a:r>
-              <a:rPr sz="1800" b="0">
-                <a:solidFill>
-                  <a:srgbClr val="8C9DB5"/>
-                </a:solidFill>
-                <a:latin typeface="Segoe UI"/>
-              </a:rPr>
-              <a:t>19 спектр + 29 окно</a:t>
+                <a:spcPct val="115000"/>
+              </a:lnSpc>
+            </a:pPr>
+            <a:r>
+              <a:rPr sz="2000" b="0">
+                <a:solidFill>
+                  <a:srgbClr val="9AAAC0"/>
+                </a:solidFill>
+                <a:latin typeface="Segoe UI"/>
+              </a:rPr>
+              <a:t>F1 «мусор», val, 3 seed</a:t>
+            </a:r>
+          </a:p>
+          <a:p>
+            <a:pPr algn="l">
+              <a:lnSpc>
+                <a:spcPct val="115000"/>
+              </a:lnSpc>
+            </a:pPr>
+            <a:r>
+              <a:rPr sz="2000" b="0">
+                <a:solidFill>
+                  <a:srgbClr val="9AAAC0"/>
+                </a:solidFill>
+                <a:latin typeface="Segoe UI"/>
+              </a:rPr>
+              <a:t>LightGBM, 48 признаков:</a:t>
+            </a:r>
+          </a:p>
+          <a:p>
+            <a:pPr algn="l">
+              <a:lnSpc>
+                <a:spcPct val="115000"/>
+              </a:lnSpc>
+            </a:pPr>
+            <a:r>
+              <a:rPr sz="2000" b="0">
+                <a:solidFill>
+                  <a:srgbClr val="9AAAC0"/>
+                </a:solidFill>
+                <a:latin typeface="Segoe UI"/>
+              </a:rPr>
+              <a:t>каналы, индексы, окна</a:t>
             </a:r>
           </a:p>
         </p:txBody>
@@ -6287,8 +7146,8 @@
         </p:nvSpPr>
         <p:spPr>
           <a:xfrm>
-            <a:off x="4023360" y="2834640"/>
-            <a:ext cx="1417320" cy="1005840"/>
+            <a:off x="4754880" y="2240280"/>
+            <a:ext cx="6858000" cy="603504"/>
           </a:xfrm>
           <a:prstGeom prst="roundRect">
             <a:avLst>
@@ -6298,9 +7157,9 @@
           <a:solidFill>
             <a:srgbClr val="121C2E"/>
           </a:solidFill>
-          <a:ln w="15875">
+          <a:ln w="19050">
             <a:solidFill>
-              <a:srgbClr val="24334A"/>
+              <a:srgbClr val="FF6B4A"/>
             </a:solidFill>
           </a:ln>
           <a:effectLst/>
@@ -6335,16 +7194,16 @@
         </p:nvSpPr>
         <p:spPr>
           <a:xfrm>
-            <a:off x="4206240" y="2999232"/>
-            <a:ext cx="1051560" cy="365760"/>
-          </a:xfrm>
-          <a:prstGeom prst="rect">
-            <a:avLst/>
-          </a:prstGeom>
-          <a:noFill/>
-        </p:spPr>
-        <p:txBody>
-          <a:bodyPr wrap="square" anchor="t" lIns="0" rIns="0" tIns="0" bIns="0">
+            <a:off x="4983480" y="2240280"/>
+            <a:ext cx="4023360" cy="603504"/>
+          </a:xfrm>
+          <a:prstGeom prst="rect">
+            <a:avLst/>
+          </a:prstGeom>
+          <a:noFill/>
+        </p:spPr>
+        <p:txBody>
+          <a:bodyPr wrap="square" anchor="ctr" lIns="0" rIns="0" tIns="0" bIns="0">
             <a:spAutoFit/>
           </a:bodyPr>
           <a:lstStyle/>
@@ -6355,13 +7214,13 @@
               </a:lnSpc>
             </a:pPr>
             <a:r>
-              <a:rPr sz="1500" b="1">
+              <a:rPr sz="2000" b="1">
                 <a:solidFill>
                   <a:srgbClr val="E8EEF6"/>
                 </a:solidFill>
                 <a:latin typeface="Segoe UI"/>
               </a:rPr>
-              <a:t>Данные</a:t>
+              <a:t>LightGBM, MARIDA + MADOS</a:t>
             </a:r>
           </a:p>
         </p:txBody>
@@ -6374,16 +7233,16 @@
         </p:nvSpPr>
         <p:spPr>
           <a:xfrm>
-            <a:off x="4206240" y="3383280"/>
-            <a:ext cx="1051560" cy="365760"/>
-          </a:xfrm>
-          <a:prstGeom prst="rect">
-            <a:avLst/>
-          </a:prstGeom>
-          <a:noFill/>
-        </p:spPr>
-        <p:txBody>
-          <a:bodyPr wrap="square" anchor="t" lIns="0" rIns="0" tIns="0" bIns="0">
+            <a:off x="8961120" y="2240280"/>
+            <a:ext cx="1097280" cy="603504"/>
+          </a:xfrm>
+          <a:prstGeom prst="rect">
+            <a:avLst/>
+          </a:prstGeom>
+          <a:noFill/>
+        </p:spPr>
+        <p:txBody>
+          <a:bodyPr wrap="square" anchor="ctr" lIns="0" rIns="0" tIns="0" bIns="0">
             <a:spAutoFit/>
           </a:bodyPr>
           <a:lstStyle/>
@@ -6394,27 +7253,66 @@
               </a:lnSpc>
             </a:pPr>
             <a:r>
-              <a:rPr sz="1200" b="0">
-                <a:solidFill>
-                  <a:srgbClr val="8C9DB5"/>
-                </a:solidFill>
-                <a:latin typeface="Segoe UI"/>
-              </a:rPr>
-              <a:t>MARIDA + MADOS</a:t>
-            </a:r>
-          </a:p>
-        </p:txBody>
-      </p:sp>
-      <p:sp>
-        <p:nvSpPr>
-          <p:cNvPr id="12" name="Rounded Rectangle 11"/>
+              <a:rPr sz="2200" b="1">
+                <a:solidFill>
+                  <a:srgbClr val="FF6B4A"/>
+                </a:solidFill>
+                <a:latin typeface="Segoe UI"/>
+              </a:rPr>
+              <a:t>0,923</a:t>
+            </a:r>
+          </a:p>
+        </p:txBody>
+      </p:sp>
+      <p:sp>
+        <p:nvSpPr>
+          <p:cNvPr id="12" name="TextBox 11"/>
+          <p:cNvSpPr txBox="1"/>
+          <p:nvPr/>
+        </p:nvSpPr>
+        <p:spPr>
+          <a:xfrm>
+            <a:off x="10149840" y="2240280"/>
+            <a:ext cx="1371600" cy="603504"/>
+          </a:xfrm>
+          <a:prstGeom prst="rect">
+            <a:avLst/>
+          </a:prstGeom>
+          <a:noFill/>
+        </p:spPr>
+        <p:txBody>
+          <a:bodyPr wrap="square" anchor="ctr" lIns="0" rIns="0" tIns="0" bIns="0">
+            <a:spAutoFit/>
+          </a:bodyPr>
+          <a:lstStyle/>
+          <a:p>
+            <a:pPr algn="l">
+              <a:lnSpc>
+                <a:spcPct val="110000"/>
+              </a:lnSpc>
+            </a:pPr>
+            <a:r>
+              <a:rPr sz="1800" b="0">
+                <a:solidFill>
+                  <a:srgbClr val="9AAAC0"/>
+                </a:solidFill>
+                <a:latin typeface="Segoe UI"/>
+              </a:rPr>
+              <a:t>принят</a:t>
+            </a:r>
+          </a:p>
+        </p:txBody>
+      </p:sp>
+      <p:sp>
+        <p:nvSpPr>
+          <p:cNvPr id="13" name="Rounded Rectangle 12"/>
           <p:cNvSpPr/>
           <p:nvPr/>
         </p:nvSpPr>
         <p:spPr>
           <a:xfrm>
-            <a:off x="5577840" y="2834640"/>
-            <a:ext cx="1417320" cy="1005840"/>
+            <a:off x="4754880" y="2953512"/>
+            <a:ext cx="6858000" cy="603504"/>
           </a:xfrm>
           <a:prstGeom prst="roundRect">
             <a:avLst>
@@ -6424,9 +7322,9 @@
           <a:solidFill>
             <a:srgbClr val="121C2E"/>
           </a:solidFill>
-          <a:ln w="15875">
+          <a:ln w="19050">
             <a:solidFill>
-              <a:srgbClr val="24334A"/>
+              <a:srgbClr val="2A3A55"/>
             </a:solidFill>
           </a:ln>
           <a:effectLst/>
@@ -6455,22 +7353,22 @@
       </p:sp>
       <p:sp>
         <p:nvSpPr>
-          <p:cNvPr id="13" name="TextBox 12"/>
+          <p:cNvPr id="14" name="TextBox 13"/>
           <p:cNvSpPr txBox="1"/>
           <p:nvPr/>
         </p:nvSpPr>
         <p:spPr>
           <a:xfrm>
-            <a:off x="5760720" y="2999232"/>
-            <a:ext cx="1051560" cy="365760"/>
-          </a:xfrm>
-          <a:prstGeom prst="rect">
-            <a:avLst/>
-          </a:prstGeom>
-          <a:noFill/>
-        </p:spPr>
-        <p:txBody>
-          <a:bodyPr wrap="square" anchor="t" lIns="0" rIns="0" tIns="0" bIns="0">
+            <a:off x="4983480" y="2953512"/>
+            <a:ext cx="4023360" cy="603504"/>
+          </a:xfrm>
+          <a:prstGeom prst="rect">
+            <a:avLst/>
+          </a:prstGeom>
+          <a:noFill/>
+        </p:spPr>
+        <p:txBody>
+          <a:bodyPr wrap="square" anchor="ctr" lIns="0" rIns="0" tIns="0" bIns="0">
             <a:spAutoFit/>
           </a:bodyPr>
           <a:lstStyle/>
@@ -6481,35 +7379,35 @@
               </a:lnSpc>
             </a:pPr>
             <a:r>
-              <a:rPr sz="1500" b="1">
+              <a:rPr sz="2000" b="0">
                 <a:solidFill>
                   <a:srgbClr val="E8EEF6"/>
                 </a:solidFill>
                 <a:latin typeface="Segoe UI"/>
               </a:rPr>
-              <a:t>Признаки</a:t>
-            </a:r>
-          </a:p>
-        </p:txBody>
-      </p:sp>
-      <p:sp>
-        <p:nvSpPr>
-          <p:cNvPr id="14" name="TextBox 13"/>
+              <a:t>стек UNet + LightGBM</a:t>
+            </a:r>
+          </a:p>
+        </p:txBody>
+      </p:sp>
+      <p:sp>
+        <p:nvSpPr>
+          <p:cNvPr id="15" name="TextBox 14"/>
           <p:cNvSpPr txBox="1"/>
           <p:nvPr/>
         </p:nvSpPr>
         <p:spPr>
           <a:xfrm>
-            <a:off x="5760720" y="3383280"/>
-            <a:ext cx="1051560" cy="365760"/>
-          </a:xfrm>
-          <a:prstGeom prst="rect">
-            <a:avLst/>
-          </a:prstGeom>
-          <a:noFill/>
-        </p:spPr>
-        <p:txBody>
-          <a:bodyPr wrap="square" anchor="t" lIns="0" rIns="0" tIns="0" bIns="0">
+            <a:off x="8961120" y="2953512"/>
+            <a:ext cx="1097280" cy="603504"/>
+          </a:xfrm>
+          <a:prstGeom prst="rect">
+            <a:avLst/>
+          </a:prstGeom>
+          <a:noFill/>
+        </p:spPr>
+        <p:txBody>
+          <a:bodyPr wrap="square" anchor="ctr" lIns="0" rIns="0" tIns="0" bIns="0">
             <a:spAutoFit/>
           </a:bodyPr>
           <a:lstStyle/>
@@ -6520,27 +7418,66 @@
               </a:lnSpc>
             </a:pPr>
             <a:r>
-              <a:rPr sz="1200" b="0">
-                <a:solidFill>
-                  <a:srgbClr val="8C9DB5"/>
-                </a:solidFill>
-                <a:latin typeface="Segoe UI"/>
-              </a:rPr>
-              <a:t>каналы, индексы, окна</a:t>
-            </a:r>
-          </a:p>
-        </p:txBody>
-      </p:sp>
-      <p:sp>
-        <p:nvSpPr>
-          <p:cNvPr id="15" name="Rounded Rectangle 14"/>
+              <a:rPr sz="2200" b="1">
+                <a:solidFill>
+                  <a:srgbClr val="E8EEF6"/>
+                </a:solidFill>
+                <a:latin typeface="Segoe UI"/>
+              </a:rPr>
+              <a:t>0,916</a:t>
+            </a:r>
+          </a:p>
+        </p:txBody>
+      </p:sp>
+      <p:sp>
+        <p:nvSpPr>
+          <p:cNvPr id="16" name="TextBox 15"/>
+          <p:cNvSpPr txBox="1"/>
+          <p:nvPr/>
+        </p:nvSpPr>
+        <p:spPr>
+          <a:xfrm>
+            <a:off x="10149840" y="2953512"/>
+            <a:ext cx="1371600" cy="603504"/>
+          </a:xfrm>
+          <a:prstGeom prst="rect">
+            <a:avLst/>
+          </a:prstGeom>
+          <a:noFill/>
+        </p:spPr>
+        <p:txBody>
+          <a:bodyPr wrap="square" anchor="ctr" lIns="0" rIns="0" tIns="0" bIns="0">
+            <a:spAutoFit/>
+          </a:bodyPr>
+          <a:lstStyle/>
+          <a:p>
+            <a:pPr algn="l">
+              <a:lnSpc>
+                <a:spcPct val="110000"/>
+              </a:lnSpc>
+            </a:pPr>
+            <a:r>
+              <a:rPr sz="1800" b="0">
+                <a:solidFill>
+                  <a:srgbClr val="9AAAC0"/>
+                </a:solidFill>
+                <a:latin typeface="Segoe UI"/>
+              </a:rPr>
+              <a:t>отклонён</a:t>
+            </a:r>
+          </a:p>
+        </p:txBody>
+      </p:sp>
+      <p:sp>
+        <p:nvSpPr>
+          <p:cNvPr id="17" name="Rounded Rectangle 16"/>
           <p:cNvSpPr/>
           <p:nvPr/>
         </p:nvSpPr>
         <p:spPr>
           <a:xfrm>
-            <a:off x="7132320" y="2834640"/>
-            <a:ext cx="1417320" cy="1005840"/>
+            <a:off x="4754880" y="3666744"/>
+            <a:ext cx="6858000" cy="603504"/>
           </a:xfrm>
           <a:prstGeom prst="roundRect">
             <a:avLst>
@@ -6550,9 +7487,9 @@
           <a:solidFill>
             <a:srgbClr val="121C2E"/>
           </a:solidFill>
-          <a:ln w="15875">
+          <a:ln w="19050">
             <a:solidFill>
-              <a:srgbClr val="FF6B5A"/>
+              <a:srgbClr val="2A3A55"/>
             </a:solidFill>
           </a:ln>
           <a:effectLst/>
@@ -6581,22 +7518,22 @@
       </p:sp>
       <p:sp>
         <p:nvSpPr>
-          <p:cNvPr id="16" name="TextBox 15"/>
+          <p:cNvPr id="18" name="TextBox 17"/>
           <p:cNvSpPr txBox="1"/>
           <p:nvPr/>
         </p:nvSpPr>
         <p:spPr>
           <a:xfrm>
-            <a:off x="7315200" y="2999232"/>
-            <a:ext cx="1051560" cy="365760"/>
-          </a:xfrm>
-          <a:prstGeom prst="rect">
-            <a:avLst/>
-          </a:prstGeom>
-          <a:noFill/>
-        </p:spPr>
-        <p:txBody>
-          <a:bodyPr wrap="square" anchor="t" lIns="0" rIns="0" tIns="0" bIns="0">
+            <a:off x="4983480" y="3666744"/>
+            <a:ext cx="4023360" cy="603504"/>
+          </a:xfrm>
+          <a:prstGeom prst="rect">
+            <a:avLst/>
+          </a:prstGeom>
+          <a:noFill/>
+        </p:spPr>
+        <p:txBody>
+          <a:bodyPr wrap="square" anchor="ctr" lIns="0" rIns="0" tIns="0" bIns="0">
             <a:spAutoFit/>
           </a:bodyPr>
           <a:lstStyle/>
@@ -6607,35 +7544,35 @@
               </a:lnSpc>
             </a:pPr>
             <a:r>
-              <a:rPr sz="1500" b="1">
+              <a:rPr sz="2000" b="0">
                 <a:solidFill>
                   <a:srgbClr val="E8EEF6"/>
                 </a:solidFill>
                 <a:latin typeface="Segoe UI"/>
               </a:rPr>
-              <a:t>LightGBM</a:t>
-            </a:r>
-          </a:p>
-        </p:txBody>
-      </p:sp>
-      <p:sp>
-        <p:nvSpPr>
-          <p:cNvPr id="17" name="TextBox 16"/>
+              <a:t>LightGBM, только MARIDA</a:t>
+            </a:r>
+          </a:p>
+        </p:txBody>
+      </p:sp>
+      <p:sp>
+        <p:nvSpPr>
+          <p:cNvPr id="19" name="TextBox 18"/>
           <p:cNvSpPr txBox="1"/>
           <p:nvPr/>
         </p:nvSpPr>
         <p:spPr>
           <a:xfrm>
-            <a:off x="7315200" y="3383280"/>
-            <a:ext cx="1051560" cy="365760"/>
-          </a:xfrm>
-          <a:prstGeom prst="rect">
-            <a:avLst/>
-          </a:prstGeom>
-          <a:noFill/>
-        </p:spPr>
-        <p:txBody>
-          <a:bodyPr wrap="square" anchor="t" lIns="0" rIns="0" tIns="0" bIns="0">
+            <a:off x="8961120" y="3666744"/>
+            <a:ext cx="1097280" cy="603504"/>
+          </a:xfrm>
+          <a:prstGeom prst="rect">
+            <a:avLst/>
+          </a:prstGeom>
+          <a:noFill/>
+        </p:spPr>
+        <p:txBody>
+          <a:bodyPr wrap="square" anchor="ctr" lIns="0" rIns="0" tIns="0" bIns="0">
             <a:spAutoFit/>
           </a:bodyPr>
           <a:lstStyle/>
@@ -6646,27 +7583,66 @@
               </a:lnSpc>
             </a:pPr>
             <a:r>
-              <a:rPr sz="1200" b="0">
-                <a:solidFill>
-                  <a:srgbClr val="8C9DB5"/>
-                </a:solidFill>
-                <a:latin typeface="Segoe UI"/>
-              </a:rPr>
-              <a:t>мусор / не мусор</a:t>
-            </a:r>
-          </a:p>
-        </p:txBody>
-      </p:sp>
-      <p:sp>
-        <p:nvSpPr>
-          <p:cNvPr id="18" name="Rounded Rectangle 17"/>
+              <a:rPr sz="2200" b="1">
+                <a:solidFill>
+                  <a:srgbClr val="E8EEF6"/>
+                </a:solidFill>
+                <a:latin typeface="Segoe UI"/>
+              </a:rPr>
+              <a:t>0,906</a:t>
+            </a:r>
+          </a:p>
+        </p:txBody>
+      </p:sp>
+      <p:sp>
+        <p:nvSpPr>
+          <p:cNvPr id="20" name="TextBox 19"/>
+          <p:cNvSpPr txBox="1"/>
+          <p:nvPr/>
+        </p:nvSpPr>
+        <p:spPr>
+          <a:xfrm>
+            <a:off x="10149840" y="3666744"/>
+            <a:ext cx="1371600" cy="603504"/>
+          </a:xfrm>
+          <a:prstGeom prst="rect">
+            <a:avLst/>
+          </a:prstGeom>
+          <a:noFill/>
+        </p:spPr>
+        <p:txBody>
+          <a:bodyPr wrap="square" anchor="ctr" lIns="0" rIns="0" tIns="0" bIns="0">
+            <a:spAutoFit/>
+          </a:bodyPr>
+          <a:lstStyle/>
+          <a:p>
+            <a:pPr algn="l">
+              <a:lnSpc>
+                <a:spcPct val="110000"/>
+              </a:lnSpc>
+            </a:pPr>
+            <a:r>
+              <a:rPr sz="1800" b="0">
+                <a:solidFill>
+                  <a:srgbClr val="9AAAC0"/>
+                </a:solidFill>
+                <a:latin typeface="Segoe UI"/>
+              </a:rPr>
+              <a:t>база</a:t>
+            </a:r>
+          </a:p>
+        </p:txBody>
+      </p:sp>
+      <p:sp>
+        <p:nvSpPr>
+          <p:cNvPr id="21" name="Rounded Rectangle 20"/>
           <p:cNvSpPr/>
           <p:nvPr/>
         </p:nvSpPr>
         <p:spPr>
           <a:xfrm>
-            <a:off x="8686800" y="2834640"/>
-            <a:ext cx="1417320" cy="1005840"/>
+            <a:off x="4754880" y="4379976"/>
+            <a:ext cx="6858000" cy="603504"/>
           </a:xfrm>
           <a:prstGeom prst="roundRect">
             <a:avLst>
@@ -6676,9 +7652,9 @@
           <a:solidFill>
             <a:srgbClr val="121C2E"/>
           </a:solidFill>
-          <a:ln w="15875">
+          <a:ln w="19050">
             <a:solidFill>
-              <a:srgbClr val="24334A"/>
+              <a:srgbClr val="2A3A55"/>
             </a:solidFill>
           </a:ln>
           <a:effectLst/>
@@ -6707,14 +7683,131 @@
       </p:sp>
       <p:sp>
         <p:nvSpPr>
-          <p:cNvPr id="19" name="TextBox 18"/>
+          <p:cNvPr id="22" name="TextBox 21"/>
           <p:cNvSpPr txBox="1"/>
           <p:nvPr/>
         </p:nvSpPr>
         <p:spPr>
           <a:xfrm>
-            <a:off x="8869680" y="2999232"/>
-            <a:ext cx="1051560" cy="365760"/>
+            <a:off x="4983480" y="4379976"/>
+            <a:ext cx="4023360" cy="603504"/>
+          </a:xfrm>
+          <a:prstGeom prst="rect">
+            <a:avLst/>
+          </a:prstGeom>
+          <a:noFill/>
+        </p:spPr>
+        <p:txBody>
+          <a:bodyPr wrap="square" anchor="ctr" lIns="0" rIns="0" tIns="0" bIns="0">
+            <a:spAutoFit/>
+          </a:bodyPr>
+          <a:lstStyle/>
+          <a:p>
+            <a:pPr algn="l">
+              <a:lnSpc>
+                <a:spcPct val="110000"/>
+              </a:lnSpc>
+            </a:pPr>
+            <a:r>
+              <a:rPr sz="2000" b="0">
+                <a:solidFill>
+                  <a:srgbClr val="E8EEF6"/>
+                </a:solidFill>
+                <a:latin typeface="Segoe UI"/>
+              </a:rPr>
+              <a:t>UNet (ResNet-34)</a:t>
+            </a:r>
+          </a:p>
+        </p:txBody>
+      </p:sp>
+      <p:sp>
+        <p:nvSpPr>
+          <p:cNvPr id="23" name="TextBox 22"/>
+          <p:cNvSpPr txBox="1"/>
+          <p:nvPr/>
+        </p:nvSpPr>
+        <p:spPr>
+          <a:xfrm>
+            <a:off x="8961120" y="4379976"/>
+            <a:ext cx="1097280" cy="603504"/>
+          </a:xfrm>
+          <a:prstGeom prst="rect">
+            <a:avLst/>
+          </a:prstGeom>
+          <a:noFill/>
+        </p:spPr>
+        <p:txBody>
+          <a:bodyPr wrap="square" anchor="ctr" lIns="0" rIns="0" tIns="0" bIns="0">
+            <a:spAutoFit/>
+          </a:bodyPr>
+          <a:lstStyle/>
+          <a:p>
+            <a:pPr algn="l">
+              <a:lnSpc>
+                <a:spcPct val="110000"/>
+              </a:lnSpc>
+            </a:pPr>
+            <a:r>
+              <a:rPr sz="2200" b="1">
+                <a:solidFill>
+                  <a:srgbClr val="E8EEF6"/>
+                </a:solidFill>
+                <a:latin typeface="Segoe UI"/>
+              </a:rPr>
+              <a:t>0,891</a:t>
+            </a:r>
+          </a:p>
+        </p:txBody>
+      </p:sp>
+      <p:sp>
+        <p:nvSpPr>
+          <p:cNvPr id="24" name="TextBox 23"/>
+          <p:cNvSpPr txBox="1"/>
+          <p:nvPr/>
+        </p:nvSpPr>
+        <p:spPr>
+          <a:xfrm>
+            <a:off x="10149840" y="4379976"/>
+            <a:ext cx="1371600" cy="603504"/>
+          </a:xfrm>
+          <a:prstGeom prst="rect">
+            <a:avLst/>
+          </a:prstGeom>
+          <a:noFill/>
+        </p:spPr>
+        <p:txBody>
+          <a:bodyPr wrap="square" anchor="ctr" lIns="0" rIns="0" tIns="0" bIns="0">
+            <a:spAutoFit/>
+          </a:bodyPr>
+          <a:lstStyle/>
+          <a:p>
+            <a:pPr algn="l">
+              <a:lnSpc>
+                <a:spcPct val="110000"/>
+              </a:lnSpc>
+            </a:pPr>
+            <a:r>
+              <a:rPr sz="1800" b="0">
+                <a:solidFill>
+                  <a:srgbClr val="9AAAC0"/>
+                </a:solidFill>
+                <a:latin typeface="Segoe UI"/>
+              </a:rPr>
+              <a:t>отклонён</a:t>
+            </a:r>
+          </a:p>
+        </p:txBody>
+      </p:sp>
+      <p:sp>
+        <p:nvSpPr>
+          <p:cNvPr id="25" name="TextBox 24"/>
+          <p:cNvSpPr txBox="1"/>
+          <p:nvPr/>
+        </p:nvSpPr>
+        <p:spPr>
+          <a:xfrm>
+            <a:off x="4754880" y="5212080"/>
+            <a:ext cx="6858000" cy="731520"/>
           </a:xfrm>
           <a:prstGeom prst="rect">
             <a:avLst/>
@@ -6733,217 +7826,13 @@
               </a:lnSpc>
             </a:pPr>
             <a:r>
-              <a:rPr sz="1500" b="1">
-                <a:solidFill>
-                  <a:srgbClr val="E8EEF6"/>
-                </a:solidFill>
-                <a:latin typeface="Segoe UI"/>
-              </a:rPr>
-              <a:t>Порог</a:t>
-            </a:r>
-          </a:p>
-        </p:txBody>
-      </p:sp>
-      <p:sp>
-        <p:nvSpPr>
-          <p:cNvPr id="20" name="TextBox 19"/>
-          <p:cNvSpPr txBox="1"/>
-          <p:nvPr/>
-        </p:nvSpPr>
-        <p:spPr>
-          <a:xfrm>
-            <a:off x="8869680" y="3383280"/>
-            <a:ext cx="1051560" cy="365760"/>
-          </a:xfrm>
-          <a:prstGeom prst="rect">
-            <a:avLst/>
-          </a:prstGeom>
-          <a:noFill/>
-        </p:spPr>
-        <p:txBody>
-          <a:bodyPr wrap="square" anchor="t" lIns="0" rIns="0" tIns="0" bIns="0">
-            <a:spAutoFit/>
-          </a:bodyPr>
-          <a:lstStyle/>
-          <a:p>
-            <a:pPr algn="l">
-              <a:lnSpc>
-                <a:spcPct val="110000"/>
-              </a:lnSpc>
-            </a:pPr>
-            <a:r>
-              <a:rPr sz="1200" b="0">
-                <a:solidFill>
-                  <a:srgbClr val="8C9DB5"/>
-                </a:solidFill>
-                <a:latin typeface="Segoe UI"/>
-              </a:rPr>
-              <a:t>0.63 по val</a:t>
-            </a:r>
-          </a:p>
-        </p:txBody>
-      </p:sp>
-      <p:sp>
-        <p:nvSpPr>
-          <p:cNvPr id="21" name="Rounded Rectangle 20"/>
-          <p:cNvSpPr/>
-          <p:nvPr/>
-        </p:nvSpPr>
-        <p:spPr>
-          <a:xfrm>
-            <a:off x="10241280" y="2834640"/>
-            <a:ext cx="1417320" cy="1005840"/>
-          </a:xfrm>
-          <a:prstGeom prst="roundRect">
-            <a:avLst>
-              <a:gd name="adj" fmla="val 8000"/>
-            </a:avLst>
-          </a:prstGeom>
-          <a:solidFill>
-            <a:srgbClr val="121C2E"/>
-          </a:solidFill>
-          <a:ln w="15875">
-            <a:solidFill>
-              <a:srgbClr val="24334A"/>
-            </a:solidFill>
-          </a:ln>
-          <a:effectLst/>
-        </p:spPr>
-        <p:style>
-          <a:lnRef idx="1">
-            <a:schemeClr val="accent1"/>
-          </a:lnRef>
-          <a:fillRef idx="3">
-            <a:schemeClr val="accent1"/>
-          </a:fillRef>
-          <a:effectRef idx="2">
-            <a:schemeClr val="accent1"/>
-          </a:effectRef>
-          <a:fontRef idx="minor">
-            <a:schemeClr val="lt1"/>
-          </a:fontRef>
-        </p:style>
-        <p:txBody>
-          <a:bodyPr rtlCol="0" anchor="ctr"/>
-          <a:lstStyle/>
-          <a:p>
-            <a:pPr algn="ctr"/>
-          </a:p>
-        </p:txBody>
-      </p:sp>
-      <p:sp>
-        <p:nvSpPr>
-          <p:cNvPr id="22" name="TextBox 21"/>
-          <p:cNvSpPr txBox="1"/>
-          <p:nvPr/>
-        </p:nvSpPr>
-        <p:spPr>
-          <a:xfrm>
-            <a:off x="10424160" y="2999232"/>
-            <a:ext cx="1051560" cy="365760"/>
-          </a:xfrm>
-          <a:prstGeom prst="rect">
-            <a:avLst/>
-          </a:prstGeom>
-          <a:noFill/>
-        </p:spPr>
-        <p:txBody>
-          <a:bodyPr wrap="square" anchor="t" lIns="0" rIns="0" tIns="0" bIns="0">
-            <a:spAutoFit/>
-          </a:bodyPr>
-          <a:lstStyle/>
-          <a:p>
-            <a:pPr algn="l">
-              <a:lnSpc>
-                <a:spcPct val="110000"/>
-              </a:lnSpc>
-            </a:pPr>
-            <a:r>
-              <a:rPr sz="1500" b="1">
-                <a:solidFill>
-                  <a:srgbClr val="E8EEF6"/>
-                </a:solidFill>
-                <a:latin typeface="Segoe UI"/>
-              </a:rPr>
-              <a:t>H3</a:t>
-            </a:r>
-          </a:p>
-        </p:txBody>
-      </p:sp>
-      <p:sp>
-        <p:nvSpPr>
-          <p:cNvPr id="23" name="TextBox 22"/>
-          <p:cNvSpPr txBox="1"/>
-          <p:nvPr/>
-        </p:nvSpPr>
-        <p:spPr>
-          <a:xfrm>
-            <a:off x="10424160" y="3383280"/>
-            <a:ext cx="1051560" cy="365760"/>
-          </a:xfrm>
-          <a:prstGeom prst="rect">
-            <a:avLst/>
-          </a:prstGeom>
-          <a:noFill/>
-        </p:spPr>
-        <p:txBody>
-          <a:bodyPr wrap="square" anchor="t" lIns="0" rIns="0" tIns="0" bIns="0">
-            <a:spAutoFit/>
-          </a:bodyPr>
-          <a:lstStyle/>
-          <a:p>
-            <a:pPr algn="l">
-              <a:lnSpc>
-                <a:spcPct val="110000"/>
-              </a:lnSpc>
-            </a:pPr>
-            <a:r>
-              <a:rPr sz="1200" b="0">
-                <a:solidFill>
-                  <a:srgbClr val="8C9DB5"/>
-                </a:solidFill>
-                <a:latin typeface="Segoe UI"/>
-              </a:rPr>
-              <a:t>показатель, зоны</a:t>
-            </a:r>
-          </a:p>
-        </p:txBody>
-      </p:sp>
-      <p:sp>
-        <p:nvSpPr>
-          <p:cNvPr id="24" name="TextBox 23"/>
-          <p:cNvSpPr txBox="1"/>
-          <p:nvPr/>
-        </p:nvSpPr>
-        <p:spPr>
-          <a:xfrm>
-            <a:off x="4023360" y="4206240"/>
-            <a:ext cx="7589520" cy="1097280"/>
-          </a:xfrm>
-          <a:prstGeom prst="rect">
-            <a:avLst/>
-          </a:prstGeom>
-          <a:noFill/>
-        </p:spPr>
-        <p:txBody>
-          <a:bodyPr wrap="square" anchor="t" lIns="0" rIns="0" tIns="0" bIns="0">
-            <a:spAutoFit/>
-          </a:bodyPr>
-          <a:lstStyle/>
-          <a:p>
-            <a:pPr algn="l">
-              <a:lnSpc>
-                <a:spcPct val="125000"/>
-              </a:lnSpc>
-            </a:pPr>
-            <a:r>
-              <a:rPr sz="1600" b="0">
-                <a:solidFill>
-                  <a:srgbClr val="8C9DB5"/>
-                </a:solidFill>
-                <a:latin typeface="Segoe UI"/>
-              </a:rPr>
-              <a:t>На живых L2A-сценах основной слой — marinedebrisdetector (MIT); на MARIDA его не оцениваем.</a:t>
+              <a:rPr sz="1800" b="0">
+                <a:solidFill>
+                  <a:srgbClr val="9AAAC0"/>
+                </a:solidFill>
+                <a:latin typeface="Segoe UI"/>
+              </a:rPr>
+              <a:t>Правило: принимаем, если прирост F1 ≥ max(0,01; 2·std по seed).</a:t>
             </a:r>
           </a:p>
         </p:txBody>
@@ -6982,14 +7871,14 @@
         </p:nvSpPr>
         <p:spPr>
           <a:xfrm>
-            <a:off x="548640" y="502920"/>
-            <a:ext cx="73152" cy="384048"/>
+            <a:off x="548640" y="457200"/>
+            <a:ext cx="73152" cy="329184"/>
           </a:xfrm>
           <a:prstGeom prst="rect">
             <a:avLst/>
           </a:prstGeom>
           <a:solidFill>
-            <a:srgbClr val="FF6B5A"/>
+            <a:srgbClr val="FF6B4A"/>
           </a:solidFill>
           <a:ln>
             <a:noFill/>
@@ -7026,8 +7915,8 @@
         </p:nvSpPr>
         <p:spPr>
           <a:xfrm>
-            <a:off x="777240" y="475488"/>
-            <a:ext cx="8229600" cy="274320"/>
+            <a:off x="777240" y="457200"/>
+            <a:ext cx="8229600" cy="320040"/>
           </a:xfrm>
           <a:prstGeom prst="rect">
             <a:avLst/>
@@ -7046,13 +7935,13 @@
               </a:lnSpc>
             </a:pPr>
             <a:r>
-              <a:rPr sz="1200" b="1">
-                <a:solidFill>
-                  <a:srgbClr val="8C9DB5"/>
-                </a:solidFill>
-                <a:latin typeface="Segoe UI"/>
-              </a:rPr>
-              <a:t>ПОКАЗАТЕЛЬ</a:t>
+              <a:rPr sz="1400" b="1">
+                <a:solidFill>
+                  <a:srgbClr val="9AAAC0"/>
+                </a:solidFill>
+                <a:latin typeface="Segoe UI"/>
+              </a:rPr>
+              <a:t>КАЧЕСТВО, ЧЕСТНО</a:t>
             </a:r>
           </a:p>
         </p:txBody>
@@ -7065,8 +7954,8 @@
         </p:nvSpPr>
         <p:spPr>
           <a:xfrm>
-            <a:off x="548640" y="960120"/>
-            <a:ext cx="11094415" cy="1188720"/>
+            <a:off x="548640" y="914400"/>
+            <a:ext cx="11094415" cy="1097280"/>
           </a:xfrm>
           <a:prstGeom prst="rect">
             <a:avLst/>
@@ -7085,13 +7974,13 @@
               </a:lnSpc>
             </a:pPr>
             <a:r>
-              <a:rPr sz="3200" b="1">
+              <a:rPr sz="3000" b="1">
                 <a:solidFill>
                   <a:srgbClr val="E8EEF6"/>
                 </a:solidFill>
                 <a:latin typeface="Segoe UI"/>
               </a:rPr>
-              <a:t>Показатель: какая доля видимой воды выглядит как мусор</a:t>
+              <a:t>Находим 92 % размеченного мусора на новых снимках тех же районов</a:t>
             </a:r>
           </a:p>
         </p:txBody>
@@ -7104,7 +7993,7 @@
         </p:nvSpPr>
         <p:spPr>
           <a:xfrm>
-            <a:off x="10271455" y="6400800"/>
+            <a:off x="10271455" y="6446520"/>
             <a:ext cx="1371600" cy="274320"/>
           </a:xfrm>
           <a:prstGeom prst="rect">
@@ -7124,13 +8013,13 @@
               </a:lnSpc>
             </a:pPr>
             <a:r>
-              <a:rPr sz="1100" b="0">
-                <a:solidFill>
-                  <a:srgbClr val="8C9DB5"/>
-                </a:solidFill>
-                <a:latin typeface="Segoe UI"/>
-              </a:rPr>
-              <a:t>4 / 12</a:t>
+              <a:rPr sz="1200" b="0">
+                <a:solidFill>
+                  <a:srgbClr val="9AAAC0"/>
+                </a:solidFill>
+                <a:latin typeface="Segoe UI"/>
+              </a:rPr>
+              <a:t>4 / 10</a:t>
             </a:r>
           </a:p>
         </p:txBody>
@@ -7143,7 +8032,7 @@
         </p:nvSpPr>
         <p:spPr>
           <a:xfrm>
-            <a:off x="548640" y="6400800"/>
+            <a:off x="548640" y="6446520"/>
             <a:ext cx="7315200" cy="274320"/>
           </a:xfrm>
           <a:prstGeom prst="rect">
@@ -7163,27 +8052,121 @@
               </a:lnSpc>
             </a:pPr>
             <a:r>
-              <a:rPr sz="1100" b="0">
-                <a:solidFill>
-                  <a:srgbClr val="8C9DB5"/>
-                </a:solidFill>
-                <a:latin typeface="Segoe UI"/>
-              </a:rPr>
-              <a:t>Макропластик · Sentinel-2</a:t>
-            </a:r>
-          </a:p>
-        </p:txBody>
-      </p:sp>
-      <p:sp>
-        <p:nvSpPr>
-          <p:cNvPr id="7" name="Rounded Rectangle 6"/>
+              <a:rPr sz="1200" b="0">
+                <a:solidFill>
+                  <a:srgbClr val="9AAAC0"/>
+                </a:solidFill>
+                <a:latin typeface="Segoe UI"/>
+              </a:rPr>
+              <a:t>Морской мусор · Sentinel-2</a:t>
+            </a:r>
+          </a:p>
+        </p:txBody>
+      </p:sp>
+      <p:sp>
+        <p:nvSpPr>
+          <p:cNvPr id="7" name="TextBox 6"/>
+          <p:cNvSpPr txBox="1"/>
+          <p:nvPr/>
+        </p:nvSpPr>
+        <p:spPr>
+          <a:xfrm>
+            <a:off x="548640" y="2423160"/>
+            <a:ext cx="3657600" cy="1280160"/>
+          </a:xfrm>
+          <a:prstGeom prst="rect">
+            <a:avLst/>
+          </a:prstGeom>
+          <a:noFill/>
+        </p:spPr>
+        <p:txBody>
+          <a:bodyPr wrap="square" anchor="t" lIns="0" rIns="0" tIns="0" bIns="0">
+            <a:spAutoFit/>
+          </a:bodyPr>
+          <a:lstStyle/>
+          <a:p>
+            <a:pPr algn="l">
+              <a:lnSpc>
+                <a:spcPct val="90000"/>
+              </a:lnSpc>
+            </a:pPr>
+            <a:r>
+              <a:rPr sz="8800" b="1">
+                <a:solidFill>
+                  <a:srgbClr val="FF6B4A"/>
+                </a:solidFill>
+                <a:latin typeface="Segoe UI"/>
+              </a:rPr>
+              <a:t>0,923</a:t>
+            </a:r>
+          </a:p>
+        </p:txBody>
+      </p:sp>
+      <p:sp>
+        <p:nvSpPr>
+          <p:cNvPr id="8" name="TextBox 7"/>
+          <p:cNvSpPr txBox="1"/>
+          <p:nvPr/>
+        </p:nvSpPr>
+        <p:spPr>
+          <a:xfrm>
+            <a:off x="548640" y="3794760"/>
+            <a:ext cx="3657600" cy="1463040"/>
+          </a:xfrm>
+          <a:prstGeom prst="rect">
+            <a:avLst/>
+          </a:prstGeom>
+          <a:noFill/>
+        </p:spPr>
+        <p:txBody>
+          <a:bodyPr wrap="square" anchor="t" lIns="0" rIns="0" tIns="0" bIns="0">
+            <a:spAutoFit/>
+          </a:bodyPr>
+          <a:lstStyle/>
+          <a:p>
+            <a:pPr algn="l">
+              <a:lnSpc>
+                <a:spcPct val="115000"/>
+              </a:lnSpc>
+            </a:pPr>
+            <a:r>
+              <a:rPr sz="2000" b="0">
+                <a:solidFill>
+                  <a:srgbClr val="9AAAC0"/>
+                </a:solidFill>
+                <a:latin typeface="Segoe UI"/>
+              </a:rPr>
+              <a:t>F1 «мусор», val MARIDA</a:t>
+            </a:r>
+          </a:p>
+          <a:p>
+            <a:pPr algn="l">
+              <a:lnSpc>
+                <a:spcPct val="115000"/>
+              </a:lnSpc>
+            </a:pPr>
+            <a:r>
+              <a:rPr sz="2000" b="0">
+                <a:solidFill>
+                  <a:srgbClr val="9AAAC0"/>
+                </a:solidFill>
+                <a:latin typeface="Segoe UI"/>
+              </a:rPr>
+              <a:t>порог 0,63; точность 93 %</a:t>
+            </a:r>
+          </a:p>
+        </p:txBody>
+      </p:sp>
+      <p:sp>
+        <p:nvSpPr>
+          <p:cNvPr id="9" name="Rounded Rectangle 8"/>
           <p:cNvSpPr/>
           <p:nvPr/>
         </p:nvSpPr>
         <p:spPr>
           <a:xfrm>
-            <a:off x="548640" y="2560320"/>
-            <a:ext cx="11094415" cy="1463040"/>
+            <a:off x="4206240" y="2240280"/>
+            <a:ext cx="2423160" cy="2011680"/>
           </a:xfrm>
           <a:prstGeom prst="roundRect">
             <a:avLst>
@@ -7193,8 +8176,10 @@
           <a:solidFill>
             <a:srgbClr val="121C2E"/>
           </a:solidFill>
-          <a:ln>
-            <a:noFill/>
+          <a:ln w="19050">
+            <a:solidFill>
+              <a:srgbClr val="2A3A55"/>
+            </a:solidFill>
           </a:ln>
           <a:effectLst/>
         </p:spPr>
@@ -7222,53 +8207,14 @@
       </p:sp>
       <p:sp>
         <p:nvSpPr>
-          <p:cNvPr id="8" name="TextBox 7"/>
+          <p:cNvPr id="10" name="TextBox 9"/>
           <p:cNvSpPr txBox="1"/>
           <p:nvPr/>
         </p:nvSpPr>
         <p:spPr>
           <a:xfrm>
-            <a:off x="548640" y="2788920"/>
-            <a:ext cx="11094415" cy="1097280"/>
-          </a:xfrm>
-          <a:prstGeom prst="rect">
-            <a:avLst/>
-          </a:prstGeom>
-          <a:noFill/>
-        </p:spPr>
-        <p:txBody>
-          <a:bodyPr wrap="square" anchor="ctr" lIns="0" rIns="0" tIns="0" bIns="0">
-            <a:spAutoFit/>
-          </a:bodyPr>
-          <a:lstStyle/>
-          <a:p>
-            <a:pPr algn="ctr">
-              <a:lnSpc>
-                <a:spcPct val="110000"/>
-              </a:lnSpc>
-            </a:pPr>
-            <a:r>
-              <a:rPr sz="3800" b="1">
-                <a:solidFill>
-                  <a:srgbClr val="FF6B5A"/>
-                </a:solidFill>
-                <a:latin typeface="Segoe UI"/>
-              </a:rPr>
-              <a:t>‰ = помеченная вода / видимая вода</a:t>
-            </a:r>
-          </a:p>
-        </p:txBody>
-      </p:sp>
-      <p:sp>
-        <p:nvSpPr>
-          <p:cNvPr id="9" name="TextBox 8"/>
-          <p:cNvSpPr txBox="1"/>
-          <p:nvPr/>
-        </p:nvSpPr>
-        <p:spPr>
-          <a:xfrm>
-            <a:off x="548640" y="4389120"/>
-            <a:ext cx="5486400" cy="1280160"/>
+            <a:off x="4407408" y="2404872"/>
+            <a:ext cx="2020824" cy="548640"/>
           </a:xfrm>
           <a:prstGeom prst="rect">
             <a:avLst/>
@@ -7283,57 +8229,98 @@
           <a:p>
             <a:pPr algn="l">
               <a:lnSpc>
-                <a:spcPct val="130000"/>
+                <a:spcPct val="110000"/>
+              </a:lnSpc>
+            </a:pPr>
+            <a:r>
+              <a:rPr sz="2400" b="1">
+                <a:solidFill>
+                  <a:srgbClr val="E8EEF6"/>
+                </a:solidFill>
+                <a:latin typeface="Segoe UI"/>
+              </a:rPr>
+              <a:t>0,877–0,970</a:t>
+            </a:r>
+          </a:p>
+        </p:txBody>
+      </p:sp>
+      <p:sp>
+        <p:nvSpPr>
+          <p:cNvPr id="11" name="TextBox 10"/>
+          <p:cNvSpPr txBox="1"/>
+          <p:nvPr/>
+        </p:nvSpPr>
+        <p:spPr>
+          <a:xfrm>
+            <a:off x="4407408" y="2846831"/>
+            <a:ext cx="2020824" cy="1463040"/>
+          </a:xfrm>
+          <a:prstGeom prst="rect">
+            <a:avLst/>
+          </a:prstGeom>
+          <a:noFill/>
+        </p:spPr>
+        <p:txBody>
+          <a:bodyPr wrap="square" anchor="t" lIns="0" rIns="0" tIns="0" bIns="0">
+            <a:spAutoFit/>
+          </a:bodyPr>
+          <a:lstStyle/>
+          <a:p>
+            <a:pPr algn="l">
+              <a:lnSpc>
+                <a:spcPct val="110000"/>
               </a:lnSpc>
             </a:pPr>
             <a:r>
               <a:rPr sz="1800" b="0">
                 <a:solidFill>
-                  <a:srgbClr val="E8EEF6"/>
-                </a:solidFill>
-                <a:latin typeface="Segoe UI"/>
-              </a:rPr>
-              <a:t>Ячейка H3 ≈ 0,7 км².</a:t>
-            </a:r>
-          </a:p>
-          <a:p>
-            <a:pPr algn="l">
-              <a:lnSpc>
-                <a:spcPct val="130000"/>
+                  <a:srgbClr val="9AAAC0"/>
+                </a:solidFill>
+                <a:latin typeface="Segoe UI"/>
+              </a:rPr>
+              <a:t>95 % интервал</a:t>
+            </a:r>
+          </a:p>
+          <a:p>
+            <a:pPr algn="l">
+              <a:lnSpc>
+                <a:spcPct val="110000"/>
               </a:lnSpc>
             </a:pPr>
             <a:r>
               <a:rPr sz="1800" b="0">
                 <a:solidFill>
-                  <a:srgbClr val="E8EEF6"/>
-                </a:solidFill>
-                <a:latin typeface="Segoe UI"/>
-              </a:rPr>
-              <a:t>observed_frac &lt; 0,5 → серая «нет данных», не ноль.</a:t>
-            </a:r>
-          </a:p>
-        </p:txBody>
-      </p:sp>
-      <p:sp>
-        <p:nvSpPr>
-          <p:cNvPr id="10" name="Rounded Rectangle 9"/>
+                  <a:srgbClr val="9AAAC0"/>
+                </a:solidFill>
+                <a:latin typeface="Segoe UI"/>
+              </a:rPr>
+              <a:t>по сценам val</a:t>
+            </a:r>
+          </a:p>
+        </p:txBody>
+      </p:sp>
+      <p:sp>
+        <p:nvSpPr>
+          <p:cNvPr id="12" name="Rounded Rectangle 11"/>
           <p:cNvSpPr/>
           <p:nvPr/>
         </p:nvSpPr>
         <p:spPr>
           <a:xfrm>
-            <a:off x="6583680" y="4389120"/>
-            <a:ext cx="5029200" cy="822960"/>
+            <a:off x="6812280" y="2240280"/>
+            <a:ext cx="2423160" cy="2011680"/>
           </a:xfrm>
           <a:prstGeom prst="roundRect">
             <a:avLst>
               <a:gd name="adj" fmla="val 8000"/>
             </a:avLst>
           </a:prstGeom>
-          <a:noFill/>
-          <a:ln w="15875">
+          <a:solidFill>
+            <a:srgbClr val="121C2E"/>
+          </a:solidFill>
+          <a:ln w="19050">
             <a:solidFill>
-              <a:srgbClr val="FF6B5A"/>
+              <a:srgbClr val="FF6B4A"/>
             </a:solidFill>
           </a:ln>
           <a:effectLst/>
@@ -7362,39 +8349,292 @@
       </p:sp>
       <p:sp>
         <p:nvSpPr>
-          <p:cNvPr id="11" name="TextBox 10"/>
+          <p:cNvPr id="13" name="TextBox 12"/>
           <p:cNvSpPr txBox="1"/>
           <p:nvPr/>
         </p:nvSpPr>
         <p:spPr>
           <a:xfrm>
-            <a:off x="6766560" y="4526280"/>
-            <a:ext cx="4663440" cy="548640"/>
-          </a:xfrm>
-          <a:prstGeom prst="rect">
-            <a:avLst/>
-          </a:prstGeom>
-          <a:noFill/>
-        </p:spPr>
-        <p:txBody>
-          <a:bodyPr wrap="square" anchor="ctr" lIns="0" rIns="0" tIns="0" bIns="0">
+            <a:off x="7013448" y="2404872"/>
+            <a:ext cx="2020824" cy="548640"/>
+          </a:xfrm>
+          <a:prstGeom prst="rect">
+            <a:avLst/>
+          </a:prstGeom>
+          <a:noFill/>
+        </p:spPr>
+        <p:txBody>
+          <a:bodyPr wrap="square" anchor="t" lIns="0" rIns="0" tIns="0" bIns="0">
             <a:spAutoFit/>
           </a:bodyPr>
           <a:lstStyle/>
           <a:p>
-            <a:pPr algn="ctr">
+            <a:pPr algn="l">
               <a:lnSpc>
                 <a:spcPct val="110000"/>
               </a:lnSpc>
             </a:pPr>
             <a:r>
-              <a:rPr sz="2000" b="1">
+              <a:rPr sz="2400" b="1">
+                <a:solidFill>
+                  <a:srgbClr val="FF6B4A"/>
+                </a:solidFill>
+                <a:latin typeface="Segoe UI"/>
+              </a:rPr>
+              <a:t>0,854</a:t>
+            </a:r>
+          </a:p>
+        </p:txBody>
+      </p:sp>
+      <p:sp>
+        <p:nvSpPr>
+          <p:cNvPr id="14" name="TextBox 13"/>
+          <p:cNvSpPr txBox="1"/>
+          <p:nvPr/>
+        </p:nvSpPr>
+        <p:spPr>
+          <a:xfrm>
+            <a:off x="7013448" y="2846831"/>
+            <a:ext cx="2020824" cy="1463040"/>
+          </a:xfrm>
+          <a:prstGeom prst="rect">
+            <a:avLst/>
+          </a:prstGeom>
+          <a:noFill/>
+        </p:spPr>
+        <p:txBody>
+          <a:bodyPr wrap="square" anchor="t" lIns="0" rIns="0" tIns="0" bIns="0">
+            <a:spAutoFit/>
+          </a:bodyPr>
+          <a:lstStyle/>
+          <a:p>
+            <a:pPr algn="l">
+              <a:lnSpc>
+                <a:spcPct val="110000"/>
+              </a:lnSpc>
+            </a:pPr>
+            <a:r>
+              <a:rPr sz="1800" b="0">
+                <a:solidFill>
+                  <a:srgbClr val="9AAAC0"/>
+                </a:solidFill>
+                <a:latin typeface="Segoe UI"/>
+              </a:rPr>
+              <a:t>F1 на районе,</a:t>
+            </a:r>
+          </a:p>
+          <a:p>
+            <a:pPr algn="l">
+              <a:lnSpc>
+                <a:spcPct val="110000"/>
+              </a:lnSpc>
+            </a:pPr>
+            <a:r>
+              <a:rPr sz="1800" b="0">
+                <a:solidFill>
+                  <a:srgbClr val="9AAAC0"/>
+                </a:solidFill>
+                <a:latin typeface="Segoe UI"/>
+              </a:rPr>
+              <a:t>убранном из обучения</a:t>
+            </a:r>
+          </a:p>
+          <a:p>
+            <a:pPr algn="l">
+              <a:lnSpc>
+                <a:spcPct val="110000"/>
+              </a:lnSpc>
+            </a:pPr>
+            <a:r>
+              <a:rPr sz="1800" b="0">
+                <a:solidFill>
+                  <a:srgbClr val="9AAAC0"/>
+                </a:solidFill>
+                <a:latin typeface="Segoe UI"/>
+              </a:rPr>
+              <a:t>(4 района)</a:t>
+            </a:r>
+          </a:p>
+        </p:txBody>
+      </p:sp>
+      <p:sp>
+        <p:nvSpPr>
+          <p:cNvPr id="15" name="Rounded Rectangle 14"/>
+          <p:cNvSpPr/>
+          <p:nvPr/>
+        </p:nvSpPr>
+        <p:spPr>
+          <a:xfrm>
+            <a:off x="9418320" y="2240280"/>
+            <a:ext cx="2423160" cy="2011680"/>
+          </a:xfrm>
+          <a:prstGeom prst="roundRect">
+            <a:avLst>
+              <a:gd name="adj" fmla="val 8000"/>
+            </a:avLst>
+          </a:prstGeom>
+          <a:solidFill>
+            <a:srgbClr val="121C2E"/>
+          </a:solidFill>
+          <a:ln w="19050">
+            <a:solidFill>
+              <a:srgbClr val="2A3A55"/>
+            </a:solidFill>
+            <a:prstDash val="dash"/>
+          </a:ln>
+          <a:effectLst/>
+        </p:spPr>
+        <p:style>
+          <a:lnRef idx="1">
+            <a:schemeClr val="accent1"/>
+          </a:lnRef>
+          <a:fillRef idx="3">
+            <a:schemeClr val="accent1"/>
+          </a:fillRef>
+          <a:effectRef idx="2">
+            <a:schemeClr val="accent1"/>
+          </a:effectRef>
+          <a:fontRef idx="minor">
+            <a:schemeClr val="lt1"/>
+          </a:fontRef>
+        </p:style>
+        <p:txBody>
+          <a:bodyPr rtlCol="0" anchor="ctr"/>
+          <a:lstStyle/>
+          <a:p>
+            <a:pPr algn="ctr"/>
+          </a:p>
+        </p:txBody>
+      </p:sp>
+      <p:sp>
+        <p:nvSpPr>
+          <p:cNvPr id="16" name="TextBox 15"/>
+          <p:cNvSpPr txBox="1"/>
+          <p:nvPr/>
+        </p:nvSpPr>
+        <p:spPr>
+          <a:xfrm>
+            <a:off x="9619488" y="2404872"/>
+            <a:ext cx="2020824" cy="548640"/>
+          </a:xfrm>
+          <a:prstGeom prst="rect">
+            <a:avLst/>
+          </a:prstGeom>
+          <a:noFill/>
+        </p:spPr>
+        <p:txBody>
+          <a:bodyPr wrap="square" anchor="t" lIns="0" rIns="0" tIns="0" bIns="0">
+            <a:spAutoFit/>
+          </a:bodyPr>
+          <a:lstStyle/>
+          <a:p>
+            <a:pPr algn="l">
+              <a:lnSpc>
+                <a:spcPct val="110000"/>
+              </a:lnSpc>
+            </a:pPr>
+            <a:r>
+              <a:rPr sz="2400" b="1">
                 <a:solidFill>
                   <a:srgbClr val="E8EEF6"/>
                 </a:solidFill>
                 <a:latin typeface="Segoe UI"/>
               </a:rPr>
-              <a:t>Индекс по снимку, не масса пластика</a:t>
+              <a:t>test</a:t>
+            </a:r>
+          </a:p>
+        </p:txBody>
+      </p:sp>
+      <p:sp>
+        <p:nvSpPr>
+          <p:cNvPr id="17" name="TextBox 16"/>
+          <p:cNvSpPr txBox="1"/>
+          <p:nvPr/>
+        </p:nvSpPr>
+        <p:spPr>
+          <a:xfrm>
+            <a:off x="9619488" y="2846831"/>
+            <a:ext cx="2020824" cy="1463040"/>
+          </a:xfrm>
+          <a:prstGeom prst="rect">
+            <a:avLst/>
+          </a:prstGeom>
+          <a:noFill/>
+        </p:spPr>
+        <p:txBody>
+          <a:bodyPr wrap="square" anchor="t" lIns="0" rIns="0" tIns="0" bIns="0">
+            <a:spAutoFit/>
+          </a:bodyPr>
+          <a:lstStyle/>
+          <a:p>
+            <a:pPr algn="l">
+              <a:lnSpc>
+                <a:spcPct val="110000"/>
+              </a:lnSpc>
+            </a:pPr>
+            <a:r>
+              <a:rPr sz="1800" b="0">
+                <a:solidFill>
+                  <a:srgbClr val="9AAAC0"/>
+                </a:solidFill>
+                <a:latin typeface="Segoe UI"/>
+              </a:rPr>
+              <a:t>один раз,</a:t>
+            </a:r>
+          </a:p>
+          <a:p>
+            <a:pPr algn="l">
+              <a:lnSpc>
+                <a:spcPct val="110000"/>
+              </a:lnSpc>
+            </a:pPr>
+            <a:r>
+              <a:rPr sz="1800" b="0">
+                <a:solidFill>
+                  <a:srgbClr val="9AAAC0"/>
+                </a:solidFill>
+                <a:latin typeface="Segoe UI"/>
+              </a:rPr>
+              <a:t>на финальной модели</a:t>
+            </a:r>
+          </a:p>
+        </p:txBody>
+      </p:sp>
+      <p:sp>
+        <p:nvSpPr>
+          <p:cNvPr id="18" name="TextBox 17"/>
+          <p:cNvSpPr txBox="1"/>
+          <p:nvPr/>
+        </p:nvSpPr>
+        <p:spPr>
+          <a:xfrm>
+            <a:off x="4206240" y="4572000"/>
+            <a:ext cx="7589520" cy="914400"/>
+          </a:xfrm>
+          <a:prstGeom prst="rect">
+            <a:avLst/>
+          </a:prstGeom>
+          <a:noFill/>
+        </p:spPr>
+        <p:txBody>
+          <a:bodyPr wrap="square" anchor="t" lIns="0" rIns="0" tIns="0" bIns="0">
+            <a:spAutoFit/>
+          </a:bodyPr>
+          <a:lstStyle/>
+          <a:p>
+            <a:pPr algn="l">
+              <a:lnSpc>
+                <a:spcPct val="120000"/>
+              </a:lnSpc>
+            </a:pPr>
+            <a:r>
+              <a:rPr sz="2000" b="0">
+                <a:solidFill>
+                  <a:srgbClr val="E8EEF6"/>
+                </a:solidFill>
+                <a:latin typeface="Segoe UI"/>
+              </a:rPr>
+              <a:t>Решения — только по val. На новом месте ждём около 0,854, а не 0,923.</a:t>
             </a:r>
           </a:p>
         </p:txBody>
@@ -7433,14 +8673,14 @@
         </p:nvSpPr>
         <p:spPr>
           <a:xfrm>
-            <a:off x="548640" y="502920"/>
-            <a:ext cx="73152" cy="384048"/>
+            <a:off x="548640" y="457200"/>
+            <a:ext cx="73152" cy="329184"/>
           </a:xfrm>
           <a:prstGeom prst="rect">
             <a:avLst/>
           </a:prstGeom>
           <a:solidFill>
-            <a:srgbClr val="FF6B5A"/>
+            <a:srgbClr val="FF6B4A"/>
           </a:solidFill>
           <a:ln>
             <a:noFill/>
@@ -7477,8 +8717,8 @@
         </p:nvSpPr>
         <p:spPr>
           <a:xfrm>
-            <a:off x="777240" y="475488"/>
-            <a:ext cx="8229600" cy="274320"/>
+            <a:off x="777240" y="457200"/>
+            <a:ext cx="8229600" cy="320040"/>
           </a:xfrm>
           <a:prstGeom prst="rect">
             <a:avLst/>
@@ -7497,13 +8737,13 @@
               </a:lnSpc>
             </a:pPr>
             <a:r>
-              <a:rPr sz="1200" b="1">
-                <a:solidFill>
-                  <a:srgbClr val="8C9DB5"/>
-                </a:solidFill>
-                <a:latin typeface="Segoe UI"/>
-              </a:rPr>
-              <a:t>КАЧЕСТВО (MARIDA)</a:t>
+              <a:rPr sz="1400" b="1">
+                <a:solidFill>
+                  <a:srgbClr val="9AAAC0"/>
+                </a:solidFill>
+                <a:latin typeface="Segoe UI"/>
+              </a:rPr>
+              <a:t>ПОКАЗАТЕЛЬ НА КАРТЕ</a:t>
             </a:r>
           </a:p>
         </p:txBody>
@@ -7516,8 +8756,8 @@
         </p:nvSpPr>
         <p:spPr>
           <a:xfrm>
-            <a:off x="548640" y="960120"/>
-            <a:ext cx="11094415" cy="1188720"/>
+            <a:off x="548640" y="914400"/>
+            <a:ext cx="11094415" cy="1097280"/>
           </a:xfrm>
           <a:prstGeom prst="rect">
             <a:avLst/>
@@ -7536,13 +8776,13 @@
               </a:lnSpc>
             </a:pPr>
             <a:r>
-              <a:rPr sz="3200" b="1">
+              <a:rPr sz="3000" b="1">
                 <a:solidFill>
                   <a:srgbClr val="E8EEF6"/>
                 </a:solidFill>
                 <a:latin typeface="Segoe UI"/>
               </a:rPr>
-              <a:t>Модель находит 9 из 10 пикселей мусора, и 9 из 10 её находок верны</a:t>
+              <a:t>Показатель — доля видимой воды с признаками мусора, не масса пластика</a:t>
             </a:r>
           </a:p>
         </p:txBody>
@@ -7555,7 +8795,7 @@
         </p:nvSpPr>
         <p:spPr>
           <a:xfrm>
-            <a:off x="10271455" y="6400800"/>
+            <a:off x="10271455" y="6446520"/>
             <a:ext cx="1371600" cy="274320"/>
           </a:xfrm>
           <a:prstGeom prst="rect">
@@ -7575,13 +8815,13 @@
               </a:lnSpc>
             </a:pPr>
             <a:r>
-              <a:rPr sz="1100" b="0">
-                <a:solidFill>
-                  <a:srgbClr val="8C9DB5"/>
-                </a:solidFill>
-                <a:latin typeface="Segoe UI"/>
-              </a:rPr>
-              <a:t>5 / 12</a:t>
+              <a:rPr sz="1200" b="0">
+                <a:solidFill>
+                  <a:srgbClr val="9AAAC0"/>
+                </a:solidFill>
+                <a:latin typeface="Segoe UI"/>
+              </a:rPr>
+              <a:t>5 / 10</a:t>
             </a:r>
           </a:p>
         </p:txBody>
@@ -7594,7 +8834,7 @@
         </p:nvSpPr>
         <p:spPr>
           <a:xfrm>
-            <a:off x="548640" y="6400800"/>
+            <a:off x="548640" y="6446520"/>
             <a:ext cx="7315200" cy="274320"/>
           </a:xfrm>
           <a:prstGeom prst="rect">
@@ -7614,121 +8854,27 @@
               </a:lnSpc>
             </a:pPr>
             <a:r>
-              <a:rPr sz="1100" b="0">
-                <a:solidFill>
-                  <a:srgbClr val="8C9DB5"/>
-                </a:solidFill>
-                <a:latin typeface="Segoe UI"/>
-              </a:rPr>
-              <a:t>Макропластик · Sentinel-2</a:t>
-            </a:r>
-          </a:p>
-        </p:txBody>
-      </p:sp>
-      <p:sp>
-        <p:nvSpPr>
-          <p:cNvPr id="7" name="TextBox 6"/>
-          <p:cNvSpPr txBox="1"/>
-          <p:nvPr/>
-        </p:nvSpPr>
-        <p:spPr>
-          <a:xfrm>
-            <a:off x="548640" y="2651760"/>
-            <a:ext cx="4114800" cy="1463040"/>
-          </a:xfrm>
-          <a:prstGeom prst="rect">
-            <a:avLst/>
-          </a:prstGeom>
-          <a:noFill/>
-        </p:spPr>
-        <p:txBody>
-          <a:bodyPr wrap="square" anchor="t" lIns="0" rIns="0" tIns="0" bIns="0">
-            <a:spAutoFit/>
-          </a:bodyPr>
-          <a:lstStyle/>
-          <a:p>
-            <a:pPr algn="l">
-              <a:lnSpc>
-                <a:spcPct val="90000"/>
-              </a:lnSpc>
-            </a:pPr>
-            <a:r>
-              <a:rPr sz="9600" b="1">
-                <a:solidFill>
-                  <a:srgbClr val="FF6B5A"/>
-                </a:solidFill>
-                <a:latin typeface="Segoe UI"/>
-              </a:rPr>
-              <a:t>0.923</a:t>
-            </a:r>
-          </a:p>
-        </p:txBody>
-      </p:sp>
-      <p:sp>
-        <p:nvSpPr>
-          <p:cNvPr id="8" name="TextBox 7"/>
-          <p:cNvSpPr txBox="1"/>
-          <p:nvPr/>
-        </p:nvSpPr>
-        <p:spPr>
-          <a:xfrm>
-            <a:off x="548640" y="4160520"/>
-            <a:ext cx="4114800" cy="822960"/>
-          </a:xfrm>
-          <a:prstGeom prst="rect">
-            <a:avLst/>
-          </a:prstGeom>
-          <a:noFill/>
-        </p:spPr>
-        <p:txBody>
-          <a:bodyPr wrap="square" anchor="t" lIns="0" rIns="0" tIns="0" bIns="0">
-            <a:spAutoFit/>
-          </a:bodyPr>
-          <a:lstStyle/>
-          <a:p>
-            <a:pPr algn="l">
-              <a:lnSpc>
-                <a:spcPct val="110000"/>
-              </a:lnSpc>
-            </a:pPr>
-            <a:r>
-              <a:rPr sz="1800" b="0">
-                <a:solidFill>
-                  <a:srgbClr val="8C9DB5"/>
-                </a:solidFill>
-                <a:latin typeface="Segoe UI"/>
-              </a:rPr>
-              <a:t>F1 Marine Debris, val</a:t>
-            </a:r>
-          </a:p>
-          <a:p>
-            <a:pPr algn="l">
-              <a:lnSpc>
-                <a:spcPct val="110000"/>
-              </a:lnSpc>
-            </a:pPr>
-            <a:r>
-              <a:rPr sz="1800" b="0">
-                <a:solidFill>
-                  <a:srgbClr val="8C9DB5"/>
-                </a:solidFill>
-                <a:latin typeface="Segoe UI"/>
-              </a:rPr>
-              <a:t>(выбор модели и порога)</a:t>
-            </a:r>
-          </a:p>
-        </p:txBody>
-      </p:sp>
-      <p:sp>
-        <p:nvSpPr>
-          <p:cNvPr id="9" name="Rounded Rectangle 8"/>
+              <a:rPr sz="1200" b="0">
+                <a:solidFill>
+                  <a:srgbClr val="9AAAC0"/>
+                </a:solidFill>
+                <a:latin typeface="Segoe UI"/>
+              </a:rPr>
+              <a:t>Морской мусор · Sentinel-2</a:t>
+            </a:r>
+          </a:p>
+        </p:txBody>
+      </p:sp>
+      <p:sp>
+        <p:nvSpPr>
+          <p:cNvPr id="7" name="Rounded Rectangle 6"/>
           <p:cNvSpPr/>
           <p:nvPr/>
         </p:nvSpPr>
         <p:spPr>
           <a:xfrm>
-            <a:off x="5120640" y="2743200"/>
-            <a:ext cx="2011680" cy="1005840"/>
+            <a:off x="548640" y="2240280"/>
+            <a:ext cx="5852160" cy="1371600"/>
           </a:xfrm>
           <a:prstGeom prst="roundRect">
             <a:avLst>
@@ -7738,9 +8884,9 @@
           <a:solidFill>
             <a:srgbClr val="121C2E"/>
           </a:solidFill>
-          <a:ln w="15875">
+          <a:ln w="19050">
             <a:solidFill>
-              <a:srgbClr val="24334A"/>
+              <a:srgbClr val="FF6B4A"/>
             </a:solidFill>
           </a:ln>
           <a:effectLst/>
@@ -7769,104 +8915,199 @@
       </p:sp>
       <p:sp>
         <p:nvSpPr>
-          <p:cNvPr id="10" name="TextBox 9"/>
+          <p:cNvPr id="8" name="TextBox 7"/>
           <p:cNvSpPr txBox="1"/>
           <p:nvPr/>
         </p:nvSpPr>
         <p:spPr>
           <a:xfrm>
-            <a:off x="5303520" y="2907792"/>
-            <a:ext cx="1645920" cy="365760"/>
-          </a:xfrm>
-          <a:prstGeom prst="rect">
-            <a:avLst/>
-          </a:prstGeom>
-          <a:noFill/>
-        </p:spPr>
-        <p:txBody>
-          <a:bodyPr wrap="square" anchor="t" lIns="0" rIns="0" tIns="0" bIns="0">
+            <a:off x="548640" y="2240280"/>
+            <a:ext cx="5852160" cy="1371600"/>
+          </a:xfrm>
+          <a:prstGeom prst="rect">
+            <a:avLst/>
+          </a:prstGeom>
+          <a:noFill/>
+        </p:spPr>
+        <p:txBody>
+          <a:bodyPr wrap="square" anchor="ctr" lIns="0" rIns="0" tIns="0" bIns="0">
             <a:spAutoFit/>
           </a:bodyPr>
           <a:lstStyle/>
           <a:p>
-            <a:pPr algn="l">
+            <a:pPr algn="ctr">
               <a:lnSpc>
                 <a:spcPct val="110000"/>
               </a:lnSpc>
             </a:pPr>
             <a:r>
-              <a:rPr sz="1600" b="1">
-                <a:solidFill>
-                  <a:srgbClr val="E8EEF6"/>
-                </a:solidFill>
-                <a:latin typeface="Segoe UI"/>
-              </a:rPr>
-              <a:t>0.856</a:t>
-            </a:r>
-          </a:p>
-        </p:txBody>
-      </p:sp>
-      <p:sp>
-        <p:nvSpPr>
-          <p:cNvPr id="11" name="TextBox 10"/>
+              <a:rPr sz="3000" b="1">
+                <a:solidFill>
+                  <a:srgbClr val="FF6B4A"/>
+                </a:solidFill>
+                <a:latin typeface="Segoe UI"/>
+              </a:rPr>
+              <a:t>‰ = вода с признаками</a:t>
+            </a:r>
+          </a:p>
+          <a:p>
+            <a:pPr algn="ctr">
+              <a:lnSpc>
+                <a:spcPct val="110000"/>
+              </a:lnSpc>
+            </a:pPr>
+            <a:r>
+              <a:rPr sz="3000" b="1">
+                <a:solidFill>
+                  <a:srgbClr val="FF6B4A"/>
+                </a:solidFill>
+                <a:latin typeface="Segoe UI"/>
+              </a:rPr>
+              <a:t>     / видимая вода</a:t>
+            </a:r>
+          </a:p>
+        </p:txBody>
+      </p:sp>
+      <p:sp>
+        <p:nvSpPr>
+          <p:cNvPr id="9" name="TextBox 8"/>
           <p:cNvSpPr txBox="1"/>
           <p:nvPr/>
         </p:nvSpPr>
         <p:spPr>
           <a:xfrm>
-            <a:off x="5303520" y="3291840"/>
-            <a:ext cx="1645920" cy="365760"/>
-          </a:xfrm>
-          <a:prstGeom prst="rect">
-            <a:avLst/>
-          </a:prstGeom>
-          <a:noFill/>
-        </p:spPr>
-        <p:txBody>
-          <a:bodyPr wrap="square" anchor="t" lIns="0" rIns="0" tIns="0" bIns="0">
+            <a:off x="548640" y="3931920"/>
+            <a:ext cx="5852160" cy="2194560"/>
+          </a:xfrm>
+          <a:prstGeom prst="rect">
+            <a:avLst/>
+          </a:prstGeom>
+          <a:noFill/>
+        </p:spPr>
+        <p:txBody>
+          <a:bodyPr wrap="square" lIns="0" rIns="0" tIns="0" bIns="0">
             <a:spAutoFit/>
           </a:bodyPr>
           <a:lstStyle/>
           <a:p>
             <a:pPr algn="l">
               <a:lnSpc>
-                <a:spcPct val="110000"/>
-              </a:lnSpc>
-            </a:pPr>
-            <a:r>
-              <a:rPr sz="1200" b="0">
-                <a:solidFill>
-                  <a:srgbClr val="8C9DB5"/>
-                </a:solidFill>
-                <a:latin typeface="Segoe UI"/>
-              </a:rPr>
-              <a:t>IoU val</a:t>
-            </a:r>
-          </a:p>
-        </p:txBody>
-      </p:sp>
-      <p:sp>
-        <p:nvSpPr>
-          <p:cNvPr id="12" name="Rounded Rectangle 11"/>
+                <a:spcPct val="160000"/>
+              </a:lnSpc>
+            </a:pPr>
+            <a:r>
+              <a:rPr sz="2200" b="1">
+                <a:solidFill>
+                  <a:srgbClr val="E8EEF6"/>
+                </a:solidFill>
+                <a:latin typeface="Segoe UI"/>
+              </a:rPr>
+              <a:t>H3 ≈ 0,7 км²</a:t>
+            </a:r>
+            <a:r>
+              <a:rPr sz="2200" b="0">
+                <a:solidFill>
+                  <a:srgbClr val="9AAAC0"/>
+                </a:solidFill>
+                <a:latin typeface="Segoe UI"/>
+              </a:rPr>
+              <a:t> — точка обследования</a:t>
+            </a:r>
+          </a:p>
+          <a:p>
+            <a:pPr algn="l">
+              <a:lnSpc>
+                <a:spcPct val="160000"/>
+              </a:lnSpc>
+            </a:pPr>
+            <a:r>
+              <a:rPr sz="2200" b="1">
+                <a:solidFill>
+                  <a:srgbClr val="E8EEF6"/>
+                </a:solidFill>
+                <a:latin typeface="Segoe UI"/>
+              </a:rPr>
+              <a:t>Видно &lt; 50 %</a:t>
+            </a:r>
+            <a:r>
+              <a:rPr sz="2200" b="0">
+                <a:solidFill>
+                  <a:srgbClr val="9AAAC0"/>
+                </a:solidFill>
+                <a:latin typeface="Segoe UI"/>
+              </a:rPr>
+              <a:t> → «нет данных», не ноль</a:t>
+            </a:r>
+          </a:p>
+          <a:p>
+            <a:pPr algn="l">
+              <a:lnSpc>
+                <a:spcPct val="160000"/>
+              </a:lnSpc>
+            </a:pPr>
+            <a:r>
+              <a:rPr sz="2200" b="1">
+                <a:solidFill>
+                  <a:srgbClr val="FF6B4A"/>
+                </a:solidFill>
+                <a:latin typeface="Segoe UI"/>
+              </a:rPr>
+              <a:t>Индекс по снимку,</a:t>
+            </a:r>
+            <a:r>
+              <a:rPr sz="2200" b="0">
+                <a:solidFill>
+                  <a:srgbClr val="9AAAC0"/>
+                </a:solidFill>
+                <a:latin typeface="Segoe UI"/>
+              </a:rPr>
+              <a:t> не килограммы</a:t>
+            </a:r>
+          </a:p>
+        </p:txBody>
+      </p:sp>
+      <p:pic>
+        <p:nvPicPr>
+          <p:cNvPr id="10" name="Picture 9" descr="image.png"/>
+          <p:cNvPicPr>
+            <a:picLocks noChangeAspect="1"/>
+          </p:cNvPicPr>
+          <p:nvPr/>
+        </p:nvPicPr>
+        <p:blipFill>
+          <a:blip r:embed="rId2"/>
+          <a:stretch>
+            <a:fillRect/>
+          </a:stretch>
+        </p:blipFill>
+        <p:spPr>
+          <a:xfrm>
+            <a:off x="7198515" y="2148840"/>
+            <a:ext cx="3918401" cy="3520439"/>
+          </a:xfrm>
+          <a:prstGeom prst="rect">
+            <a:avLst/>
+          </a:prstGeom>
+        </p:spPr>
+      </p:pic>
+      <p:sp>
+        <p:nvSpPr>
+          <p:cNvPr id="11" name="Rectangle 10"/>
           <p:cNvSpPr/>
           <p:nvPr/>
         </p:nvSpPr>
         <p:spPr>
           <a:xfrm>
-            <a:off x="7315200" y="2743200"/>
-            <a:ext cx="2011680" cy="1005840"/>
-          </a:xfrm>
-          <a:prstGeom prst="roundRect">
-            <a:avLst>
-              <a:gd name="adj" fmla="val 8000"/>
-            </a:avLst>
-          </a:prstGeom>
-          <a:solidFill>
-            <a:srgbClr val="121C2E"/>
-          </a:solidFill>
-          <a:ln w="15875">
+            <a:off x="7198515" y="2148840"/>
+            <a:ext cx="3918401" cy="3520439"/>
+          </a:xfrm>
+          <a:prstGeom prst="rect">
+            <a:avLst/>
+          </a:prstGeom>
+          <a:noFill/>
+          <a:ln w="19050">
             <a:solidFill>
-              <a:srgbClr val="FF6B5A"/>
+              <a:srgbClr val="2A3A55"/>
             </a:solidFill>
           </a:ln>
           <a:effectLst/>
@@ -7895,14 +9136,14 @@
       </p:sp>
       <p:sp>
         <p:nvSpPr>
-          <p:cNvPr id="13" name="TextBox 12"/>
+          <p:cNvPr id="12" name="TextBox 11"/>
           <p:cNvSpPr txBox="1"/>
           <p:nvPr/>
         </p:nvSpPr>
         <p:spPr>
           <a:xfrm>
-            <a:off x="7498080" y="2907792"/>
-            <a:ext cx="1645920" cy="365760"/>
+            <a:off x="7198515" y="5760719"/>
+            <a:ext cx="4441797" cy="365760"/>
           </a:xfrm>
           <a:prstGeom prst="rect">
             <a:avLst/>
@@ -7921,217 +9162,13 @@
               </a:lnSpc>
             </a:pPr>
             <a:r>
-              <a:rPr sz="1600" b="1">
-                <a:solidFill>
-                  <a:srgbClr val="E8EEF6"/>
-                </a:solidFill>
-                <a:latin typeface="Segoe UI"/>
-              </a:rPr>
-              <a:t>0.854</a:t>
-            </a:r>
-          </a:p>
-        </p:txBody>
-      </p:sp>
-      <p:sp>
-        <p:nvSpPr>
-          <p:cNvPr id="14" name="TextBox 13"/>
-          <p:cNvSpPr txBox="1"/>
-          <p:nvPr/>
-        </p:nvSpPr>
-        <p:spPr>
-          <a:xfrm>
-            <a:off x="7498080" y="3291840"/>
-            <a:ext cx="1645920" cy="365760"/>
-          </a:xfrm>
-          <a:prstGeom prst="rect">
-            <a:avLst/>
-          </a:prstGeom>
-          <a:noFill/>
-        </p:spPr>
-        <p:txBody>
-          <a:bodyPr wrap="square" anchor="t" lIns="0" rIns="0" tIns="0" bIns="0">
-            <a:spAutoFit/>
-          </a:bodyPr>
-          <a:lstStyle/>
-          <a:p>
-            <a:pPr algn="l">
-              <a:lnSpc>
-                <a:spcPct val="110000"/>
-              </a:lnSpc>
-            </a:pPr>
-            <a:r>
-              <a:rPr sz="1200" b="0">
-                <a:solidFill>
-                  <a:srgbClr val="8C9DB5"/>
-                </a:solidFill>
-                <a:latin typeface="Segoe UI"/>
-              </a:rPr>
-              <a:t>F1 на новом районе</a:t>
-            </a:r>
-          </a:p>
-        </p:txBody>
-      </p:sp>
-      <p:sp>
-        <p:nvSpPr>
-          <p:cNvPr id="15" name="Rounded Rectangle 14"/>
-          <p:cNvSpPr/>
-          <p:nvPr/>
-        </p:nvSpPr>
-        <p:spPr>
-          <a:xfrm>
-            <a:off x="9509760" y="2743200"/>
-            <a:ext cx="2011680" cy="1005840"/>
-          </a:xfrm>
-          <a:prstGeom prst="roundRect">
-            <a:avLst>
-              <a:gd name="adj" fmla="val 8000"/>
-            </a:avLst>
-          </a:prstGeom>
-          <a:solidFill>
-            <a:srgbClr val="121C2E"/>
-          </a:solidFill>
-          <a:ln w="15875">
-            <a:solidFill>
-              <a:srgbClr val="24334A"/>
-            </a:solidFill>
-          </a:ln>
-          <a:effectLst/>
-        </p:spPr>
-        <p:style>
-          <a:lnRef idx="1">
-            <a:schemeClr val="accent1"/>
-          </a:lnRef>
-          <a:fillRef idx="3">
-            <a:schemeClr val="accent1"/>
-          </a:fillRef>
-          <a:effectRef idx="2">
-            <a:schemeClr val="accent1"/>
-          </a:effectRef>
-          <a:fontRef idx="minor">
-            <a:schemeClr val="lt1"/>
-          </a:fontRef>
-        </p:style>
-        <p:txBody>
-          <a:bodyPr rtlCol="0" anchor="ctr"/>
-          <a:lstStyle/>
-          <a:p>
-            <a:pPr algn="ctr"/>
-          </a:p>
-        </p:txBody>
-      </p:sp>
-      <p:sp>
-        <p:nvSpPr>
-          <p:cNvPr id="16" name="TextBox 15"/>
-          <p:cNvSpPr txBox="1"/>
-          <p:nvPr/>
-        </p:nvSpPr>
-        <p:spPr>
-          <a:xfrm>
-            <a:off x="9692640" y="2907792"/>
-            <a:ext cx="1645920" cy="365760"/>
-          </a:xfrm>
-          <a:prstGeom prst="rect">
-            <a:avLst/>
-          </a:prstGeom>
-          <a:noFill/>
-        </p:spPr>
-        <p:txBody>
-          <a:bodyPr wrap="square" anchor="t" lIns="0" rIns="0" tIns="0" bIns="0">
-            <a:spAutoFit/>
-          </a:bodyPr>
-          <a:lstStyle/>
-          <a:p>
-            <a:pPr algn="l">
-              <a:lnSpc>
-                <a:spcPct val="110000"/>
-              </a:lnSpc>
-            </a:pPr>
-            <a:r>
-              <a:rPr sz="1600" b="1">
-                <a:solidFill>
-                  <a:srgbClr val="E8EEF6"/>
-                </a:solidFill>
-                <a:latin typeface="Segoe UI"/>
-              </a:rPr>
-              <a:t>0.80</a:t>
-            </a:r>
-          </a:p>
-        </p:txBody>
-      </p:sp>
-      <p:sp>
-        <p:nvSpPr>
-          <p:cNvPr id="17" name="TextBox 16"/>
-          <p:cNvSpPr txBox="1"/>
-          <p:nvPr/>
-        </p:nvSpPr>
-        <p:spPr>
-          <a:xfrm>
-            <a:off x="9692640" y="3291840"/>
-            <a:ext cx="1645920" cy="365760"/>
-          </a:xfrm>
-          <a:prstGeom prst="rect">
-            <a:avLst/>
-          </a:prstGeom>
-          <a:noFill/>
-        </p:spPr>
-        <p:txBody>
-          <a:bodyPr wrap="square" anchor="t" lIns="0" rIns="0" tIns="0" bIns="0">
-            <a:spAutoFit/>
-          </a:bodyPr>
-          <a:lstStyle/>
-          <a:p>
-            <a:pPr algn="l">
-              <a:lnSpc>
-                <a:spcPct val="110000"/>
-              </a:lnSpc>
-            </a:pPr>
-            <a:r>
-              <a:rPr sz="1200" b="0">
-                <a:solidFill>
-                  <a:srgbClr val="8C9DB5"/>
-                </a:solidFill>
-                <a:latin typeface="Segoe UI"/>
-              </a:rPr>
-              <a:t>RF из статьи MARIDA, test</a:t>
-            </a:r>
-          </a:p>
-        </p:txBody>
-      </p:sp>
-      <p:sp>
-        <p:nvSpPr>
-          <p:cNvPr id="18" name="TextBox 17"/>
-          <p:cNvSpPr txBox="1"/>
-          <p:nvPr/>
-        </p:nvSpPr>
-        <p:spPr>
-          <a:xfrm>
-            <a:off x="5120640" y="4114800"/>
-            <a:ext cx="6492240" cy="1280160"/>
-          </a:xfrm>
-          <a:prstGeom prst="rect">
-            <a:avLst/>
-          </a:prstGeom>
-          <a:noFill/>
-        </p:spPr>
-        <p:txBody>
-          <a:bodyPr wrap="square" anchor="t" lIns="0" rIns="0" tIns="0" bIns="0">
-            <a:spAutoFit/>
-          </a:bodyPr>
-          <a:lstStyle/>
-          <a:p>
-            <a:pPr algn="l">
-              <a:lnSpc>
-                <a:spcPct val="125000"/>
-              </a:lnSpc>
-            </a:pPr>
-            <a:r>
               <a:rPr sz="1600" b="0">
                 <a:solidFill>
-                  <a:srgbClr val="8C9DB5"/>
-                </a:solidFill>
-                <a:latin typeface="Segoe UI"/>
-              </a:rPr>
-              <a:t>Выбор только по val, шум — 3 seed. Test посчитаем один раз на итоговой модели.</a:t>
+                  <a:srgbClr val="9AAAC0"/>
+                </a:solidFill>
+                <a:latin typeface="Segoe UI"/>
+              </a:rPr>
+              <a:t>Манильский залив: индекс по ячейкам H3</a:t>
             </a:r>
           </a:p>
         </p:txBody>
@@ -8170,14 +9207,14 @@
         </p:nvSpPr>
         <p:spPr>
           <a:xfrm>
-            <a:off x="548640" y="502920"/>
-            <a:ext cx="73152" cy="384048"/>
+            <a:off x="548640" y="457200"/>
+            <a:ext cx="73152" cy="329184"/>
           </a:xfrm>
           <a:prstGeom prst="rect">
             <a:avLst/>
           </a:prstGeom>
           <a:solidFill>
-            <a:srgbClr val="FF6B5A"/>
+            <a:srgbClr val="FF6B4A"/>
           </a:solidFill>
           <a:ln>
             <a:noFill/>
@@ -8214,8 +9251,8 @@
         </p:nvSpPr>
         <p:spPr>
           <a:xfrm>
-            <a:off x="777240" y="475488"/>
-            <a:ext cx="8229600" cy="274320"/>
+            <a:off x="777240" y="457200"/>
+            <a:ext cx="8229600" cy="320040"/>
           </a:xfrm>
           <a:prstGeom prst="rect">
             <a:avLst/>
@@ -8234,13 +9271,13 @@
               </a:lnSpc>
             </a:pPr>
             <a:r>
-              <a:rPr sz="1200" b="1">
-                <a:solidFill>
-                  <a:srgbClr val="8C9DB5"/>
-                </a:solidFill>
-                <a:latin typeface="Segoe UI"/>
-              </a:rPr>
-              <a:t>СРАВНЕНИЕ МОДЕЛЕЙ</a:t>
+              <a:rPr sz="1400" b="1">
+                <a:solidFill>
+                  <a:srgbClr val="9AAAC0"/>
+                </a:solidFill>
+                <a:latin typeface="Segoe UI"/>
+              </a:rPr>
+              <a:t>ЖИВАЯ КАРТА</a:t>
             </a:r>
           </a:p>
         </p:txBody>
@@ -8253,8 +9290,8 @@
         </p:nvSpPr>
         <p:spPr>
           <a:xfrm>
-            <a:off x="548640" y="960120"/>
-            <a:ext cx="11094415" cy="1188720"/>
+            <a:off x="548640" y="914400"/>
+            <a:ext cx="11094415" cy="1097280"/>
           </a:xfrm>
           <a:prstGeom prst="rect">
             <a:avLst/>
@@ -8273,13 +9310,13 @@
               </a:lnSpc>
             </a:pPr>
             <a:r>
-              <a:rPr sz="3200" b="1">
+              <a:rPr sz="3000" b="1">
                 <a:solidFill>
                   <a:srgbClr val="E8EEF6"/>
                 </a:solidFill>
                 <a:latin typeface="Segoe UI"/>
               </a:rPr>
-              <a:t>MADOS принят, UNet и стек отклонены по одному правилу</a:t>
+              <a:t>12 районов, 29 дат: карта показывает, где искать первым</a:t>
             </a:r>
           </a:p>
         </p:txBody>
@@ -8292,7 +9329,7 @@
         </p:nvSpPr>
         <p:spPr>
           <a:xfrm>
-            <a:off x="10271455" y="6400800"/>
+            <a:off x="10271455" y="6446520"/>
             <a:ext cx="1371600" cy="274320"/>
           </a:xfrm>
           <a:prstGeom prst="rect">
@@ -8312,13 +9349,13 @@
               </a:lnSpc>
             </a:pPr>
             <a:r>
-              <a:rPr sz="1100" b="0">
-                <a:solidFill>
-                  <a:srgbClr val="8C9DB5"/>
-                </a:solidFill>
-                <a:latin typeface="Segoe UI"/>
-              </a:rPr>
-              <a:t>6 / 12</a:t>
+              <a:rPr sz="1200" b="0">
+                <a:solidFill>
+                  <a:srgbClr val="9AAAC0"/>
+                </a:solidFill>
+                <a:latin typeface="Segoe UI"/>
+              </a:rPr>
+              <a:t>6 / 10</a:t>
             </a:r>
           </a:p>
         </p:txBody>
@@ -8331,7 +9368,7 @@
         </p:nvSpPr>
         <p:spPr>
           <a:xfrm>
-            <a:off x="548640" y="6400800"/>
+            <a:off x="548640" y="6446520"/>
             <a:ext cx="7315200" cy="274320"/>
           </a:xfrm>
           <a:prstGeom prst="rect">
@@ -8351,39 +9388,59 @@
               </a:lnSpc>
             </a:pPr>
             <a:r>
-              <a:rPr sz="1100" b="0">
-                <a:solidFill>
-                  <a:srgbClr val="8C9DB5"/>
-                </a:solidFill>
-                <a:latin typeface="Segoe UI"/>
-              </a:rPr>
-              <a:t>Макропластик · Sentinel-2</a:t>
-            </a:r>
-          </a:p>
-        </p:txBody>
-      </p:sp>
-      <p:sp>
-        <p:nvSpPr>
-          <p:cNvPr id="7" name="Rounded Rectangle 6"/>
+              <a:rPr sz="1200" b="0">
+                <a:solidFill>
+                  <a:srgbClr val="9AAAC0"/>
+                </a:solidFill>
+                <a:latin typeface="Segoe UI"/>
+              </a:rPr>
+              <a:t>Морской мусор · Sentinel-2</a:t>
+            </a:r>
+          </a:p>
+        </p:txBody>
+      </p:sp>
+      <p:pic>
+        <p:nvPicPr>
+          <p:cNvPr id="7" name="Picture 6" descr="image.png"/>
+          <p:cNvPicPr>
+            <a:picLocks noChangeAspect="1"/>
+          </p:cNvPicPr>
+          <p:nvPr/>
+        </p:nvPicPr>
+        <p:blipFill>
+          <a:blip r:embed="rId2"/>
+          <a:stretch>
+            <a:fillRect/>
+          </a:stretch>
+        </p:blipFill>
+        <p:spPr>
+          <a:xfrm>
+            <a:off x="548640" y="1938814"/>
+            <a:ext cx="7086600" cy="3986212"/>
+          </a:xfrm>
+          <a:prstGeom prst="rect">
+            <a:avLst/>
+          </a:prstGeom>
+        </p:spPr>
+      </p:pic>
+      <p:sp>
+        <p:nvSpPr>
+          <p:cNvPr id="8" name="Rectangle 7"/>
           <p:cNvSpPr/>
           <p:nvPr/>
         </p:nvSpPr>
         <p:spPr>
           <a:xfrm>
-            <a:off x="548640" y="2743200"/>
-            <a:ext cx="2606040" cy="1188720"/>
-          </a:xfrm>
-          <a:prstGeom prst="roundRect">
-            <a:avLst>
-              <a:gd name="adj" fmla="val 8000"/>
-            </a:avLst>
-          </a:prstGeom>
-          <a:solidFill>
-            <a:srgbClr val="121C2E"/>
-          </a:solidFill>
-          <a:ln w="15875">
+            <a:off x="548640" y="1938814"/>
+            <a:ext cx="7086600" cy="3986212"/>
+          </a:xfrm>
+          <a:prstGeom prst="rect">
+            <a:avLst/>
+          </a:prstGeom>
+          <a:noFill/>
+          <a:ln w="19050">
             <a:solidFill>
-              <a:srgbClr val="24334A"/>
+              <a:srgbClr val="2A3A55"/>
             </a:solidFill>
           </a:ln>
           <a:effectLst/>
@@ -8412,14 +9469,14 @@
       </p:sp>
       <p:sp>
         <p:nvSpPr>
-          <p:cNvPr id="8" name="TextBox 7"/>
+          <p:cNvPr id="9" name="TextBox 8"/>
           <p:cNvSpPr txBox="1"/>
           <p:nvPr/>
         </p:nvSpPr>
         <p:spPr>
           <a:xfrm>
-            <a:off x="731520" y="2907792"/>
-            <a:ext cx="2240280" cy="365760"/>
+            <a:off x="548640" y="6016466"/>
+            <a:ext cx="7086600" cy="365760"/>
           </a:xfrm>
           <a:prstGeom prst="rect">
             <a:avLst/>
@@ -8438,78 +9495,59 @@
               </a:lnSpc>
             </a:pPr>
             <a:r>
-              <a:rPr sz="2800" b="1">
-                <a:solidFill>
-                  <a:srgbClr val="E8EEF6"/>
-                </a:solidFill>
-                <a:latin typeface="Segoe UI"/>
-              </a:rPr>
-              <a:t>0.906</a:t>
-            </a:r>
-          </a:p>
-        </p:txBody>
-      </p:sp>
-      <p:sp>
-        <p:nvSpPr>
-          <p:cNvPr id="9" name="TextBox 8"/>
-          <p:cNvSpPr txBox="1"/>
-          <p:nvPr/>
-        </p:nvSpPr>
-        <p:spPr>
-          <a:xfrm>
-            <a:off x="731520" y="3291840"/>
-            <a:ext cx="2240280" cy="365760"/>
-          </a:xfrm>
-          <a:prstGeom prst="rect">
-            <a:avLst/>
-          </a:prstGeom>
-          <a:noFill/>
-        </p:spPr>
-        <p:txBody>
-          <a:bodyPr wrap="square" anchor="t" lIns="0" rIns="0" tIns="0" bIns="0">
-            <a:spAutoFit/>
-          </a:bodyPr>
-          <a:lstStyle/>
-          <a:p>
-            <a:pPr algn="l">
-              <a:lnSpc>
-                <a:spcPct val="110000"/>
-              </a:lnSpc>
-            </a:pPr>
-            <a:r>
-              <a:rPr sz="1200" b="0">
-                <a:solidFill>
-                  <a:srgbClr val="8C9DB5"/>
-                </a:solidFill>
-                <a:latin typeface="Segoe UI"/>
-              </a:rPr>
-              <a:t>только MARIDA · ±0.0025</a:t>
-            </a:r>
-          </a:p>
-        </p:txBody>
-      </p:sp>
-      <p:sp>
-        <p:nvSpPr>
-          <p:cNvPr id="10" name="Rounded Rectangle 9"/>
+              <a:rPr sz="1600" b="0">
+                <a:solidFill>
+                  <a:srgbClr val="9AAAC0"/>
+                </a:solidFill>
+                <a:latin typeface="Segoe UI"/>
+              </a:rPr>
+              <a:t>Обзор: рейтинг «где искать первым»</a:t>
+            </a:r>
+          </a:p>
+        </p:txBody>
+      </p:sp>
+      <p:pic>
+        <p:nvPicPr>
+          <p:cNvPr id="10" name="Picture 9" descr="image.png"/>
+          <p:cNvPicPr>
+            <a:picLocks noChangeAspect="1"/>
+          </p:cNvPicPr>
+          <p:nvPr/>
+        </p:nvPicPr>
+        <p:blipFill>
+          <a:blip r:embed="rId3"/>
+          <a:stretch>
+            <a:fillRect/>
+          </a:stretch>
+        </p:blipFill>
+        <p:spPr>
+          <a:xfrm>
+            <a:off x="7844079" y="1920240"/>
+            <a:ext cx="3773017" cy="4023360"/>
+          </a:xfrm>
+          <a:prstGeom prst="rect">
+            <a:avLst/>
+          </a:prstGeom>
+        </p:spPr>
+      </p:pic>
+      <p:sp>
+        <p:nvSpPr>
+          <p:cNvPr id="11" name="Rectangle 10"/>
           <p:cNvSpPr/>
           <p:nvPr/>
         </p:nvSpPr>
         <p:spPr>
           <a:xfrm>
-            <a:off x="3337560" y="2743200"/>
-            <a:ext cx="2606040" cy="1188720"/>
-          </a:xfrm>
-          <a:prstGeom prst="roundRect">
-            <a:avLst>
-              <a:gd name="adj" fmla="val 8000"/>
-            </a:avLst>
-          </a:prstGeom>
-          <a:solidFill>
-            <a:srgbClr val="121C2E"/>
-          </a:solidFill>
-          <a:ln w="15875">
+            <a:off x="7844079" y="1920240"/>
+            <a:ext cx="3773017" cy="4023360"/>
+          </a:xfrm>
+          <a:prstGeom prst="rect">
+            <a:avLst/>
+          </a:prstGeom>
+          <a:noFill/>
+          <a:ln w="19050">
             <a:solidFill>
-              <a:srgbClr val="FF6B5A"/>
+              <a:srgbClr val="2A3A55"/>
             </a:solidFill>
           </a:ln>
           <a:effectLst/>
@@ -8538,14 +9576,14 @@
       </p:sp>
       <p:sp>
         <p:nvSpPr>
-          <p:cNvPr id="11" name="TextBox 10"/>
+          <p:cNvPr id="12" name="TextBox 11"/>
           <p:cNvSpPr txBox="1"/>
           <p:nvPr/>
         </p:nvSpPr>
         <p:spPr>
           <a:xfrm>
-            <a:off x="3520440" y="2907792"/>
-            <a:ext cx="2240280" cy="365760"/>
+            <a:off x="7844079" y="6035040"/>
+            <a:ext cx="3798976" cy="365760"/>
           </a:xfrm>
           <a:prstGeom prst="rect">
             <a:avLst/>
@@ -8564,343 +9602,13 @@
               </a:lnSpc>
             </a:pPr>
             <a:r>
-              <a:rPr sz="2800" b="1">
-                <a:solidFill>
-                  <a:srgbClr val="E8EEF6"/>
-                </a:solidFill>
-                <a:latin typeface="Segoe UI"/>
-              </a:rPr>
-              <a:t>0.923</a:t>
-            </a:r>
-          </a:p>
-        </p:txBody>
-      </p:sp>
-      <p:sp>
-        <p:nvSpPr>
-          <p:cNvPr id="12" name="TextBox 11"/>
-          <p:cNvSpPr txBox="1"/>
-          <p:nvPr/>
-        </p:nvSpPr>
-        <p:spPr>
-          <a:xfrm>
-            <a:off x="3520440" y="3291840"/>
-            <a:ext cx="2240280" cy="365760"/>
-          </a:xfrm>
-          <a:prstGeom prst="rect">
-            <a:avLst/>
-          </a:prstGeom>
-          <a:noFill/>
-        </p:spPr>
-        <p:txBody>
-          <a:bodyPr wrap="square" anchor="t" lIns="0" rIns="0" tIns="0" bIns="0">
-            <a:spAutoFit/>
-          </a:bodyPr>
-          <a:lstStyle/>
-          <a:p>
-            <a:pPr algn="l">
-              <a:lnSpc>
-                <a:spcPct val="110000"/>
-              </a:lnSpc>
-            </a:pPr>
-            <a:r>
-              <a:rPr sz="1200" b="0">
-                <a:solidFill>
-                  <a:srgbClr val="8C9DB5"/>
-                </a:solidFill>
-                <a:latin typeface="Segoe UI"/>
-              </a:rPr>
-              <a:t>MARIDA + MADOS · ±0.0005</a:t>
-            </a:r>
-          </a:p>
-        </p:txBody>
-      </p:sp>
-      <p:sp>
-        <p:nvSpPr>
-          <p:cNvPr id="13" name="Rounded Rectangle 12"/>
-          <p:cNvSpPr/>
-          <p:nvPr/>
-        </p:nvSpPr>
-        <p:spPr>
-          <a:xfrm>
-            <a:off x="6126480" y="2743200"/>
-            <a:ext cx="2606040" cy="1188720"/>
-          </a:xfrm>
-          <a:prstGeom prst="roundRect">
-            <a:avLst>
-              <a:gd name="adj" fmla="val 8000"/>
-            </a:avLst>
-          </a:prstGeom>
-          <a:solidFill>
-            <a:srgbClr val="121C2E"/>
-          </a:solidFill>
-          <a:ln w="15875">
-            <a:solidFill>
-              <a:srgbClr val="24334A"/>
-            </a:solidFill>
-          </a:ln>
-          <a:effectLst/>
-        </p:spPr>
-        <p:style>
-          <a:lnRef idx="1">
-            <a:schemeClr val="accent1"/>
-          </a:lnRef>
-          <a:fillRef idx="3">
-            <a:schemeClr val="accent1"/>
-          </a:fillRef>
-          <a:effectRef idx="2">
-            <a:schemeClr val="accent1"/>
-          </a:effectRef>
-          <a:fontRef idx="minor">
-            <a:schemeClr val="lt1"/>
-          </a:fontRef>
-        </p:style>
-        <p:txBody>
-          <a:bodyPr rtlCol="0" anchor="ctr"/>
-          <a:lstStyle/>
-          <a:p>
-            <a:pPr algn="ctr"/>
-          </a:p>
-        </p:txBody>
-      </p:sp>
-      <p:sp>
-        <p:nvSpPr>
-          <p:cNvPr id="14" name="TextBox 13"/>
-          <p:cNvSpPr txBox="1"/>
-          <p:nvPr/>
-        </p:nvSpPr>
-        <p:spPr>
-          <a:xfrm>
-            <a:off x="6309360" y="2907792"/>
-            <a:ext cx="2240280" cy="365760"/>
-          </a:xfrm>
-          <a:prstGeom prst="rect">
-            <a:avLst/>
-          </a:prstGeom>
-          <a:noFill/>
-        </p:spPr>
-        <p:txBody>
-          <a:bodyPr wrap="square" anchor="t" lIns="0" rIns="0" tIns="0" bIns="0">
-            <a:spAutoFit/>
-          </a:bodyPr>
-          <a:lstStyle/>
-          <a:p>
-            <a:pPr algn="l">
-              <a:lnSpc>
-                <a:spcPct val="110000"/>
-              </a:lnSpc>
-            </a:pPr>
-            <a:r>
-              <a:rPr sz="2800" b="1">
-                <a:solidFill>
-                  <a:srgbClr val="E8EEF6"/>
-                </a:solidFill>
-                <a:latin typeface="Segoe UI"/>
-              </a:rPr>
-              <a:t>0.891</a:t>
-            </a:r>
-          </a:p>
-        </p:txBody>
-      </p:sp>
-      <p:sp>
-        <p:nvSpPr>
-          <p:cNvPr id="15" name="TextBox 14"/>
-          <p:cNvSpPr txBox="1"/>
-          <p:nvPr/>
-        </p:nvSpPr>
-        <p:spPr>
-          <a:xfrm>
-            <a:off x="6309360" y="3291840"/>
-            <a:ext cx="2240280" cy="365760"/>
-          </a:xfrm>
-          <a:prstGeom prst="rect">
-            <a:avLst/>
-          </a:prstGeom>
-          <a:noFill/>
-        </p:spPr>
-        <p:txBody>
-          <a:bodyPr wrap="square" anchor="t" lIns="0" rIns="0" tIns="0" bIns="0">
-            <a:spAutoFit/>
-          </a:bodyPr>
-          <a:lstStyle/>
-          <a:p>
-            <a:pPr algn="l">
-              <a:lnSpc>
-                <a:spcPct val="110000"/>
-              </a:lnSpc>
-            </a:pPr>
-            <a:r>
-              <a:rPr sz="1200" b="0">
-                <a:solidFill>
-                  <a:srgbClr val="8C9DB5"/>
-                </a:solidFill>
-                <a:latin typeface="Segoe UI"/>
-              </a:rPr>
-              <a:t>UNet · ±0.0061</a:t>
-            </a:r>
-          </a:p>
-        </p:txBody>
-      </p:sp>
-      <p:sp>
-        <p:nvSpPr>
-          <p:cNvPr id="16" name="Rounded Rectangle 15"/>
-          <p:cNvSpPr/>
-          <p:nvPr/>
-        </p:nvSpPr>
-        <p:spPr>
-          <a:xfrm>
-            <a:off x="8915400" y="2743200"/>
-            <a:ext cx="2606040" cy="1188720"/>
-          </a:xfrm>
-          <a:prstGeom prst="roundRect">
-            <a:avLst>
-              <a:gd name="adj" fmla="val 8000"/>
-            </a:avLst>
-          </a:prstGeom>
-          <a:solidFill>
-            <a:srgbClr val="121C2E"/>
-          </a:solidFill>
-          <a:ln w="15875">
-            <a:solidFill>
-              <a:srgbClr val="24334A"/>
-            </a:solidFill>
-          </a:ln>
-          <a:effectLst/>
-        </p:spPr>
-        <p:style>
-          <a:lnRef idx="1">
-            <a:schemeClr val="accent1"/>
-          </a:lnRef>
-          <a:fillRef idx="3">
-            <a:schemeClr val="accent1"/>
-          </a:fillRef>
-          <a:effectRef idx="2">
-            <a:schemeClr val="accent1"/>
-          </a:effectRef>
-          <a:fontRef idx="minor">
-            <a:schemeClr val="lt1"/>
-          </a:fontRef>
-        </p:style>
-        <p:txBody>
-          <a:bodyPr rtlCol="0" anchor="ctr"/>
-          <a:lstStyle/>
-          <a:p>
-            <a:pPr algn="ctr"/>
-          </a:p>
-        </p:txBody>
-      </p:sp>
-      <p:sp>
-        <p:nvSpPr>
-          <p:cNvPr id="17" name="TextBox 16"/>
-          <p:cNvSpPr txBox="1"/>
-          <p:nvPr/>
-        </p:nvSpPr>
-        <p:spPr>
-          <a:xfrm>
-            <a:off x="9098280" y="2907792"/>
-            <a:ext cx="2240280" cy="365760"/>
-          </a:xfrm>
-          <a:prstGeom prst="rect">
-            <a:avLst/>
-          </a:prstGeom>
-          <a:noFill/>
-        </p:spPr>
-        <p:txBody>
-          <a:bodyPr wrap="square" anchor="t" lIns="0" rIns="0" tIns="0" bIns="0">
-            <a:spAutoFit/>
-          </a:bodyPr>
-          <a:lstStyle/>
-          <a:p>
-            <a:pPr algn="l">
-              <a:lnSpc>
-                <a:spcPct val="110000"/>
-              </a:lnSpc>
-            </a:pPr>
-            <a:r>
-              <a:rPr sz="2800" b="1">
-                <a:solidFill>
-                  <a:srgbClr val="E8EEF6"/>
-                </a:solidFill>
-                <a:latin typeface="Segoe UI"/>
-              </a:rPr>
-              <a:t>0.916</a:t>
-            </a:r>
-          </a:p>
-        </p:txBody>
-      </p:sp>
-      <p:sp>
-        <p:nvSpPr>
-          <p:cNvPr id="18" name="TextBox 17"/>
-          <p:cNvSpPr txBox="1"/>
-          <p:nvPr/>
-        </p:nvSpPr>
-        <p:spPr>
-          <a:xfrm>
-            <a:off x="9098280" y="3291840"/>
-            <a:ext cx="2240280" cy="365760"/>
-          </a:xfrm>
-          <a:prstGeom prst="rect">
-            <a:avLst/>
-          </a:prstGeom>
-          <a:noFill/>
-        </p:spPr>
-        <p:txBody>
-          <a:bodyPr wrap="square" anchor="t" lIns="0" rIns="0" tIns="0" bIns="0">
-            <a:spAutoFit/>
-          </a:bodyPr>
-          <a:lstStyle/>
-          <a:p>
-            <a:pPr algn="l">
-              <a:lnSpc>
-                <a:spcPct val="110000"/>
-              </a:lnSpc>
-            </a:pPr>
-            <a:r>
-              <a:rPr sz="1200" b="0">
-                <a:solidFill>
-                  <a:srgbClr val="8C9DB5"/>
-                </a:solidFill>
-                <a:latin typeface="Segoe UI"/>
-              </a:rPr>
-              <a:t>стек UNet + LGBM · ±0.0015</a:t>
-            </a:r>
-          </a:p>
-        </p:txBody>
-      </p:sp>
-      <p:sp>
-        <p:nvSpPr>
-          <p:cNvPr id="19" name="TextBox 18"/>
-          <p:cNvSpPr txBox="1"/>
-          <p:nvPr/>
-        </p:nvSpPr>
-        <p:spPr>
-          <a:xfrm>
-            <a:off x="548640" y="4297680"/>
-            <a:ext cx="11094415" cy="1097280"/>
-          </a:xfrm>
-          <a:prstGeom prst="rect">
-            <a:avLst/>
-          </a:prstGeom>
-          <a:noFill/>
-        </p:spPr>
-        <p:txBody>
-          <a:bodyPr wrap="square" anchor="t" lIns="0" rIns="0" tIns="0" bIns="0">
-            <a:spAutoFit/>
-          </a:bodyPr>
-          <a:lstStyle/>
-          <a:p>
-            <a:pPr algn="l">
-              <a:lnSpc>
-                <a:spcPct val="125000"/>
-              </a:lnSpc>
-            </a:pPr>
-            <a:r>
               <a:rPr sz="1600" b="0">
                 <a:solidFill>
-                  <a:srgbClr val="8C9DB5"/>
-                </a:solidFill>
-                <a:latin typeface="Segoe UI"/>
-              </a:rPr>
-              <a:t>F1 Marine Debris на val, 3 seed. Принимаем, если прирост ≥ max(0.01, 2×std).</a:t>
+                  <a:srgbClr val="9AAAC0"/>
+                </a:solidFill>
+                <a:latin typeface="Segoe UI"/>
+              </a:rPr>
+              <a:t>Карточка находки</a:t>
             </a:r>
           </a:p>
         </p:txBody>
@@ -8939,14 +9647,14 @@
         </p:nvSpPr>
         <p:spPr>
           <a:xfrm>
-            <a:off x="548640" y="502920"/>
-            <a:ext cx="73152" cy="384048"/>
+            <a:off x="548640" y="457200"/>
+            <a:ext cx="73152" cy="329184"/>
           </a:xfrm>
           <a:prstGeom prst="rect">
             <a:avLst/>
           </a:prstGeom>
           <a:solidFill>
-            <a:srgbClr val="FF6B5A"/>
+            <a:srgbClr val="FF6B4A"/>
           </a:solidFill>
           <a:ln>
             <a:noFill/>
@@ -8983,8 +9691,8 @@
         </p:nvSpPr>
         <p:spPr>
           <a:xfrm>
-            <a:off x="777240" y="475488"/>
-            <a:ext cx="8229600" cy="274320"/>
+            <a:off x="777240" y="457200"/>
+            <a:ext cx="8229600" cy="320040"/>
           </a:xfrm>
           <a:prstGeom prst="rect">
             <a:avLst/>
@@ -9003,13 +9711,13 @@
               </a:lnSpc>
             </a:pPr>
             <a:r>
-              <a:rPr sz="1200" b="1">
-                <a:solidFill>
-                  <a:srgbClr val="8C9DB5"/>
-                </a:solidFill>
-                <a:latin typeface="Segoe UI"/>
-              </a:rPr>
-              <a:t>ДЕМО</a:t>
+              <a:rPr sz="1400" b="1">
+                <a:solidFill>
+                  <a:srgbClr val="9AAAC0"/>
+                </a:solidFill>
+                <a:latin typeface="Segoe UI"/>
+              </a:rPr>
+              <a:t>ЗОНЫ ОБСЛЕДОВАНИЯ</a:t>
             </a:r>
           </a:p>
         </p:txBody>
@@ -9022,8 +9730,8 @@
         </p:nvSpPr>
         <p:spPr>
           <a:xfrm>
-            <a:off x="548640" y="960120"/>
-            <a:ext cx="11094415" cy="1188720"/>
+            <a:off x="548640" y="914400"/>
+            <a:ext cx="11094415" cy="1097280"/>
           </a:xfrm>
           <a:prstGeom prst="rect">
             <a:avLst/>
@@ -9042,13 +9750,13 @@
               </a:lnSpc>
             </a:pPr>
             <a:r>
-              <a:rPr sz="3200" b="1">
+              <a:rPr sz="3000" b="1">
                 <a:solidFill>
                   <a:srgbClr val="E8EEF6"/>
                 </a:solidFill>
                 <a:latin typeface="Segoe UI"/>
               </a:rPr>
-              <a:t>Живая карта: снимок, находки и зоны на одном экране</a:t>
+              <a:t>Зона №1 объясняет, почему она первая; двойное кольцо — видят обе модели</a:t>
             </a:r>
           </a:p>
         </p:txBody>
@@ -9061,7 +9769,7 @@
         </p:nvSpPr>
         <p:spPr>
           <a:xfrm>
-            <a:off x="10271455" y="6400800"/>
+            <a:off x="10271455" y="6446520"/>
             <a:ext cx="1371600" cy="274320"/>
           </a:xfrm>
           <a:prstGeom prst="rect">
@@ -9081,13 +9789,13 @@
               </a:lnSpc>
             </a:pPr>
             <a:r>
-              <a:rPr sz="1100" b="0">
-                <a:solidFill>
-                  <a:srgbClr val="8C9DB5"/>
-                </a:solidFill>
-                <a:latin typeface="Segoe UI"/>
-              </a:rPr>
-              <a:t>7 / 12</a:t>
+              <a:rPr sz="1200" b="0">
+                <a:solidFill>
+                  <a:srgbClr val="9AAAC0"/>
+                </a:solidFill>
+                <a:latin typeface="Segoe UI"/>
+              </a:rPr>
+              <a:t>7 / 10</a:t>
             </a:r>
           </a:p>
         </p:txBody>
@@ -9100,7 +9808,7 @@
         </p:nvSpPr>
         <p:spPr>
           <a:xfrm>
-            <a:off x="548640" y="6400800"/>
+            <a:off x="548640" y="6446520"/>
             <a:ext cx="7315200" cy="274320"/>
           </a:xfrm>
           <a:prstGeom prst="rect">
@@ -9120,20 +9828,20 @@
               </a:lnSpc>
             </a:pPr>
             <a:r>
-              <a:rPr sz="1100" b="0">
-                <a:solidFill>
-                  <a:srgbClr val="8C9DB5"/>
-                </a:solidFill>
-                <a:latin typeface="Segoe UI"/>
-              </a:rPr>
-              <a:t>Макропластик · Sentinel-2</a:t>
+              <a:rPr sz="1200" b="0">
+                <a:solidFill>
+                  <a:srgbClr val="9AAAC0"/>
+                </a:solidFill>
+                <a:latin typeface="Segoe UI"/>
+              </a:rPr>
+              <a:t>Морской мусор · Sentinel-2</a:t>
             </a:r>
           </a:p>
         </p:txBody>
       </p:sp>
       <p:pic>
         <p:nvPicPr>
-          <p:cNvPr id="7" name="Picture 6" descr="region.jpg"/>
+          <p:cNvPr id="7" name="Picture 6" descr="image.png"/>
           <p:cNvPicPr>
             <a:picLocks noChangeAspect="1"/>
           </p:cNvPicPr>
@@ -9147,8 +9855,8 @@
         </p:blipFill>
         <p:spPr>
           <a:xfrm>
-            <a:off x="1148081" y="2514600"/>
-            <a:ext cx="6664958" cy="3749039"/>
+            <a:off x="548640" y="2103120"/>
+            <a:ext cx="3745734" cy="3886200"/>
           </a:xfrm>
           <a:prstGeom prst="rect">
             <a:avLst/>
@@ -9163,17 +9871,17 @@
         </p:nvSpPr>
         <p:spPr>
           <a:xfrm>
-            <a:off x="1148081" y="5852159"/>
-            <a:ext cx="6664958" cy="411480"/>
-          </a:xfrm>
-          <a:prstGeom prst="rect">
-            <a:avLst/>
-          </a:prstGeom>
-          <a:solidFill>
-            <a:srgbClr val="0A111F"/>
-          </a:solidFill>
-          <a:ln>
-            <a:noFill/>
+            <a:off x="548640" y="2103120"/>
+            <a:ext cx="3745734" cy="3886200"/>
+          </a:xfrm>
+          <a:prstGeom prst="rect">
+            <a:avLst/>
+          </a:prstGeom>
+          <a:noFill/>
+          <a:ln w="19050">
+            <a:solidFill>
+              <a:srgbClr val="2A3A55"/>
+            </a:solidFill>
           </a:ln>
           <a:effectLst/>
         </p:spPr>
@@ -9207,8 +9915,8 @@
         </p:nvSpPr>
         <p:spPr>
           <a:xfrm>
-            <a:off x="1285241" y="5916167"/>
-            <a:ext cx="6390638" cy="274320"/>
+            <a:off x="548640" y="6080760"/>
+            <a:ext cx="5120640" cy="365760"/>
           </a:xfrm>
           <a:prstGeom prst="rect">
             <a:avLst/>
@@ -9227,13 +9935,13 @@
               </a:lnSpc>
             </a:pPr>
             <a:r>
-              <a:rPr sz="1300" b="0">
-                <a:solidFill>
-                  <a:srgbClr val="E8EEF6"/>
-                </a:solidFill>
-                <a:latin typeface="Segoe UI"/>
-              </a:rPr>
-              <a:t>Снимок + находки модели</a:t>
+              <a:rPr sz="1600" b="0">
+                <a:solidFill>
+                  <a:srgbClr val="9AAAC0"/>
+                </a:solidFill>
+                <a:latin typeface="Segoe UI"/>
+              </a:rPr>
+              <a:t>Зона №1: «почему это место первое»</a:t>
             </a:r>
           </a:p>
         </p:txBody>
@@ -9246,8 +9954,8 @@
         </p:nvSpPr>
         <p:spPr>
           <a:xfrm>
-            <a:off x="8778240" y="2743200"/>
-            <a:ext cx="2926080" cy="1463040"/>
+            <a:off x="5029200" y="2331720"/>
+            <a:ext cx="6583680" cy="1280160"/>
           </a:xfrm>
           <a:prstGeom prst="rect">
             <a:avLst/>
@@ -9268,11 +9976,11 @@
             <a:r>
               <a:rPr sz="8800" b="1">
                 <a:solidFill>
-                  <a:srgbClr val="FF6B5A"/>
-                </a:solidFill>
-                <a:latin typeface="Segoe UI"/>
-              </a:rPr>
-              <a:t>12</a:t>
+                  <a:srgbClr val="FF6B4A"/>
+                </a:solidFill>
+                <a:latin typeface="Segoe UI"/>
+              </a:rPr>
+              <a:t>200</a:t>
             </a:r>
           </a:p>
         </p:txBody>
@@ -9285,8 +9993,8 @@
         </p:nvSpPr>
         <p:spPr>
           <a:xfrm>
-            <a:off x="8778240" y="4251960"/>
-            <a:ext cx="2926080" cy="822960"/>
+            <a:off x="5029200" y="3703320"/>
+            <a:ext cx="6583680" cy="1463040"/>
           </a:xfrm>
           <a:prstGeom prst="rect">
             <a:avLst/>
@@ -9301,33 +10009,49 @@
           <a:p>
             <a:pPr algn="l">
               <a:lnSpc>
-                <a:spcPct val="110000"/>
-              </a:lnSpc>
-            </a:pPr>
-            <a:r>
-              <a:rPr sz="1800" b="0">
-                <a:solidFill>
-                  <a:srgbClr val="8C9DB5"/>
-                </a:solidFill>
-                <a:latin typeface="Segoe UI"/>
-              </a:rPr>
-              <a:t>районов, 29 дат</a:t>
-            </a:r>
-          </a:p>
-          <a:p>
-            <a:pPr algn="l">
-              <a:lnSpc>
-                <a:spcPct val="110000"/>
-              </a:lnSpc>
-            </a:pPr>
-            <a:r>
-              <a:rPr sz="1800" b="0">
-                <a:solidFill>
-                  <a:srgbClr val="8C9DB5"/>
-                </a:solidFill>
-                <a:latin typeface="Segoe UI"/>
-              </a:rPr>
-              <a:t>сцен Sentinel-2 L2A</a:t>
+                <a:spcPct val="115000"/>
+              </a:lnSpc>
+            </a:pPr>
+            <a:r>
+              <a:rPr sz="2000" b="0">
+                <a:solidFill>
+                  <a:srgbClr val="9AAAC0"/>
+                </a:solidFill>
+                <a:latin typeface="Segoe UI"/>
+              </a:rPr>
+              <a:t>объектов видят обе модели в радиусе 20 м</a:t>
+            </a:r>
+          </a:p>
+          <a:p>
+            <a:pPr algn="l">
+              <a:lnSpc>
+                <a:spcPct val="115000"/>
+              </a:lnSpc>
+            </a:pPr>
+            <a:r>
+              <a:rPr sz="2000" b="0">
+                <a:solidFill>
+                  <a:srgbClr val="9AAAC0"/>
+                </a:solidFill>
+                <a:latin typeface="Segoe UI"/>
+              </a:rPr>
+              <a:t>(15 из 29 снимков)</a:t>
+            </a:r>
+          </a:p>
+          <a:p>
+            <a:pPr algn="l">
+              <a:lnSpc>
+                <a:spcPct val="115000"/>
+              </a:lnSpc>
+            </a:pPr>
+            <a:r>
+              <a:rPr sz="2000" b="0">
+                <a:solidFill>
+                  <a:srgbClr val="9AAAC0"/>
+                </a:solidFill>
+                <a:latin typeface="Segoe UI"/>
+              </a:rPr>
+              <a:t>Это согласие моделей, не проверка на месте</a:t>
             </a:r>
           </a:p>
         </p:txBody>
@@ -9366,14 +10090,14 @@
         </p:nvSpPr>
         <p:spPr>
           <a:xfrm>
-            <a:off x="548640" y="502920"/>
-            <a:ext cx="73152" cy="384048"/>
+            <a:off x="548640" y="457200"/>
+            <a:ext cx="73152" cy="329184"/>
           </a:xfrm>
           <a:prstGeom prst="rect">
             <a:avLst/>
           </a:prstGeom>
           <a:solidFill>
-            <a:srgbClr val="FF6B5A"/>
+            <a:srgbClr val="FF6B4A"/>
           </a:solidFill>
           <a:ln>
             <a:noFill/>
@@ -9410,8 +10134,8 @@
         </p:nvSpPr>
         <p:spPr>
           <a:xfrm>
-            <a:off x="777240" y="475488"/>
-            <a:ext cx="8229600" cy="274320"/>
+            <a:off x="777240" y="457200"/>
+            <a:ext cx="8229600" cy="320040"/>
           </a:xfrm>
           <a:prstGeom prst="rect">
             <a:avLst/>
@@ -9430,13 +10154,13 @@
               </a:lnSpc>
             </a:pPr>
             <a:r>
-              <a:rPr sz="1200" b="1">
-                <a:solidFill>
-                  <a:srgbClr val="8C9DB5"/>
-                </a:solidFill>
-                <a:latin typeface="Segoe UI"/>
-              </a:rPr>
-              <a:t>ЗОНЫ И СРАВНЕНИЕ</a:t>
+              <a:rPr sz="1400" b="1">
+                <a:solidFill>
+                  <a:srgbClr val="9AAAC0"/>
+                </a:solidFill>
+                <a:latin typeface="Segoe UI"/>
+              </a:rPr>
+              <a:t>ДРЕЙФ</a:t>
             </a:r>
           </a:p>
         </p:txBody>
@@ -9449,8 +10173,8 @@
         </p:nvSpPr>
         <p:spPr>
           <a:xfrm>
-            <a:off x="548640" y="960120"/>
-            <a:ext cx="11094415" cy="1188720"/>
+            <a:off x="548640" y="914400"/>
+            <a:ext cx="11094415" cy="1097280"/>
           </a:xfrm>
           <a:prstGeom prst="rect">
             <a:avLst/>
@@ -9469,13 +10193,13 @@
               </a:lnSpc>
             </a:pPr>
             <a:r>
-              <a:rPr sz="3200" b="1">
+              <a:rPr sz="3000" b="1">
                 <a:solidFill>
                   <a:srgbClr val="E8EEF6"/>
                 </a:solidFill>
                 <a:latin typeface="Segoe UI"/>
               </a:rPr>
-              <a:t>Топ ячеек H3 — готовый список точек для выхода судна</a:t>
+              <a:t>Дрейф на 72 ч показывает, куда унесёт пятно — демонстрация без валидации</a:t>
             </a:r>
           </a:p>
         </p:txBody>
@@ -9488,7 +10212,7 @@
         </p:nvSpPr>
         <p:spPr>
           <a:xfrm>
-            <a:off x="10271455" y="6400800"/>
+            <a:off x="10271455" y="6446520"/>
             <a:ext cx="1371600" cy="274320"/>
           </a:xfrm>
           <a:prstGeom prst="rect">
@@ -9508,13 +10232,13 @@
               </a:lnSpc>
             </a:pPr>
             <a:r>
-              <a:rPr sz="1100" b="0">
-                <a:solidFill>
-                  <a:srgbClr val="8C9DB5"/>
-                </a:solidFill>
-                <a:latin typeface="Segoe UI"/>
-              </a:rPr>
-              <a:t>8 / 12</a:t>
+              <a:rPr sz="1200" b="0">
+                <a:solidFill>
+                  <a:srgbClr val="9AAAC0"/>
+                </a:solidFill>
+                <a:latin typeface="Segoe UI"/>
+              </a:rPr>
+              <a:t>8 / 10</a:t>
             </a:r>
           </a:p>
         </p:txBody>
@@ -9527,7 +10251,7 @@
         </p:nvSpPr>
         <p:spPr>
           <a:xfrm>
-            <a:off x="548640" y="6400800"/>
+            <a:off x="548640" y="6446520"/>
             <a:ext cx="7315200" cy="274320"/>
           </a:xfrm>
           <a:prstGeom prst="rect">
@@ -9547,20 +10271,20 @@
               </a:lnSpc>
             </a:pPr>
             <a:r>
-              <a:rPr sz="1100" b="0">
-                <a:solidFill>
-                  <a:srgbClr val="8C9DB5"/>
-                </a:solidFill>
-                <a:latin typeface="Segoe UI"/>
-              </a:rPr>
-              <a:t>Макропластик · Sentinel-2</a:t>
+              <a:rPr sz="1200" b="0">
+                <a:solidFill>
+                  <a:srgbClr val="9AAAC0"/>
+                </a:solidFill>
+                <a:latin typeface="Segoe UI"/>
+              </a:rPr>
+              <a:t>Морской мусор · Sentinel-2</a:t>
             </a:r>
           </a:p>
         </p:txBody>
       </p:sp>
       <p:pic>
         <p:nvPicPr>
-          <p:cNvPr id="7" name="Picture 6" descr="07_zones.png"/>
+          <p:cNvPr id="7" name="Picture 6" descr="image.png"/>
           <p:cNvPicPr>
             <a:picLocks noChangeAspect="1"/>
           </p:cNvPicPr>
@@ -9574,8 +10298,8 @@
         </p:blipFill>
         <p:spPr>
           <a:xfrm>
-            <a:off x="1148081" y="2514600"/>
-            <a:ext cx="6664958" cy="3749039"/>
+            <a:off x="548640" y="2103120"/>
+            <a:ext cx="3571102" cy="3886200"/>
           </a:xfrm>
           <a:prstGeom prst="rect">
             <a:avLst/>
@@ -9590,17 +10314,17 @@
         </p:nvSpPr>
         <p:spPr>
           <a:xfrm>
-            <a:off x="1148081" y="5852159"/>
-            <a:ext cx="6664958" cy="411480"/>
-          </a:xfrm>
-          <a:prstGeom prst="rect">
-            <a:avLst/>
-          </a:prstGeom>
-          <a:solidFill>
-            <a:srgbClr val="0A111F"/>
-          </a:solidFill>
-          <a:ln>
-            <a:noFill/>
+            <a:off x="548640" y="2103120"/>
+            <a:ext cx="3571102" cy="3886200"/>
+          </a:xfrm>
+          <a:prstGeom prst="rect">
+            <a:avLst/>
+          </a:prstGeom>
+          <a:noFill/>
+          <a:ln w="19050">
+            <a:solidFill>
+              <a:srgbClr val="2A3A55"/>
+            </a:solidFill>
           </a:ln>
           <a:effectLst/>
         </p:spPr>
@@ -9634,8 +10358,8 @@
         </p:nvSpPr>
         <p:spPr>
           <a:xfrm>
-            <a:off x="1285241" y="5916167"/>
-            <a:ext cx="6390638" cy="274320"/>
+            <a:off x="548640" y="6080760"/>
+            <a:ext cx="5120640" cy="365760"/>
           </a:xfrm>
           <a:prstGeom prst="rect">
             <a:avLst/>
@@ -9654,13 +10378,13 @@
               </a:lnSpc>
             </a:pPr>
             <a:r>
-              <a:rPr sz="1300" b="0">
-                <a:solidFill>
-                  <a:srgbClr val="E8EEF6"/>
-                </a:solidFill>
-                <a:latin typeface="Segoe UI"/>
-              </a:rPr>
-              <a:t>Приоритет обследования и сравнение районов</a:t>
+              <a:rPr sz="1600" b="0">
+                <a:solidFill>
+                  <a:srgbClr val="9AAAC0"/>
+                </a:solidFill>
+                <a:latin typeface="Segoe UI"/>
+              </a:rPr>
+              <a:t>Манильский залив, T+36 ч</a:t>
             </a:r>
           </a:p>
         </p:txBody>
@@ -9673,8 +10397,8 @@
         </p:nvSpPr>
         <p:spPr>
           <a:xfrm>
-            <a:off x="8778240" y="2743200"/>
-            <a:ext cx="2926080" cy="1463040"/>
+            <a:off x="5029200" y="2331720"/>
+            <a:ext cx="6583680" cy="1280160"/>
           </a:xfrm>
           <a:prstGeom prst="rect">
             <a:avLst/>
@@ -9695,11 +10419,11 @@
             <a:r>
               <a:rPr sz="8800" b="1">
                 <a:solidFill>
-                  <a:srgbClr val="FF6B5A"/>
-                </a:solidFill>
-                <a:latin typeface="Segoe UI"/>
-              </a:rPr>
-              <a:t>10</a:t>
+                  <a:srgbClr val="FF6B4A"/>
+                </a:solidFill>
+                <a:latin typeface="Segoe UI"/>
+              </a:rPr>
+              <a:t>11</a:t>
             </a:r>
           </a:p>
         </p:txBody>
@@ -9712,8 +10436,8 @@
         </p:nvSpPr>
         <p:spPr>
           <a:xfrm>
-            <a:off x="8778240" y="4251960"/>
-            <a:ext cx="2926080" cy="822960"/>
+            <a:off x="5029200" y="3703320"/>
+            <a:ext cx="6583680" cy="1463040"/>
           </a:xfrm>
           <a:prstGeom prst="rect">
             <a:avLst/>
@@ -9728,33 +10452,49 @@
           <a:p>
             <a:pPr algn="l">
               <a:lnSpc>
-                <a:spcPct val="110000"/>
-              </a:lnSpc>
-            </a:pPr>
-            <a:r>
-              <a:rPr sz="1800" b="0">
-                <a:solidFill>
-                  <a:srgbClr val="8C9DB5"/>
-                </a:solidFill>
-                <a:latin typeface="Segoe UI"/>
-              </a:rPr>
-              <a:t>зон на район: ранг,</a:t>
-            </a:r>
-          </a:p>
-          <a:p>
-            <a:pPr algn="l">
-              <a:lnSpc>
-                <a:spcPct val="110000"/>
-              </a:lnSpc>
-            </a:pPr>
-            <a:r>
-              <a:rPr sz="1800" b="0">
-                <a:solidFill>
-                  <a:srgbClr val="8C9DB5"/>
-                </a:solidFill>
-                <a:latin typeface="Segoe UI"/>
-              </a:rPr>
-              <a:t>координаты, причина</a:t>
+                <a:spcPct val="115000"/>
+              </a:lnSpc>
+            </a:pPr>
+            <a:r>
+              <a:rPr sz="2000" b="0">
+                <a:solidFill>
+                  <a:srgbClr val="9AAAC0"/>
+                </a:solidFill>
+                <a:latin typeface="Segoe UI"/>
+              </a:rPr>
+              <a:t>снимков с прогнозом дрейфа</a:t>
+            </a:r>
+          </a:p>
+          <a:p>
+            <a:pPr algn="l">
+              <a:lnSpc>
+                <a:spcPct val="115000"/>
+              </a:lnSpc>
+            </a:pPr>
+            <a:r>
+              <a:rPr sz="2000" b="0">
+                <a:solidFill>
+                  <a:srgbClr val="9AAAC0"/>
+                </a:solidFill>
+                <a:latin typeface="Segoe UI"/>
+              </a:rPr>
+              <a:t>OpenDrift + течения HYCOM + ветер GFS</a:t>
+            </a:r>
+          </a:p>
+          <a:p>
+            <a:pPr algn="l">
+              <a:lnSpc>
+                <a:spcPct val="115000"/>
+              </a:lnSpc>
+            </a:pPr>
+            <a:r>
+              <a:rPr sz="2000" b="0">
+                <a:solidFill>
+                  <a:srgbClr val="9AAAC0"/>
+                </a:solidFill>
+                <a:latin typeface="Segoe UI"/>
+              </a:rPr>
+              <a:t>облако — разброс ветрового сноса 1–3 %</a:t>
             </a:r>
           </a:p>
         </p:txBody>
@@ -9793,14 +10533,14 @@
         </p:nvSpPr>
         <p:spPr>
           <a:xfrm>
-            <a:off x="548640" y="502920"/>
-            <a:ext cx="73152" cy="384048"/>
+            <a:off x="548640" y="457200"/>
+            <a:ext cx="73152" cy="329184"/>
           </a:xfrm>
           <a:prstGeom prst="rect">
             <a:avLst/>
           </a:prstGeom>
           <a:solidFill>
-            <a:srgbClr val="FF6B5A"/>
+            <a:srgbClr val="FF6B4A"/>
           </a:solidFill>
           <a:ln>
             <a:noFill/>
@@ -9837,8 +10577,8 @@
         </p:nvSpPr>
         <p:spPr>
           <a:xfrm>
-            <a:off x="777240" y="475488"/>
-            <a:ext cx="8229600" cy="274320"/>
+            <a:off x="777240" y="457200"/>
+            <a:ext cx="8229600" cy="320040"/>
           </a:xfrm>
           <a:prstGeom prst="rect">
             <a:avLst/>
@@ -9857,13 +10597,13 @@
               </a:lnSpc>
             </a:pPr>
             <a:r>
-              <a:rPr sz="1200" b="1">
-                <a:solidFill>
-                  <a:srgbClr val="8C9DB5"/>
-                </a:solidFill>
-                <a:latin typeface="Segoe UI"/>
-              </a:rPr>
-              <a:t>СОГЛАСИЕ МОДЕЛЕЙ</a:t>
+              <a:rPr sz="1400" b="1">
+                <a:solidFill>
+                  <a:srgbClr val="9AAAC0"/>
+                </a:solidFill>
+                <a:latin typeface="Segoe UI"/>
+              </a:rPr>
+              <a:t>СКОРОСТЬ И ГОТОВНОСТЬ</a:t>
             </a:r>
           </a:p>
         </p:txBody>
@@ -9876,8 +10616,8 @@
         </p:nvSpPr>
         <p:spPr>
           <a:xfrm>
-            <a:off x="548640" y="960120"/>
-            <a:ext cx="11094415" cy="1188720"/>
+            <a:off x="548640" y="914400"/>
+            <a:ext cx="11094415" cy="1097280"/>
           </a:xfrm>
           <a:prstGeom prst="rect">
             <a:avLst/>
@@ -9896,13 +10636,13 @@
               </a:lnSpc>
             </a:pPr>
             <a:r>
-              <a:rPr sz="3200" b="1">
+              <a:rPr sz="3000" b="1">
                 <a:solidFill>
                   <a:srgbClr val="E8EEF6"/>
                 </a:solidFill>
                 <a:latin typeface="Segoe UI"/>
               </a:rPr>
-              <a:t>Уверенная находка: две разные модели видят объект в пределах 20 м</a:t>
+              <a:t>300 чипов с холодного старта — 5,7 с; новый датасет — 3 команды</a:t>
             </a:r>
           </a:p>
         </p:txBody>
@@ -9915,7 +10655,7 @@
         </p:nvSpPr>
         <p:spPr>
           <a:xfrm>
-            <a:off x="10271455" y="6400800"/>
+            <a:off x="10271455" y="6446520"/>
             <a:ext cx="1371600" cy="274320"/>
           </a:xfrm>
           <a:prstGeom prst="rect">
@@ -9935,13 +10675,13 @@
               </a:lnSpc>
             </a:pPr>
             <a:r>
-              <a:rPr sz="1100" b="0">
-                <a:solidFill>
-                  <a:srgbClr val="8C9DB5"/>
-                </a:solidFill>
-                <a:latin typeface="Segoe UI"/>
-              </a:rPr>
-              <a:t>9 / 12</a:t>
+              <a:rPr sz="1200" b="0">
+                <a:solidFill>
+                  <a:srgbClr val="9AAAC0"/>
+                </a:solidFill>
+                <a:latin typeface="Segoe UI"/>
+              </a:rPr>
+              <a:t>9 / 10</a:t>
             </a:r>
           </a:p>
         </p:txBody>
@@ -9954,7 +10694,7 @@
         </p:nvSpPr>
         <p:spPr>
           <a:xfrm>
-            <a:off x="548640" y="6400800"/>
+            <a:off x="548640" y="6446520"/>
             <a:ext cx="7315200" cy="274320"/>
           </a:xfrm>
           <a:prstGeom prst="rect">
@@ -9974,60 +10714,189 @@
               </a:lnSpc>
             </a:pPr>
             <a:r>
-              <a:rPr sz="1100" b="0">
-                <a:solidFill>
-                  <a:srgbClr val="8C9DB5"/>
-                </a:solidFill>
-                <a:latin typeface="Segoe UI"/>
-              </a:rPr>
-              <a:t>Макропластик · Sentinel-2</a:t>
-            </a:r>
-          </a:p>
-        </p:txBody>
-      </p:sp>
-      <p:pic>
-        <p:nvPicPr>
-          <p:cNvPr id="7" name="Picture 6" descr="detection_card.jpg"/>
-          <p:cNvPicPr>
-            <a:picLocks noChangeAspect="1"/>
-          </p:cNvPicPr>
-          <p:nvPr/>
-        </p:nvPicPr>
-        <p:blipFill>
-          <a:blip r:embed="rId2"/>
-          <a:stretch>
-            <a:fillRect/>
-          </a:stretch>
-        </p:blipFill>
-        <p:spPr>
-          <a:xfrm>
-            <a:off x="1148081" y="2514600"/>
-            <a:ext cx="6664958" cy="3749039"/>
-          </a:xfrm>
-          <a:prstGeom prst="rect">
-            <a:avLst/>
-          </a:prstGeom>
-        </p:spPr>
-      </p:pic>
-      <p:sp>
-        <p:nvSpPr>
-          <p:cNvPr id="8" name="Rectangle 7"/>
+              <a:rPr sz="1200" b="0">
+                <a:solidFill>
+                  <a:srgbClr val="9AAAC0"/>
+                </a:solidFill>
+                <a:latin typeface="Segoe UI"/>
+              </a:rPr>
+              <a:t>Морской мусор · Sentinel-2</a:t>
+            </a:r>
+          </a:p>
+        </p:txBody>
+      </p:sp>
+      <p:sp>
+        <p:nvSpPr>
+          <p:cNvPr id="7" name="TextBox 6"/>
+          <p:cNvSpPr txBox="1"/>
+          <p:nvPr/>
+        </p:nvSpPr>
+        <p:spPr>
+          <a:xfrm>
+            <a:off x="548640" y="2423160"/>
+            <a:ext cx="3840480" cy="1280160"/>
+          </a:xfrm>
+          <a:prstGeom prst="rect">
+            <a:avLst/>
+          </a:prstGeom>
+          <a:noFill/>
+        </p:spPr>
+        <p:txBody>
+          <a:bodyPr wrap="square" anchor="t" lIns="0" rIns="0" tIns="0" bIns="0">
+            <a:spAutoFit/>
+          </a:bodyPr>
+          <a:lstStyle/>
+          <a:p>
+            <a:pPr algn="l">
+              <a:lnSpc>
+                <a:spcPct val="90000"/>
+              </a:lnSpc>
+            </a:pPr>
+            <a:r>
+              <a:rPr sz="8800" b="1">
+                <a:solidFill>
+                  <a:srgbClr val="FF6B4A"/>
+                </a:solidFill>
+                <a:latin typeface="Segoe UI"/>
+              </a:rPr>
+              <a:t>5,7 с</a:t>
+            </a:r>
+          </a:p>
+        </p:txBody>
+      </p:sp>
+      <p:sp>
+        <p:nvSpPr>
+          <p:cNvPr id="8" name="TextBox 7"/>
+          <p:cNvSpPr txBox="1"/>
+          <p:nvPr/>
+        </p:nvSpPr>
+        <p:spPr>
+          <a:xfrm>
+            <a:off x="548640" y="3794760"/>
+            <a:ext cx="3840480" cy="1463040"/>
+          </a:xfrm>
+          <a:prstGeom prst="rect">
+            <a:avLst/>
+          </a:prstGeom>
+          <a:noFill/>
+        </p:spPr>
+        <p:txBody>
+          <a:bodyPr wrap="square" anchor="t" lIns="0" rIns="0" tIns="0" bIns="0">
+            <a:spAutoFit/>
+          </a:bodyPr>
+          <a:lstStyle/>
+          <a:p>
+            <a:pPr algn="l">
+              <a:lnSpc>
+                <a:spcPct val="115000"/>
+              </a:lnSpc>
+            </a:pPr>
+            <a:r>
+              <a:rPr sz="2000" b="0">
+                <a:solidFill>
+                  <a:srgbClr val="9AAAC0"/>
+                </a:solidFill>
+                <a:latin typeface="Segoe UI"/>
+              </a:rPr>
+              <a:t>GPU RTX 4070</a:t>
+            </a:r>
+          </a:p>
+          <a:p>
+            <a:pPr algn="l">
+              <a:lnSpc>
+                <a:spcPct val="115000"/>
+              </a:lnSpc>
+            </a:pPr>
+            <a:r>
+              <a:rPr sz="2000" b="0">
+                <a:solidFill>
+                  <a:srgbClr val="9AAAC0"/>
+                </a:solidFill>
+                <a:latin typeface="Segoe UI"/>
+              </a:rPr>
+              <a:t>CPU: 21,4 с (i5-13600KF)</a:t>
+            </a:r>
+          </a:p>
+          <a:p>
+            <a:pPr algn="l">
+              <a:lnSpc>
+                <a:spcPct val="115000"/>
+              </a:lnSpc>
+            </a:pPr>
+            <a:r>
+              <a:rPr sz="2000" b="0">
+                <a:solidFill>
+                  <a:srgbClr val="9AAAC0"/>
+                </a:solidFill>
+                <a:latin typeface="Segoe UI"/>
+              </a:rPr>
+              <a:t>выход бит в бит</a:t>
+            </a:r>
+          </a:p>
+        </p:txBody>
+      </p:sp>
+      <p:sp>
+        <p:nvSpPr>
+          <p:cNvPr id="9" name="TextBox 8"/>
+          <p:cNvSpPr txBox="1"/>
+          <p:nvPr/>
+        </p:nvSpPr>
+        <p:spPr>
+          <a:xfrm>
+            <a:off x="4754880" y="2240280"/>
+            <a:ext cx="6858000" cy="411480"/>
+          </a:xfrm>
+          <a:prstGeom prst="rect">
+            <a:avLst/>
+          </a:prstGeom>
+          <a:noFill/>
+        </p:spPr>
+        <p:txBody>
+          <a:bodyPr wrap="square" anchor="t" lIns="0" rIns="0" tIns="0" bIns="0">
+            <a:spAutoFit/>
+          </a:bodyPr>
+          <a:lstStyle/>
+          <a:p>
+            <a:pPr algn="l">
+              <a:lnSpc>
+                <a:spcPct val="110000"/>
+              </a:lnSpc>
+            </a:pPr>
+            <a:r>
+              <a:rPr sz="2000" b="1">
+                <a:solidFill>
+                  <a:srgbClr val="9AAAC0"/>
+                </a:solidFill>
+                <a:latin typeface="Segoe UI"/>
+              </a:rPr>
+              <a:t>Данные организаторов → модель</a:t>
+            </a:r>
+          </a:p>
+        </p:txBody>
+      </p:sp>
+      <p:sp>
+        <p:nvSpPr>
+          <p:cNvPr id="10" name="Rounded Rectangle 9"/>
           <p:cNvSpPr/>
           <p:nvPr/>
         </p:nvSpPr>
         <p:spPr>
           <a:xfrm>
-            <a:off x="1148081" y="5852159"/>
-            <a:ext cx="6664958" cy="411480"/>
-          </a:xfrm>
-          <a:prstGeom prst="rect">
-            <a:avLst/>
+            <a:off x="4754880" y="2788920"/>
+            <a:ext cx="6858000" cy="731520"/>
+          </a:xfrm>
+          <a:prstGeom prst="roundRect">
+            <a:avLst>
+              <a:gd name="adj" fmla="val 8000"/>
+            </a:avLst>
           </a:prstGeom>
           <a:solidFill>
-            <a:srgbClr val="0A111F"/>
+            <a:srgbClr val="121C2E"/>
           </a:solidFill>
-          <a:ln>
-            <a:noFill/>
+          <a:ln w="19050">
+            <a:solidFill>
+              <a:srgbClr val="2A3A55"/>
+            </a:solidFill>
           </a:ln>
           <a:effectLst/>
         </p:spPr>
@@ -10055,22 +10924,22 @@
       </p:sp>
       <p:sp>
         <p:nvSpPr>
-          <p:cNvPr id="9" name="TextBox 8"/>
+          <p:cNvPr id="11" name="TextBox 10"/>
           <p:cNvSpPr txBox="1"/>
           <p:nvPr/>
         </p:nvSpPr>
         <p:spPr>
           <a:xfrm>
-            <a:off x="1285241" y="5916167"/>
-            <a:ext cx="6390638" cy="274320"/>
-          </a:xfrm>
-          <a:prstGeom prst="rect">
-            <a:avLst/>
-          </a:prstGeom>
-          <a:noFill/>
-        </p:spPr>
-        <p:txBody>
-          <a:bodyPr wrap="square" anchor="t" lIns="0" rIns="0" tIns="0" bIns="0">
+            <a:off x="4937760" y="2788920"/>
+            <a:ext cx="365760" cy="731520"/>
+          </a:xfrm>
+          <a:prstGeom prst="rect">
+            <a:avLst/>
+          </a:prstGeom>
+          <a:noFill/>
+        </p:spPr>
+        <p:txBody>
+          <a:bodyPr wrap="square" anchor="ctr" lIns="0" rIns="0" tIns="0" bIns="0">
             <a:spAutoFit/>
           </a:bodyPr>
           <a:lstStyle/>
@@ -10081,74 +10950,74 @@
               </a:lnSpc>
             </a:pPr>
             <a:r>
-              <a:rPr sz="1300" b="0">
-                <a:solidFill>
-                  <a:srgbClr val="E8EEF6"/>
-                </a:solidFill>
-                <a:latin typeface="Segoe UI"/>
-              </a:rPr>
-              <a:t>Карточка находки: вырезка снимка и согласие моделей</a:t>
-            </a:r>
-          </a:p>
-        </p:txBody>
-      </p:sp>
-      <p:sp>
-        <p:nvSpPr>
-          <p:cNvPr id="10" name="TextBox 9"/>
+              <a:rPr sz="2200" b="1">
+                <a:solidFill>
+                  <a:srgbClr val="FF6B4A"/>
+                </a:solidFill>
+                <a:latin typeface="Segoe UI"/>
+              </a:rPr>
+              <a:t>1</a:t>
+            </a:r>
+          </a:p>
+        </p:txBody>
+      </p:sp>
+      <p:sp>
+        <p:nvSpPr>
+          <p:cNvPr id="12" name="TextBox 11"/>
           <p:cNvSpPr txBox="1"/>
           <p:nvPr/>
         </p:nvSpPr>
         <p:spPr>
           <a:xfrm>
-            <a:off x="8778240" y="2743200"/>
-            <a:ext cx="2926080" cy="1463040"/>
-          </a:xfrm>
-          <a:prstGeom prst="rect">
-            <a:avLst/>
-          </a:prstGeom>
-          <a:noFill/>
-        </p:spPr>
-        <p:txBody>
-          <a:bodyPr wrap="square" anchor="t" lIns="0" rIns="0" tIns="0" bIns="0">
+            <a:off x="5349240" y="2788920"/>
+            <a:ext cx="4206240" cy="731520"/>
+          </a:xfrm>
+          <a:prstGeom prst="rect">
+            <a:avLst/>
+          </a:prstGeom>
+          <a:noFill/>
+        </p:spPr>
+        <p:txBody>
+          <a:bodyPr wrap="square" anchor="ctr" lIns="0" rIns="0" tIns="0" bIns="0">
             <a:spAutoFit/>
           </a:bodyPr>
           <a:lstStyle/>
           <a:p>
             <a:pPr algn="l">
               <a:lnSpc>
-                <a:spcPct val="90000"/>
-              </a:lnSpc>
-            </a:pPr>
-            <a:r>
-              <a:rPr sz="8800" b="1">
-                <a:solidFill>
-                  <a:srgbClr val="FF6B5A"/>
-                </a:solidFill>
-                <a:latin typeface="Segoe UI"/>
-              </a:rPr>
-              <a:t>200</a:t>
-            </a:r>
-          </a:p>
-        </p:txBody>
-      </p:sp>
-      <p:sp>
-        <p:nvSpPr>
-          <p:cNvPr id="11" name="TextBox 10"/>
+                <a:spcPct val="110000"/>
+              </a:lnSpc>
+            </a:pPr>
+            <a:r>
+              <a:rPr sz="1800" b="0">
+                <a:solidFill>
+                  <a:srgbClr val="E8EEF6"/>
+                </a:solidFill>
+                <a:latin typeface="Consolas"/>
+              </a:rPr>
+              <a:t>ingest.py архив.zip</a:t>
+            </a:r>
+          </a:p>
+        </p:txBody>
+      </p:sp>
+      <p:sp>
+        <p:nvSpPr>
+          <p:cNvPr id="13" name="TextBox 12"/>
           <p:cNvSpPr txBox="1"/>
           <p:nvPr/>
         </p:nvSpPr>
         <p:spPr>
           <a:xfrm>
-            <a:off x="8778240" y="4251960"/>
-            <a:ext cx="2926080" cy="822960"/>
-          </a:xfrm>
-          <a:prstGeom prst="rect">
-            <a:avLst/>
-          </a:prstGeom>
-          <a:noFill/>
-        </p:spPr>
-        <p:txBody>
-          <a:bodyPr wrap="square" anchor="t" lIns="0" rIns="0" tIns="0" bIns="0">
+            <a:off x="9418320" y="2788920"/>
+            <a:ext cx="2103120" cy="731520"/>
+          </a:xfrm>
+          <a:prstGeom prst="rect">
+            <a:avLst/>
+          </a:prstGeom>
+          <a:noFill/>
+        </p:spPr>
+        <p:txBody>
+          <a:bodyPr wrap="square" anchor="ctr" lIns="0" rIns="0" tIns="0" bIns="0">
             <a:spAutoFit/>
           </a:bodyPr>
           <a:lstStyle/>
@@ -10161,13 +11030,84 @@
             <a:r>
               <a:rPr sz="1800" b="0">
                 <a:solidFill>
-                  <a:srgbClr val="8C9DB5"/>
-                </a:solidFill>
-                <a:latin typeface="Segoe UI"/>
-              </a:rPr>
-              <a:t>объектов в 15 из 29</a:t>
-            </a:r>
-          </a:p>
+                  <a:srgbClr val="9AAAC0"/>
+                </a:solidFill>
+                <a:latin typeface="Segoe UI"/>
+              </a:rPr>
+              <a:t>отчёт «Сомнения»</a:t>
+            </a:r>
+          </a:p>
+        </p:txBody>
+      </p:sp>
+      <p:sp>
+        <p:nvSpPr>
+          <p:cNvPr id="14" name="Rounded Rectangle 13"/>
+          <p:cNvSpPr/>
+          <p:nvPr/>
+        </p:nvSpPr>
+        <p:spPr>
+          <a:xfrm>
+            <a:off x="4754880" y="3657600"/>
+            <a:ext cx="6858000" cy="731520"/>
+          </a:xfrm>
+          <a:prstGeom prst="roundRect">
+            <a:avLst>
+              <a:gd name="adj" fmla="val 8000"/>
+            </a:avLst>
+          </a:prstGeom>
+          <a:solidFill>
+            <a:srgbClr val="121C2E"/>
+          </a:solidFill>
+          <a:ln w="19050">
+            <a:solidFill>
+              <a:srgbClr val="2A3A55"/>
+            </a:solidFill>
+          </a:ln>
+          <a:effectLst/>
+        </p:spPr>
+        <p:style>
+          <a:lnRef idx="1">
+            <a:schemeClr val="accent1"/>
+          </a:lnRef>
+          <a:fillRef idx="3">
+            <a:schemeClr val="accent1"/>
+          </a:fillRef>
+          <a:effectRef idx="2">
+            <a:schemeClr val="accent1"/>
+          </a:effectRef>
+          <a:fontRef idx="minor">
+            <a:schemeClr val="lt1"/>
+          </a:fontRef>
+        </p:style>
+        <p:txBody>
+          <a:bodyPr rtlCol="0" anchor="ctr"/>
+          <a:lstStyle/>
+          <a:p>
+            <a:pPr algn="ctr"/>
+          </a:p>
+        </p:txBody>
+      </p:sp>
+      <p:sp>
+        <p:nvSpPr>
+          <p:cNvPr id="15" name="TextBox 14"/>
+          <p:cNvSpPr txBox="1"/>
+          <p:nvPr/>
+        </p:nvSpPr>
+        <p:spPr>
+          <a:xfrm>
+            <a:off x="4937760" y="3657600"/>
+            <a:ext cx="365760" cy="731520"/>
+          </a:xfrm>
+          <a:prstGeom prst="rect">
+            <a:avLst/>
+          </a:prstGeom>
+          <a:noFill/>
+        </p:spPr>
+        <p:txBody>
+          <a:bodyPr wrap="square" anchor="ctr" lIns="0" rIns="0" tIns="0" bIns="0">
+            <a:spAutoFit/>
+          </a:bodyPr>
+          <a:lstStyle/>
           <a:p>
             <a:pPr algn="l">
               <a:lnSpc>
@@ -10175,13 +11115,256 @@
               </a:lnSpc>
             </a:pPr>
             <a:r>
+              <a:rPr sz="2200" b="1">
+                <a:solidFill>
+                  <a:srgbClr val="FF6B4A"/>
+                </a:solidFill>
+                <a:latin typeface="Segoe UI"/>
+              </a:rPr>
+              <a:t>2</a:t>
+            </a:r>
+          </a:p>
+        </p:txBody>
+      </p:sp>
+      <p:sp>
+        <p:nvSpPr>
+          <p:cNvPr id="16" name="TextBox 15"/>
+          <p:cNvSpPr txBox="1"/>
+          <p:nvPr/>
+        </p:nvSpPr>
+        <p:spPr>
+          <a:xfrm>
+            <a:off x="5349240" y="3657600"/>
+            <a:ext cx="4206240" cy="731520"/>
+          </a:xfrm>
+          <a:prstGeom prst="rect">
+            <a:avLst/>
+          </a:prstGeom>
+          <a:noFill/>
+        </p:spPr>
+        <p:txBody>
+          <a:bodyPr wrap="square" anchor="ctr" lIns="0" rIns="0" tIns="0" bIns="0">
+            <a:spAutoFit/>
+          </a:bodyPr>
+          <a:lstStyle/>
+          <a:p>
+            <a:pPr algn="l">
+              <a:lnSpc>
+                <a:spcPct val="110000"/>
+              </a:lnSpc>
+            </a:pPr>
+            <a:r>
               <a:rPr sz="1800" b="0">
                 <a:solidFill>
-                  <a:srgbClr val="8C9DB5"/>
-                </a:solidFill>
-                <a:latin typeface="Segoe UI"/>
-              </a:rPr>
-              <a:t>сцен; не проверка на месте</a:t>
+                  <a:srgbClr val="E8EEF6"/>
+                </a:solidFill>
+                <a:latin typeface="Consolas"/>
+              </a:rPr>
+              <a:t>ingest.py архив.zip --convert</a:t>
+            </a:r>
+          </a:p>
+        </p:txBody>
+      </p:sp>
+      <p:sp>
+        <p:nvSpPr>
+          <p:cNvPr id="17" name="TextBox 16"/>
+          <p:cNvSpPr txBox="1"/>
+          <p:nvPr/>
+        </p:nvSpPr>
+        <p:spPr>
+          <a:xfrm>
+            <a:off x="9418320" y="3657600"/>
+            <a:ext cx="2103120" cy="731520"/>
+          </a:xfrm>
+          <a:prstGeom prst="rect">
+            <a:avLst/>
+          </a:prstGeom>
+          <a:noFill/>
+        </p:spPr>
+        <p:txBody>
+          <a:bodyPr wrap="square" anchor="ctr" lIns="0" rIns="0" tIns="0" bIns="0">
+            <a:spAutoFit/>
+          </a:bodyPr>
+          <a:lstStyle/>
+          <a:p>
+            <a:pPr algn="l">
+              <a:lnSpc>
+                <a:spcPct val="110000"/>
+              </a:lnSpc>
+            </a:pPr>
+            <a:r>
+              <a:rPr sz="1800" b="0">
+                <a:solidFill>
+                  <a:srgbClr val="9AAAC0"/>
+                </a:solidFill>
+                <a:latin typeface="Segoe UI"/>
+              </a:rPr>
+              <a:t>наш формат</a:t>
+            </a:r>
+          </a:p>
+        </p:txBody>
+      </p:sp>
+      <p:sp>
+        <p:nvSpPr>
+          <p:cNvPr id="18" name="Rounded Rectangle 17"/>
+          <p:cNvSpPr/>
+          <p:nvPr/>
+        </p:nvSpPr>
+        <p:spPr>
+          <a:xfrm>
+            <a:off x="4754880" y="4526280"/>
+            <a:ext cx="6858000" cy="731520"/>
+          </a:xfrm>
+          <a:prstGeom prst="roundRect">
+            <a:avLst>
+              <a:gd name="adj" fmla="val 8000"/>
+            </a:avLst>
+          </a:prstGeom>
+          <a:solidFill>
+            <a:srgbClr val="121C2E"/>
+          </a:solidFill>
+          <a:ln w="19050">
+            <a:solidFill>
+              <a:srgbClr val="2A3A55"/>
+            </a:solidFill>
+          </a:ln>
+          <a:effectLst/>
+        </p:spPr>
+        <p:style>
+          <a:lnRef idx="1">
+            <a:schemeClr val="accent1"/>
+          </a:lnRef>
+          <a:fillRef idx="3">
+            <a:schemeClr val="accent1"/>
+          </a:fillRef>
+          <a:effectRef idx="2">
+            <a:schemeClr val="accent1"/>
+          </a:effectRef>
+          <a:fontRef idx="minor">
+            <a:schemeClr val="lt1"/>
+          </a:fontRef>
+        </p:style>
+        <p:txBody>
+          <a:bodyPr rtlCol="0" anchor="ctr"/>
+          <a:lstStyle/>
+          <a:p>
+            <a:pPr algn="ctr"/>
+          </a:p>
+        </p:txBody>
+      </p:sp>
+      <p:sp>
+        <p:nvSpPr>
+          <p:cNvPr id="19" name="TextBox 18"/>
+          <p:cNvSpPr txBox="1"/>
+          <p:nvPr/>
+        </p:nvSpPr>
+        <p:spPr>
+          <a:xfrm>
+            <a:off x="4937760" y="4526280"/>
+            <a:ext cx="365760" cy="731520"/>
+          </a:xfrm>
+          <a:prstGeom prst="rect">
+            <a:avLst/>
+          </a:prstGeom>
+          <a:noFill/>
+        </p:spPr>
+        <p:txBody>
+          <a:bodyPr wrap="square" anchor="ctr" lIns="0" rIns="0" tIns="0" bIns="0">
+            <a:spAutoFit/>
+          </a:bodyPr>
+          <a:lstStyle/>
+          <a:p>
+            <a:pPr algn="l">
+              <a:lnSpc>
+                <a:spcPct val="110000"/>
+              </a:lnSpc>
+            </a:pPr>
+            <a:r>
+              <a:rPr sz="2200" b="1">
+                <a:solidFill>
+                  <a:srgbClr val="FF6B4A"/>
+                </a:solidFill>
+                <a:latin typeface="Segoe UI"/>
+              </a:rPr>
+              <a:t>3</a:t>
+            </a:r>
+          </a:p>
+        </p:txBody>
+      </p:sp>
+      <p:sp>
+        <p:nvSpPr>
+          <p:cNvPr id="20" name="TextBox 19"/>
+          <p:cNvSpPr txBox="1"/>
+          <p:nvPr/>
+        </p:nvSpPr>
+        <p:spPr>
+          <a:xfrm>
+            <a:off x="5349240" y="4526280"/>
+            <a:ext cx="4206240" cy="731520"/>
+          </a:xfrm>
+          <a:prstGeom prst="rect">
+            <a:avLst/>
+          </a:prstGeom>
+          <a:noFill/>
+        </p:spPr>
+        <p:txBody>
+          <a:bodyPr wrap="square" anchor="ctr" lIns="0" rIns="0" tIns="0" bIns="0">
+            <a:spAutoFit/>
+          </a:bodyPr>
+          <a:lstStyle/>
+          <a:p>
+            <a:pPr algn="l">
+              <a:lnSpc>
+                <a:spcPct val="110000"/>
+              </a:lnSpc>
+            </a:pPr>
+            <a:r>
+              <a:rPr sz="1800" b="0">
+                <a:solidFill>
+                  <a:srgbClr val="E8EEF6"/>
+                </a:solidFill>
+                <a:latin typeface="Consolas"/>
+              </a:rPr>
+              <a:t>train_lgbm_ingest.py</a:t>
+            </a:r>
+          </a:p>
+        </p:txBody>
+      </p:sp>
+      <p:sp>
+        <p:nvSpPr>
+          <p:cNvPr id="21" name="TextBox 20"/>
+          <p:cNvSpPr txBox="1"/>
+          <p:nvPr/>
+        </p:nvSpPr>
+        <p:spPr>
+          <a:xfrm>
+            <a:off x="9418320" y="4526280"/>
+            <a:ext cx="2103120" cy="731520"/>
+          </a:xfrm>
+          <a:prstGeom prst="rect">
+            <a:avLst/>
+          </a:prstGeom>
+          <a:noFill/>
+        </p:spPr>
+        <p:txBody>
+          <a:bodyPr wrap="square" anchor="ctr" lIns="0" rIns="0" tIns="0" bIns="0">
+            <a:spAutoFit/>
+          </a:bodyPr>
+          <a:lstStyle/>
+          <a:p>
+            <a:pPr algn="l">
+              <a:lnSpc>
+                <a:spcPct val="110000"/>
+              </a:lnSpc>
+            </a:pPr>
+            <a:r>
+              <a:rPr sz="1800" b="0">
+                <a:solidFill>
+                  <a:srgbClr val="9AAAC0"/>
+                </a:solidFill>
+                <a:latin typeface="Segoe UI"/>
+              </a:rPr>
+              <a:t>обучение ≈ 4,5 с</a:t>
             </a:r>
           </a:p>
         </p:txBody>
@@ -10512,4 +11695,324 @@
   </a:objectDefaults>
   <a:extraClrSchemeLst/>
 </a:theme>
+</file>
+
+<file path=ppt/theme/theme2.xml><?xml version="1.0" encoding="utf-8"?>
+<a:theme xmlns:a="http://schemas.openxmlformats.org/drawingml/2006/main" name="Office Theme">
+  <a:themeElements>
+    <a:clrScheme name="Office">
+      <a:dk1>
+        <a:sysClr val="windowText" lastClr="000000"/>
+      </a:dk1>
+      <a:lt1>
+        <a:sysClr val="window" lastClr="FFFFFF"/>
+      </a:lt1>
+      <a:dk2>
+        <a:srgbClr val="1F497D"/>
+      </a:dk2>
+      <a:lt2>
+        <a:srgbClr val="EEECE1"/>
+      </a:lt2>
+      <a:accent1>
+        <a:srgbClr val="4F81BD"/>
+      </a:accent1>
+      <a:accent2>
+        <a:srgbClr val="C0504D"/>
+      </a:accent2>
+      <a:accent3>
+        <a:srgbClr val="9BBB59"/>
+      </a:accent3>
+      <a:accent4>
+        <a:srgbClr val="8064A2"/>
+      </a:accent4>
+      <a:accent5>
+        <a:srgbClr val="4BACC6"/>
+      </a:accent5>
+      <a:accent6>
+        <a:srgbClr val="F79646"/>
+      </a:accent6>
+      <a:hlink>
+        <a:srgbClr val="0000FF"/>
+      </a:hlink>
+      <a:folHlink>
+        <a:srgbClr val="800080"/>
+      </a:folHlink>
+    </a:clrScheme>
+    <a:fontScheme name="Office">
+      <a:majorFont>
+        <a:latin typeface="Calibri"/>
+        <a:ea typeface=""/>
+        <a:cs typeface=""/>
+        <a:font script="Jpan" typeface="ＭＳ Ｐゴシック"/>
+        <a:font script="Hang" typeface="맑은 고딕"/>
+        <a:font script="Hans" typeface="宋体"/>
+        <a:font script="Hant" typeface="新細明體"/>
+        <a:font script="Arab" typeface="Times New Roman"/>
+        <a:font script="Hebr" typeface="Times New Roman"/>
+        <a:font script="Thai" typeface="Angsana New"/>
+        <a:font script="Ethi" typeface="Nyala"/>
+        <a:font script="Beng" typeface="Vrinda"/>
+        <a:font script="Gujr" typeface="Shruti"/>
+        <a:font script="Khmr" typeface="MoolBoran"/>
+        <a:font script="Knda" typeface="Tunga"/>
+        <a:font script="Guru" typeface="Raavi"/>
+        <a:font script="Cans" typeface="Euphemia"/>
+        <a:font script="Cher" typeface="Plantagenet Cherokee"/>
+        <a:font script="Yiii" typeface="Microsoft Yi Baiti"/>
+        <a:font script="Tibt" typeface="Microsoft Himalaya"/>
+        <a:font script="Thaa" typeface="MV Boli"/>
+        <a:font script="Deva" typeface="Mangal"/>
+        <a:font script="Telu" typeface="Gautami"/>
+        <a:font script="Taml" typeface="Latha"/>
+        <a:font script="Syrc" typeface="Estrangelo Edessa"/>
+        <a:font script="Orya" typeface="Kalinga"/>
+        <a:font script="Mlym" typeface="Kartika"/>
+        <a:font script="Laoo" typeface="DokChampa"/>
+        <a:font script="Sinh" typeface="Iskoola Pota"/>
+        <a:font script="Mong" typeface="Mongolian Baiti"/>
+        <a:font script="Viet" typeface="Times New Roman"/>
+        <a:font script="Uigh" typeface="Microsoft Uighur"/>
+        <a:font script="Geor" typeface="Sylfaen"/>
+      </a:majorFont>
+      <a:minorFont>
+        <a:latin typeface="Calibri"/>
+        <a:ea typeface=""/>
+        <a:cs typeface=""/>
+        <a:font script="Jpan" typeface="ＭＳ Ｐゴシック"/>
+        <a:font script="Hang" typeface="맑은 고딕"/>
+        <a:font script="Hans" typeface="宋体"/>
+        <a:font script="Hant" typeface="新細明體"/>
+        <a:font script="Arab" typeface="Arial"/>
+        <a:font script="Hebr" typeface="Arial"/>
+        <a:font script="Thai" typeface="Cordia New"/>
+        <a:font script="Ethi" typeface="Nyala"/>
+        <a:font script="Beng" typeface="Vrinda"/>
+        <a:font script="Gujr" typeface="Shruti"/>
+        <a:font script="Khmr" typeface="DaunPenh"/>
+        <a:font script="Knda" typeface="Tunga"/>
+        <a:font script="Guru" typeface="Raavi"/>
+        <a:font script="Cans" typeface="Euphemia"/>
+        <a:font script="Cher" typeface="Plantagenet Cherokee"/>
+        <a:font script="Yiii" typeface="Microsoft Yi Baiti"/>
+        <a:font script="Tibt" typeface="Microsoft Himalaya"/>
+        <a:font script="Thaa" typeface="MV Boli"/>
+        <a:font script="Deva" typeface="Mangal"/>
+        <a:font script="Telu" typeface="Gautami"/>
+        <a:font script="Taml" typeface="Latha"/>
+        <a:font script="Syrc" typeface="Estrangelo Edessa"/>
+        <a:font script="Orya" typeface="Kalinga"/>
+        <a:font script="Mlym" typeface="Kartika"/>
+        <a:font script="Laoo" typeface="DokChampa"/>
+        <a:font script="Sinh" typeface="Iskoola Pota"/>
+        <a:font script="Mong" typeface="Mongolian Baiti"/>
+        <a:font script="Viet" typeface="Arial"/>
+        <a:font script="Uigh" typeface="Microsoft Uighur"/>
+        <a:font script="Geor" typeface="Sylfaen"/>
+      </a:minorFont>
+    </a:fontScheme>
+    <a:fmtScheme name="Office">
+      <a:fillStyleLst>
+        <a:solidFill>
+          <a:schemeClr val="phClr"/>
+        </a:solidFill>
+        <a:gradFill rotWithShape="1">
+          <a:gsLst>
+            <a:gs pos="0">
+              <a:schemeClr val="phClr">
+                <a:tint val="50000"/>
+                <a:satMod val="300000"/>
+              </a:schemeClr>
+            </a:gs>
+            <a:gs pos="35000">
+              <a:schemeClr val="phClr">
+                <a:tint val="37000"/>
+                <a:satMod val="300000"/>
+              </a:schemeClr>
+            </a:gs>
+            <a:gs pos="100000">
+              <a:schemeClr val="phClr">
+                <a:tint val="15000"/>
+                <a:satMod val="350000"/>
+              </a:schemeClr>
+            </a:gs>
+          </a:gsLst>
+          <a:lin ang="16200000" scaled="1"/>
+        </a:gradFill>
+        <a:gradFill rotWithShape="1">
+          <a:gsLst>
+            <a:gs pos="0">
+              <a:schemeClr val="phClr">
+                <a:tint val="100000"/>
+                <a:shade val="100000"/>
+                <a:satMod val="130000"/>
+              </a:schemeClr>
+            </a:gs>
+            <a:gs pos="100000">
+              <a:schemeClr val="phClr">
+                <a:tint val="50000"/>
+                <a:shade val="100000"/>
+                <a:satMod val="350000"/>
+              </a:schemeClr>
+            </a:gs>
+          </a:gsLst>
+          <a:lin ang="16200000" scaled="0"/>
+        </a:gradFill>
+      </a:fillStyleLst>
+      <a:lnStyleLst>
+        <a:ln w="9525" cap="flat" cmpd="sng" algn="ctr">
+          <a:solidFill>
+            <a:schemeClr val="phClr">
+              <a:shade val="95000"/>
+              <a:satMod val="105000"/>
+            </a:schemeClr>
+          </a:solidFill>
+          <a:prstDash val="solid"/>
+        </a:ln>
+        <a:ln w="25400" cap="flat" cmpd="sng" algn="ctr">
+          <a:solidFill>
+            <a:schemeClr val="phClr"/>
+          </a:solidFill>
+          <a:prstDash val="solid"/>
+        </a:ln>
+        <a:ln w="38100" cap="flat" cmpd="sng" algn="ctr">
+          <a:solidFill>
+            <a:schemeClr val="phClr"/>
+          </a:solidFill>
+          <a:prstDash val="solid"/>
+        </a:ln>
+      </a:lnStyleLst>
+      <a:effectStyleLst>
+        <a:effectStyle>
+          <a:effectLst>
+            <a:outerShdw blurRad="40000" dist="20000" dir="5400000" rotWithShape="0">
+              <a:srgbClr val="000000">
+                <a:alpha val="38000"/>
+              </a:srgbClr>
+            </a:outerShdw>
+          </a:effectLst>
+        </a:effectStyle>
+        <a:effectStyle>
+          <a:effectLst>
+            <a:outerShdw blurRad="40000" dist="23000" dir="5400000" rotWithShape="0">
+              <a:srgbClr val="000000">
+                <a:alpha val="35000"/>
+              </a:srgbClr>
+            </a:outerShdw>
+          </a:effectLst>
+        </a:effectStyle>
+        <a:effectStyle>
+          <a:effectLst>
+            <a:outerShdw blurRad="40000" dist="23000" dir="5400000" rotWithShape="0">
+              <a:srgbClr val="000000">
+                <a:alpha val="35000"/>
+              </a:srgbClr>
+            </a:outerShdw>
+          </a:effectLst>
+          <a:scene3d>
+            <a:camera prst="orthographicFront">
+              <a:rot lat="0" lon="0" rev="0"/>
+            </a:camera>
+            <a:lightRig rig="threePt" dir="t">
+              <a:rot lat="0" lon="0" rev="1200000"/>
+            </a:lightRig>
+          </a:scene3d>
+          <a:sp3d>
+            <a:bevelT w="63500" h="25400"/>
+          </a:sp3d>
+        </a:effectStyle>
+      </a:effectStyleLst>
+      <a:bgFillStyleLst>
+        <a:solidFill>
+          <a:schemeClr val="phClr"/>
+        </a:solidFill>
+        <a:gradFill rotWithShape="1">
+          <a:gsLst>
+            <a:gs pos="0">
+              <a:schemeClr val="phClr">
+                <a:tint val="40000"/>
+                <a:satMod val="350000"/>
+              </a:schemeClr>
+            </a:gs>
+            <a:gs pos="40000">
+              <a:schemeClr val="phClr">
+                <a:tint val="45000"/>
+                <a:shade val="99000"/>
+                <a:satMod val="350000"/>
+              </a:schemeClr>
+            </a:gs>
+            <a:gs pos="100000">
+              <a:schemeClr val="phClr">
+                <a:shade val="20000"/>
+                <a:satMod val="255000"/>
+              </a:schemeClr>
+            </a:gs>
+          </a:gsLst>
+          <a:path path="circle">
+            <a:fillToRect l="50000" t="-80000" r="50000" b="180000"/>
+          </a:path>
+        </a:gradFill>
+        <a:gradFill rotWithShape="1">
+          <a:gsLst>
+            <a:gs pos="0">
+              <a:schemeClr val="phClr">
+                <a:tint val="80000"/>
+                <a:satMod val="300000"/>
+              </a:schemeClr>
+            </a:gs>
+            <a:gs pos="100000">
+              <a:schemeClr val="phClr">
+                <a:shade val="30000"/>
+                <a:satMod val="200000"/>
+              </a:schemeClr>
+            </a:gs>
+          </a:gsLst>
+          <a:path path="circle">
+            <a:fillToRect l="50000" t="50000" r="50000" b="50000"/>
+          </a:path>
+        </a:gradFill>
+      </a:bgFillStyleLst>
+    </a:fmtScheme>
+  </a:themeElements>
+  <a:objectDefaults>
+    <a:spDef>
+      <a:spPr/>
+      <a:bodyPr/>
+      <a:lstStyle/>
+      <a:style>
+        <a:lnRef idx="1">
+          <a:schemeClr val="accent1"/>
+        </a:lnRef>
+        <a:fillRef idx="3">
+          <a:schemeClr val="accent1"/>
+        </a:fillRef>
+        <a:effectRef idx="2">
+          <a:schemeClr val="accent1"/>
+        </a:effectRef>
+        <a:fontRef idx="minor">
+          <a:schemeClr val="lt1"/>
+        </a:fontRef>
+      </a:style>
+    </a:spDef>
+    <a:lnDef>
+      <a:spPr/>
+      <a:bodyPr/>
+      <a:lstStyle/>
+      <a:style>
+        <a:lnRef idx="2">
+          <a:schemeClr val="accent1"/>
+        </a:lnRef>
+        <a:fillRef idx="0">
+          <a:schemeClr val="accent1"/>
+        </a:fillRef>
+        <a:effectRef idx="1">
+          <a:schemeClr val="accent1"/>
+        </a:effectRef>
+        <a:fontRef idx="minor">
+          <a:schemeClr val="tx1"/>
+        </a:fontRef>
+      </a:style>
+    </a:lnDef>
+  </a:objectDefaults>
+  <a:extraClrSchemeLst/>
+</a:theme>
 </file>
--- a/reports/deck.pptx
+++ b/reports/deck.pptx
@@ -666,7 +666,7 @@
           </a:p>
           <a:p>
             <a:r>
-              <a:t>Данные. Размеченного мусора мало: в MARIDA всего 3 399 пикселей. Поэтому добавили MADOS — ещё 118 сцен, и выкинули из него 16 сцен, которые пересекаются с проверочной выборкой. Карту строим на 29 живых снимках Sentinel-2 в 12 районах, 17 из них — 2025–2026 годов.</a:t>
+              <a:t>Данные. Размеченного мусора мало: в MARIDA всего 3 399 пикселей. Поэтому добавили MADOS — ещё 118 сцен, и выкинули из него 16 сцен, которые пересекаются с проверочной выборкой. Карту строим на 48 живых снимках Sentinel-2 в 12 районах, 36 из них — 2025–2026 годов.</a:t>
             </a:r>
           </a:p>
         </p:txBody>
@@ -966,7 +966,7 @@
           </a:p>
           <a:p>
             <a:r>
-              <a:t>[Обзор уже на экране] 12 районов, 29 дат, справа рейтинг «где искать в первую очередь». [клик: Манильский залив] Снимок Sentinel-2, кольца — найденные пятна. На живых снимках L2A основной слой — открытая модель marinedebrisdetector, наша модель — второй слой. [клик по крупному пятну] Карточка находки: вырезка снимка, площадь помеченной области, уверенность модели.</a:t>
+              <a:t>[Обзор уже на экране] 12 районов, 48 дат, справа рейтинг «где искать в первую очередь». [клик: Манильский залив] Снимок Sentinel-2, кольца — найденные пятна. На живых снимках L2A основной слой — открытая модель marinedebrisdetector, наша модель — второй слой. [клик по крупному пятну] Карточка находки: вырезка снимка, площадь помеченной области, уверенность модели.</a:t>
             </a:r>
           </a:p>
         </p:txBody>
@@ -1041,7 +1041,7 @@
           </a:p>
           <a:p>
             <a:r>
-              <a:t>[Слои → Приоритет обследования → клик по зоне №1] Зоны — ответ на вопрос «куда плыть». Каждая объясняет, почему она первая: пиксели с признаками, умноженные на уверенность и на повторяемость по датам. Двойное кольцо — уверенная находка: объект видят две разные модели в радиусе 20 метров, таких 200. Это согласие моделей, не проверка на месте.</a:t>
+              <a:t>[Слои → Приоритет обследования → клик по зоне №1] Зоны — ответ на вопрос «куда плыть». Каждая объясняет, почему она первая: пиксели с признаками, умноженные на уверенность и на повторяемость по датам. Двойное кольцо — уверенная находка: пятно видят две разные модели в радиусе 20 метров, таких 250 по всем датам. Это согласие моделей, не проверка на месте.</a:t>
             </a:r>
           </a:p>
         </p:txBody>
@@ -1191,7 +1191,7 @@
           </a:p>
           <a:p>
             <a:r>
-              <a:t>Скорость. 300 чипов с холодного старта — 5,7 секунды на GPU и 21,4 на CPU, результат бит в бит тот же, что до ускорения. Ваш датасет подключаем тремя командами: разбор архива с отчётом о сомнениях, конвертация, обучение. Бустинг обучается за 4,5 секунды. Если каналов меньше, например только RGB, — переобучаем на доступных, потери мы заранее измерили.</a:t>
+              <a:t>Скорость. 300 чипов с холодного старта — 5,7 секунды на GPU; на процессоре 21,7 секунды на 20 потоках и 37,9 на 8 — это честное ограничение: ускорения без потери качества на новом районе мы не нашли. Ваш датасет подключаем тремя командами. На репетиции с незнакомым архивом первый сабмит ушёл через 40 секунд после распаковки, а обучение на их train подняло скрытый F1 с 0,058 до 0,317.</a:t>
             </a:r>
           </a:p>
         </p:txBody>
@@ -5593,7 +5593,7 @@
                 </a:solidFill>
                 <a:latin typeface="Segoe UI"/>
               </a:rPr>
-              <a:t>на 300 чипов</a:t>
+              <a:t>300 чипов на GPU; CPU 8 потоков — 37,9 с</a:t>
             </a:r>
           </a:p>
         </p:txBody>
@@ -6749,7 +6749,7 @@
                 </a:solidFill>
                 <a:latin typeface="Segoe UI"/>
               </a:rPr>
-              <a:t>29 живых снимков</a:t>
+              <a:t>48 живых снимков</a:t>
             </a:r>
           </a:p>
           <a:p>
@@ -6781,7 +6781,7 @@
                 </a:solidFill>
                 <a:latin typeface="Segoe UI"/>
               </a:rPr>
-              <a:t>17 — 2025–2026</a:t>
+              <a:t>36 — 2025–2026</a:t>
             </a:r>
           </a:p>
           <a:p>
@@ -9316,7 +9316,7 @@
                 </a:solidFill>
                 <a:latin typeface="Segoe UI"/>
               </a:rPr>
-              <a:t>12 районов, 29 дат: карта показывает, где искать первым</a:t>
+              <a:t>12 районов, 48 дат: карта показывает, где искать первым</a:t>
             </a:r>
           </a:p>
         </p:txBody>
@@ -9980,7 +9980,7 @@
                 </a:solidFill>
                 <a:latin typeface="Segoe UI"/>
               </a:rPr>
-              <a:t>200</a:t>
+              <a:t>250</a:t>
             </a:r>
           </a:p>
         </p:txBody>
@@ -10019,7 +10019,7 @@
                 </a:solidFill>
                 <a:latin typeface="Segoe UI"/>
               </a:rPr>
-              <a:t>объектов видят обе модели в радиусе 20 м</a:t>
+              <a:t>пятен видят обе модели в радиусе 20 м</a:t>
             </a:r>
           </a:p>
           <a:p>
@@ -10035,7 +10035,7 @@
                 </a:solidFill>
                 <a:latin typeface="Segoe UI"/>
               </a:rPr>
-              <a:t>(15 из 29 снимков)</a:t>
+              <a:t>(на 27 из 48 дат)</a:t>
             </a:r>
           </a:p>
           <a:p>
@@ -10423,7 +10423,7 @@
                 </a:solidFill>
                 <a:latin typeface="Segoe UI"/>
               </a:rPr>
-              <a:t>11</a:t>
+              <a:t>28</a:t>
             </a:r>
           </a:p>
         </p:txBody>
@@ -10642,7 +10642,7 @@
                 </a:solidFill>
                 <a:latin typeface="Segoe UI"/>
               </a:rPr>
-              <a:t>300 чипов с холодного старта — 5,7 с; новый датасет — 3 команды</a:t>
+              <a:t>300 чипов — 5,7 с на GPU; первый сабмит на чужих данных — 40 с</a:t>
             </a:r>
           </a:p>
         </p:txBody>
@@ -10798,7 +10798,7 @@
                 </a:solidFill>
                 <a:latin typeface="Segoe UI"/>
               </a:rPr>
-              <a:t>GPU RTX 4070</a:t>
+              <a:t>GPU RTX 4070, холодный старт</a:t>
             </a:r>
           </a:p>
           <a:p>
@@ -10814,7 +10814,7 @@
                 </a:solidFill>
                 <a:latin typeface="Segoe UI"/>
               </a:rPr>
-              <a:t>CPU: 21,4 с (i5-13600KF)</a:t>
+              <a:t>CPU: 21,7 с / 20 потоков,</a:t>
             </a:r>
           </a:p>
           <a:p>
@@ -10830,7 +10830,7 @@
                 </a:solidFill>
                 <a:latin typeface="Segoe UI"/>
               </a:rPr>
-              <a:t>выход бит в бит</a:t>
+              <a:t>37,9 с / 8, 81,1 с / 4</a:t>
             </a:r>
           </a:p>
         </p:txBody>
@@ -11365,6 +11365,45 @@
                 <a:latin typeface="Segoe UI"/>
               </a:rPr>
               <a:t>обучение ≈ 4,5 с</a:t>
+            </a:r>
+          </a:p>
+        </p:txBody>
+      </p:sp>
+      <p:sp>
+        <p:nvSpPr>
+          <p:cNvPr id="22" name="TextBox 21"/>
+          <p:cNvSpPr txBox="1"/>
+          <p:nvPr/>
+        </p:nvSpPr>
+        <p:spPr>
+          <a:xfrm>
+            <a:off x="4754880" y="5440680"/>
+            <a:ext cx="6858000" cy="731520"/>
+          </a:xfrm>
+          <a:prstGeom prst="rect">
+            <a:avLst/>
+          </a:prstGeom>
+          <a:noFill/>
+        </p:spPr>
+        <p:txBody>
+          <a:bodyPr wrap="square" anchor="t" lIns="0" rIns="0" tIns="0" bIns="0">
+            <a:spAutoFit/>
+          </a:bodyPr>
+          <a:lstStyle/>
+          <a:p>
+            <a:pPr algn="l">
+              <a:lnSpc>
+                <a:spcPct val="110000"/>
+              </a:lnSpc>
+            </a:pPr>
+            <a:r>
+              <a:rPr sz="1800" b="0">
+                <a:solidFill>
+                  <a:srgbClr val="9AAAC0"/>
+                </a:solidFill>
+                <a:latin typeface="Segoe UI"/>
+              </a:rPr>
+              <a:t>Репетиция: скрытый F1 0,058 «как есть» → 0,317 после обучения на их train</a:t>
             </a:r>
           </a:p>
         </p:txBody>

--- a/reports/deck.pptx
+++ b/reports/deck.pptx
@@ -666,7 +666,7 @@
           </a:p>
           <a:p>
             <a:r>
-              <a:t>Данные. Размеченного мусора мало: в MARIDA всего 3 399 пикселей. Поэтому добавили MADOS — ещё 118 сцен, и выкинули из него 16 сцен, которые пересекаются с проверочной выборкой. Карту строим на 48 живых снимках Sentinel-2 в 12 районах, 36 из них — 2025–2026 годов.</a:t>
+              <a:t>Данные. Размеченного мусора мало: в MARIDA всего 3 399 пикселей. Поэтому добавили MADOS — ещё 118 сцен, и выкинули из него 16 сцен, которые пересекаются с проверочной выборкой. Карту строим на 64 живых снимках Sentinel-2 в 18 районах, 52 из них — 2025–2026 годов.</a:t>
             </a:r>
           </a:p>
         </p:txBody>
@@ -966,7 +966,7 @@
           </a:p>
           <a:p>
             <a:r>
-              <a:t>[Обзор уже на экране] 12 районов, 48 дат, справа рейтинг «где искать в первую очередь». [клик: Манильский залив] Снимок Sentinel-2, кольца — найденные пятна. На живых снимках L2A основной слой — открытая модель marinedebrisdetector, наша модель — второй слой. [клик по крупному пятну] Карточка находки: вырезка снимка, площадь помеченной области, уверенность модели.</a:t>
+              <a:t>[Обзор уже на экране] 18 районов, 64 дат, справа рейтинг «где искать в первую очередь». [клик: Манильский залив] Снимок Sentinel-2, кольца — найденные пятна. На живых снимках L2A основной слой — открытая модель marinedebrisdetector, наша модель — второй слой. [клик по крупному пятну] Карточка находки: вырезка снимка, площадь помеченной области, уверенность модели.</a:t>
             </a:r>
           </a:p>
         </p:txBody>
@@ -1041,7 +1041,7 @@
           </a:p>
           <a:p>
             <a:r>
-              <a:t>[Слои → Приоритет обследования → клик по зоне №1] Зоны — ответ на вопрос «куда плыть». Каждая объясняет, почему она первая: пиксели с признаками, умноженные на уверенность и на повторяемость по датам. Двойное кольцо — уверенная находка: пятно видят две разные модели в радиусе 20 метров, таких 250 по всем датам. Это согласие моделей, не проверка на месте.</a:t>
+              <a:t>[Слои → Приоритет обследования → клик по зоне №1] Зоны — ответ на вопрос «куда плыть». Каждая объясняет, почему она первая: пиксели с признаками, умноженные на уверенность и на повторяемость по датам. Двойное кольцо — уверенная находка: пятно видят две разные модели в радиусе 20 метров, таких 360 по всем датам. Это согласие моделей, не проверка на месте.</a:t>
             </a:r>
           </a:p>
         </p:txBody>
@@ -5428,7 +5428,7 @@
                 </a:solidFill>
                 <a:latin typeface="Segoe UI"/>
               </a:rPr>
-              <a:t>12</a:t>
+              <a:t>18</a:t>
             </a:r>
           </a:p>
         </p:txBody>
@@ -6749,7 +6749,7 @@
                 </a:solidFill>
                 <a:latin typeface="Segoe UI"/>
               </a:rPr>
-              <a:t>48 живых снимков</a:t>
+              <a:t>64 живых снимков</a:t>
             </a:r>
           </a:p>
           <a:p>
@@ -6765,7 +6765,7 @@
                 </a:solidFill>
                 <a:latin typeface="Segoe UI"/>
               </a:rPr>
-              <a:t>12 районов</a:t>
+              <a:t>18 районов</a:t>
             </a:r>
           </a:p>
           <a:p>
@@ -6781,7 +6781,7 @@
                 </a:solidFill>
                 <a:latin typeface="Segoe UI"/>
               </a:rPr>
-              <a:t>36 — 2025–2026</a:t>
+              <a:t>52 — 2025–2026</a:t>
             </a:r>
           </a:p>
           <a:p>
@@ -9316,7 +9316,7 @@
                 </a:solidFill>
                 <a:latin typeface="Segoe UI"/>
               </a:rPr>
-              <a:t>12 районов, 48 дат: карта показывает, где искать первым</a:t>
+              <a:t>18 районов, 64 дат: карта показывает, где искать первым</a:t>
             </a:r>
           </a:p>
         </p:txBody>
@@ -9980,7 +9980,7 @@
                 </a:solidFill>
                 <a:latin typeface="Segoe UI"/>
               </a:rPr>
-              <a:t>250</a:t>
+              <a:t>360</a:t>
             </a:r>
           </a:p>
         </p:txBody>
@@ -10035,7 +10035,7 @@
                 </a:solidFill>
                 <a:latin typeface="Segoe UI"/>
               </a:rPr>
-              <a:t>(на 27 из 48 дат)</a:t>
+              <a:t>(на 42 из 64 дат)</a:t>
             </a:r>
           </a:p>
           <a:p>
@@ -10423,7 +10423,7 @@
                 </a:solidFill>
                 <a:latin typeface="Segoe UI"/>
               </a:rPr>
-              <a:t>28</a:t>
+              <a:t>44</a:t>
             </a:r>
           </a:p>
         </p:txBody>

--- a/reports/deck.pptx
+++ b/reports/deck.pptx
@@ -966,7 +966,7 @@
           </a:p>
           <a:p>
             <a:r>
-              <a:t>[Обзор уже на экране] 18 районов, 64 дат, справа рейтинг «где искать в первую очередь». [клик: Манильский залив] Снимок Sentinel-2, кольца — найденные пятна. На живых снимках L2A основной слой — открытая модель marinedebrisdetector, наша модель — второй слой. [клик по крупному пятну] Карточка находки: вырезка снимка, площадь помеченной области, уверенность модели.</a:t>
+              <a:t>[Обзор уже на экране] 18 районов, 64 даты, справа рейтинг «где искать в первую очередь». [клик: Манильский залив] Снимок Sentinel-2, кольца — найденные пятна. На живых снимках L2A основной слой — открытая модель marinedebrisdetector, наша модель — второй слой. [клик по крупному пятну] Карточка находки: вырезка снимка, площадь помеченной области, уверенность модели.</a:t>
             </a:r>
           </a:p>
         </p:txBody>
@@ -9316,7 +9316,7 @@
                 </a:solidFill>
                 <a:latin typeface="Segoe UI"/>
               </a:rPr>
-              <a:t>18 районов, 64 дат: карта показывает, где искать первым</a:t>
+              <a:t>18 районов, 64 даты: карта показывает, где искать первым</a:t>
             </a:r>
           </a:p>
         </p:txBody>

--- a/reports/deck.pptx
+++ b/reports/deck.pptx
@@ -1041,7 +1041,7 @@
           </a:p>
           <a:p>
             <a:r>
-              <a:t>[Слои → Приоритет обследования → клик по зоне №1] Зоны — ответ на вопрос «куда плыть». Каждая объясняет, почему она первая: пиксели с признаками, умноженные на уверенность и на повторяемость по датам. Двойное кольцо — уверенная находка: пятно видят две разные модели в радиусе 20 метров, таких 360 по всем датам. Это согласие моделей, не проверка на месте.</a:t>
+              <a:t>[Слои → Приоритет обследования → клик по зоне №1] Зоны — ответ на вопрос «куда плыть». Каждая объясняет, почему она первая: пиксели с признаками, умноженные на уверенность и на повторяемость по датам. Двойное кольцо — уверенная находка: пятно видят две разные модели в радиусе 20 метров, таких 297 по всем датам. Это согласие моделей, не проверка на месте.</a:t>
             </a:r>
           </a:p>
         </p:txBody>
@@ -9980,7 +9980,7 @@
                 </a:solidFill>
                 <a:latin typeface="Segoe UI"/>
               </a:rPr>
-              <a:t>360</a:t>
+              <a:t>297</a:t>
             </a:r>
           </a:p>
         </p:txBody>
@@ -10035,7 +10035,7 @@
                 </a:solidFill>
                 <a:latin typeface="Segoe UI"/>
               </a:rPr>
-              <a:t>(на 42 из 64 дат)</a:t>
+              <a:t>(на 38 из 64 дат)</a:t>
             </a:r>
           </a:p>
           <a:p>

--- a/reports/deck.pptx
+++ b/reports/deck.pptx
@@ -966,7 +966,7 @@
           </a:p>
           <a:p>
             <a:r>
-              <a:t>[Обзор уже на экране] 18 районов, 64 даты, справа рейтинг «где искать в первую очередь». [клик: Манильский залив] Снимок Sentinel-2, кольца — найденные пятна. На живых снимках L2A основной слой — открытая модель marinedebrisdetector, наша модель — второй слой. [клик по крупному пятну] Карточка находки: вырезка снимка, площадь помеченной области, уверенность модели.</a:t>
+              <a:t>[Обзор уже на экране] 18 районов, 64 даты, справа рейтинг «где искать в первую очередь». [клик: Мумбаи в надёжном рейтинге] Снимок Sentinel-2 от 01.01.2026, кольца — найденные пятна. На живых снимках L2A основной слой — открытая модель marinedebrisdetector, наша модель — второй слой. [клик по крупному пятну] Карточка находки: вырезка снимка, площадь помеченной области, уверенность модели.</a:t>
             </a:r>
           </a:p>
         </p:txBody>
@@ -1041,7 +1041,7 @@
           </a:p>
           <a:p>
             <a:r>
-              <a:t>[Слои → Приоритет обследования → клик по зоне №1] Зоны — ответ на вопрос «куда плыть». Каждая объясняет, почему она первая: пиксели с признаками, умноженные на уверенность и на повторяемость по датам. Двойное кольцо — уверенная находка: пятно видят две разные модели в радиусе 20 метров, таких 297 по всем датам. Это согласие моделей, не проверка на месте.</a:t>
+              <a:t>[Слои → Приоритет обследования → клик по зоне №1] Зоны — ответ на вопрос «куда плыть». Каждая объясняет, почему она первая: пиксели с признаками, умноженные на уверенность, повторяемость по датам и согласие моделей; снимок с дымкой или бликом получает половину балла, а шов детекторов, кильватер и суда в балл не входят. Двойное кольцо — уверенная находка: пятно видят две разные модели в радиусе 20 метров, таких 297 по всем датам. Это согласие моделей, не проверка на месте.</a:t>
             </a:r>
           </a:p>
         </p:txBody>
@@ -8165,7 +8165,7 @@
         </p:nvSpPr>
         <p:spPr>
           <a:xfrm>
-            <a:off x="4206240" y="2240280"/>
+            <a:off x="4023360" y="2240280"/>
             <a:ext cx="2423160" cy="2011680"/>
           </a:xfrm>
           <a:prstGeom prst="roundRect">
@@ -8213,7 +8213,7 @@
         </p:nvSpPr>
         <p:spPr>
           <a:xfrm>
-            <a:off x="4407408" y="2404872"/>
+            <a:off x="4224528" y="2404872"/>
             <a:ext cx="2020824" cy="548640"/>
           </a:xfrm>
           <a:prstGeom prst="rect">
@@ -8252,7 +8252,7 @@
         </p:nvSpPr>
         <p:spPr>
           <a:xfrm>
-            <a:off x="4407408" y="2846831"/>
+            <a:off x="4224528" y="2846831"/>
             <a:ext cx="2020824" cy="1463040"/>
           </a:xfrm>
           <a:prstGeom prst="rect">
@@ -8307,7 +8307,7 @@
         </p:nvSpPr>
         <p:spPr>
           <a:xfrm>
-            <a:off x="6812280" y="2240280"/>
+            <a:off x="6629400" y="2240280"/>
             <a:ext cx="2423160" cy="2011680"/>
           </a:xfrm>
           <a:prstGeom prst="roundRect">
@@ -8355,7 +8355,7 @@
         </p:nvSpPr>
         <p:spPr>
           <a:xfrm>
-            <a:off x="7013448" y="2404872"/>
+            <a:off x="6830568" y="2404872"/>
             <a:ext cx="2020824" cy="548640"/>
           </a:xfrm>
           <a:prstGeom prst="rect">
@@ -8394,7 +8394,7 @@
         </p:nvSpPr>
         <p:spPr>
           <a:xfrm>
-            <a:off x="7013448" y="2846831"/>
+            <a:off x="6830568" y="2846831"/>
             <a:ext cx="2020824" cy="1463040"/>
           </a:xfrm>
           <a:prstGeom prst="rect">
@@ -8465,7 +8465,7 @@
         </p:nvSpPr>
         <p:spPr>
           <a:xfrm>
-            <a:off x="9418320" y="2240280"/>
+            <a:off x="9235440" y="2240280"/>
             <a:ext cx="2423160" cy="2011680"/>
           </a:xfrm>
           <a:prstGeom prst="roundRect">
@@ -8514,7 +8514,7 @@
         </p:nvSpPr>
         <p:spPr>
           <a:xfrm>
-            <a:off x="9619488" y="2404872"/>
+            <a:off x="9436608" y="2404872"/>
             <a:ext cx="2020824" cy="548640"/>
           </a:xfrm>
           <a:prstGeom prst="rect">
@@ -8553,7 +8553,7 @@
         </p:nvSpPr>
         <p:spPr>
           <a:xfrm>
-            <a:off x="9619488" y="2846831"/>
+            <a:off x="9436608" y="2846831"/>
             <a:ext cx="2020824" cy="1463040"/>
           </a:xfrm>
           <a:prstGeom prst="rect">
@@ -8608,7 +8608,7 @@
         </p:nvSpPr>
         <p:spPr>
           <a:xfrm>
-            <a:off x="4206240" y="4572000"/>
+            <a:off x="4023360" y="4572000"/>
             <a:ext cx="7589520" cy="914400"/>
           </a:xfrm>
           <a:prstGeom prst="rect">
@@ -9168,7 +9168,7 @@
                 </a:solidFill>
                 <a:latin typeface="Segoe UI"/>
               </a:rPr>
-              <a:t>Манильский залив: индекс по ячейкам H3</a:t>
+              <a:t>Мумбаи: индекс по ячейкам H3</a:t>
             </a:r>
           </a:p>
         </p:txBody>
@@ -9501,7 +9501,7 @@
                 </a:solidFill>
                 <a:latin typeface="Segoe UI"/>
               </a:rPr>
-              <a:t>Обзор: рейтинг «где искать первым»</a:t>
+              <a:t>Обзор: 18 районов, рейтинг «где искать первым»</a:t>
             </a:r>
           </a:p>
         </p:txBody>
@@ -9608,7 +9608,7 @@
                 </a:solidFill>
                 <a:latin typeface="Segoe UI"/>
               </a:rPr>
-              <a:t>Карточка находки</a:t>
+              <a:t>Находка: Мумбаи, 01.01.2026</a:t>
             </a:r>
           </a:p>
         </p:txBody>
@@ -9941,7 +9941,7 @@
                 </a:solidFill>
                 <a:latin typeface="Segoe UI"/>
               </a:rPr>
-              <a:t>Зона №1: «почему это место первое»</a:t>
+              <a:t>Мумбаи, зона №1: «почему она первая»</a:t>
             </a:r>
           </a:p>
         </p:txBody>
@@ -10299,7 +10299,7 @@
         <p:spPr>
           <a:xfrm>
             <a:off x="548640" y="2103120"/>
-            <a:ext cx="3571102" cy="3886200"/>
+            <a:ext cx="3865193" cy="3886200"/>
           </a:xfrm>
           <a:prstGeom prst="rect">
             <a:avLst/>
@@ -10315,7 +10315,7 @@
         <p:spPr>
           <a:xfrm>
             <a:off x="548640" y="2103120"/>
-            <a:ext cx="3571102" cy="3886200"/>
+            <a:ext cx="3865193" cy="3886200"/>
           </a:xfrm>
           <a:prstGeom prst="rect">
             <a:avLst/>
@@ -10384,7 +10384,7 @@
                 </a:solidFill>
                 <a:latin typeface="Segoe UI"/>
               </a:rPr>
-              <a:t>Манильский залив, T+36 ч</a:t>
+              <a:t>Мумбаи: дрейф от пятен 01.01.2026, T+36 ч</a:t>
             </a:r>
           </a:p>
         </p:txBody>

--- a/reports/deck.pptx
+++ b/reports/deck.pptx
@@ -1041,7 +1041,7 @@
           </a:p>
           <a:p>
             <a:r>
-              <a:t>[Слои → Приоритет обследования → клик по зоне №1] Зоны — ответ на вопрос «куда плыть». Каждая объясняет, почему она первая: пиксели с признаками, умноженные на уверенность, повторяемость по датам и согласие моделей; снимок с дымкой или бликом получает половину балла, а шов детекторов, кильватер и суда в балл не входят. Двойное кольцо — уверенная находка: пятно видят две разные модели в радиусе 20 метров, таких 297 по всем датам. Это согласие моделей, не проверка на месте.</a:t>
+              <a:t>[Слои → Приоритет обследования → клик по зоне №1] Зоны — ответ на вопрос «куда плыть». Каждая объясняет, почему она первая: пиксели с признаками, умноженные на уверенность, повторяемость по датам и согласие моделей; снимок с дымкой или бликом получает половину балла, а шов детекторов, кильватер и суда в балл не входят. Двойное кольцо — уверенная находка: пятно видят две разные модели в радиусе 20 метров, таких 294 по всем датам. Это согласие моделей, не проверка на месте.</a:t>
             </a:r>
           </a:p>
         </p:txBody>
@@ -9980,7 +9980,7 @@
                 </a:solidFill>
                 <a:latin typeface="Segoe UI"/>
               </a:rPr>
-              <a:t>297</a:t>
+              <a:t>294</a:t>
             </a:r>
           </a:p>
         </p:txBody>

--- a/reports/deck.pptx
+++ b/reports/deck.pptx
@@ -1041,7 +1041,7 @@
           </a:p>
           <a:p>
             <a:r>
-              <a:t>[Слои → Приоритет обследования → клик по зоне №1] Зоны — ответ на вопрос «куда плыть». Каждая объясняет, почему она первая: пиксели с признаками, умноженные на уверенность, повторяемость по датам и согласие моделей; снимок с дымкой или бликом получает половину балла, а шов детекторов, кильватер и суда в балл не входят. Двойное кольцо — уверенная находка: пятно видят две разные модели в радиусе 20 метров, таких 294 по всем датам. Это согласие моделей, не проверка на месте.</a:t>
+              <a:t>[Слои → Приоритет обследования → клик по зоне №1] Зоны — ответ на вопрос «куда плыть». Каждая объясняет, почему она первая: пиксели с признаками, умноженные на уверенность, повторяемость по датам и согласие моделей; снимок с дымкой или бликом получает половину балла, а шов детекторов, кильватер и суда в балл не входят. Двойное кольцо — уверенная находка: пятно видят две разные модели в радиусе 20 метров, таких 290 по всем датам. Это согласие моделей, не проверка на месте.</a:t>
             </a:r>
           </a:p>
         </p:txBody>
@@ -9980,7 +9980,7 @@
                 </a:solidFill>
                 <a:latin typeface="Segoe UI"/>
               </a:rPr>
-              <a:t>294</a:t>
+              <a:t>290</a:t>
             </a:r>
           </a:p>
         </p:txBody>

--- a/reports/deck.pptx
+++ b/reports/deck.pptx
@@ -966,7 +966,7 @@
           </a:p>
           <a:p>
             <a:r>
-              <a:t>[Обзор уже на экране] 18 районов, 64 даты, справа рейтинг «где искать в первую очередь». [клик: Мумбаи в надёжном рейтинге] Снимок Sentinel-2 от 01.01.2026, кольца — найденные пятна. На живых снимках L2A основной слой — открытая модель marinedebrisdetector, наша модель — второй слой. [клик по крупному пятну] Карточка находки: вырезка снимка, площадь помеченной области, уверенность модели.</a:t>
+              <a:t>[Обзор уже на экране] 18 районов, 64 даты, справа рейтинг «где искать в первую очередь». [клик: Гондурасский залив в надёжном рейтинге] Снимок Sentinel-2 от 30.05.2026, кольца — найденные пятна. На живых снимках L2A основной слой — открытая модель marinedebrisdetector, наша модель — второй слой. [клик по крупному пятну] Карточка находки: вырезка снимка, площадь помеченной области, уверенность модели.</a:t>
             </a:r>
           </a:p>
         </p:txBody>
@@ -1041,7 +1041,7 @@
           </a:p>
           <a:p>
             <a:r>
-              <a:t>[Слои → Приоритет обследования → клик по зоне №1] Зоны — ответ на вопрос «куда плыть». Каждая объясняет, почему она первая: пиксели с признаками, умноженные на уверенность, повторяемость по датам и согласие моделей; снимок с дымкой или бликом получает половину балла, а шов детекторов, кильватер и суда в балл не входят. Двойное кольцо — уверенная находка: пятно видят две разные модели в радиусе 20 метров, таких 290 по всем датам. Это согласие моделей, не проверка на месте.</a:t>
+              <a:t>[Слои → Приоритет обследования → клик по зоне №1] Зоны — ответ на вопрос «куда плыть». Каждая объясняет, почему она первая: пиксели с признаками, умноженные на уверенность, повторяемость по датам и согласие моделей; снимок с дымкой или бликом получает половину балла, а шов детекторов, кильватер и суда в балл не входят. Двойное кольцо — уверенная находка: пятно видят две разные модели в радиусе 20 метров, таких 287 по всем датам. Это согласие моделей, не проверка на месте.</a:t>
             </a:r>
           </a:p>
         </p:txBody>
@@ -9980,7 +9980,7 @@
                 </a:solidFill>
                 <a:latin typeface="Segoe UI"/>
               </a:rPr>
-              <a:t>290</a:t>
+              <a:t>287</a:t>
             </a:r>
           </a:p>
         </p:txBody>

--- a/reports/deck.pptx
+++ b/reports/deck.pptx
@@ -1116,7 +1116,7 @@
           </a:p>
           <a:p>
             <a:r>
-              <a:t>[Слои → Дрейф 0→72 ч → ▶] Дрейф на 72 часа: OpenDrift, течения HYCOM, ветер GFS; сиреневое облако — разброс ветрового сноса. Это демонстрация, мы её не валидировали. [Alt+Tab в презентацию, набрать 9 и Enter]</a:t>
+              <a:t>[Слои → Дрейф 0→72 ч → ▶] Дрейф на 72 часа: OpenDrift, течения HYCOM, ветер GFS; сиреневое облако — разброс ветрового сноса. Это демонстрация: на 18 парах снимков прогноз не лучше базовой линии «на месте». [Alt+Tab в презентацию, набрать 9 и Enter]</a:t>
             </a:r>
           </a:p>
         </p:txBody>
